--- a/Unused/b-Office/项目报告.pptx
+++ b/Unused/b-Office/项目报告.pptx
@@ -2467,55 +2467,6 @@
           <a:chExt cx="0" cy="0"/>
         </a:xfrm>
       </p:grpSpPr>
-      <p:pic>
-        <p:nvPicPr>
-          <p:cNvPr id="2" name="Image 0" descr="logo-ink.png">    </p:cNvPr>
-          <p:cNvPicPr>
-            <a:picLocks noChangeAspect="1"/>
-          </p:cNvPicPr>
-          <p:nvPr/>
-        </p:nvPicPr>
-        <p:blipFill>
-          <a:blip r:embed="rId1"/>
-          <a:stretch>
-            <a:fillRect/>
-          </a:stretch>
-        </p:blipFill>
-        <p:spPr>
-          <a:xfrm>
-            <a:off x="548640" y="548640"/>
-            <a:ext cx="1828800" cy="548640"/>
-          </a:xfrm>
-          <a:prstGeom prst="rect">
-            <a:avLst/>
-          </a:prstGeom>
-        </p:spPr>
-      </p:pic>
-      <p:sp>
-        <p:nvSpPr>
-          <p:cNvPr id="3" name="Shape 0"/>
-          <p:cNvSpPr/>
-          <p:nvPr/>
-        </p:nvSpPr>
-        <p:spPr>
-          <a:xfrm>
-            <a:off x="2514600" y="548640"/>
-            <a:ext cx="9128455" cy="548640"/>
-          </a:xfrm>
-          <a:prstGeom prst="rect">
-            <a:avLst/>
-          </a:prstGeom>
-          <a:solidFill>
-            <a:srgbClr val="26231E"/>
-          </a:solidFill>
-          <a:ln w="12700">
-            <a:solidFill>
-              <a:srgbClr val="26231E"/>
-            </a:solidFill>
-            <a:prstDash val="solid"/>
-          </a:ln>
-        </p:spPr>
-      </p:sp>
     </p:spTree>
   </p:cSld>
   <p:clrMapOvr>
@@ -2604,34 +2555,9 @@
           <a:chExt cx="0" cy="0"/>
         </a:xfrm>
       </p:grpSpPr>
-      <p:sp>
-        <p:nvSpPr>
-          <p:cNvPr id="2" name="Shape 0"/>
-          <p:cNvSpPr/>
-          <p:nvPr/>
-        </p:nvSpPr>
-        <p:spPr>
-          <a:xfrm>
-            <a:off x="548640" y="502920"/>
-            <a:ext cx="11094415" cy="32004"/>
-          </a:xfrm>
-          <a:prstGeom prst="rect">
-            <a:avLst/>
-          </a:prstGeom>
-          <a:solidFill>
-            <a:srgbClr val="26231E"/>
-          </a:solidFill>
-          <a:ln w="12700">
-            <a:solidFill>
-              <a:srgbClr val="26231E"/>
-            </a:solidFill>
-            <a:prstDash val="solid"/>
-          </a:ln>
-        </p:spPr>
-      </p:sp>
       <p:pic>
         <p:nvPicPr>
-          <p:cNvPr id="3" name="Image 0" descr="logo-ink.png">    </p:cNvPr>
+          <p:cNvPr id="2" name="Image 0" descr="logo-ink.png">    </p:cNvPr>
           <p:cNvPicPr>
             <a:picLocks noChangeAspect="1"/>
           </p:cNvPicPr>
@@ -3054,136 +2980,45 @@
           <a:chExt cx="0" cy="0"/>
         </a:xfrm>
       </p:grpSpPr>
-      <p:sp>
-        <p:nvSpPr>
-          <p:cNvPr id="2" name="Text 0"/>
-          <p:cNvSpPr txBox="1"/>
-          <p:nvPr/>
-        </p:nvSpPr>
-        <p:spPr>
-          <a:xfrm>
-            <a:off x="548640" y="2148840"/>
-            <a:ext cx="5486400" cy="320040"/>
-          </a:xfrm>
-          <a:prstGeom prst="rect">
-            <a:avLst/>
-          </a:prstGeom>
-          <a:noFill/>
-          <a:ln/>
-        </p:spPr>
-        <p:txBody>
-          <a:bodyPr wrap="square" lIns="0" tIns="0" rIns="0" bIns="0" rtlCol="0" anchor="t"/>
-          <a:lstStyle/>
-          <a:p>
-            <a:pPr indent="0" marL="0">
-              <a:buNone/>
-            </a:pPr>
-            <a:r>
-              <a:rPr lang="en-US" sz="1400" b="1" spc="400" kern="0" dirty="0">
-                <a:solidFill>
-                  <a:srgbClr val="26231E"/>
-                </a:solidFill>
-                <a:latin typeface="Bahnschrift" pitchFamily="34" charset="0"/>
-                <a:ea typeface="Bahnschrift" pitchFamily="34" charset="-122"/>
-                <a:cs typeface="Bahnschrift" pitchFamily="34" charset="-120"/>
-              </a:rPr>
-              <a:t>PROJECT REPORT</a:t>
-            </a:r>
-            <a:endParaRPr lang="en-US" sz="1400" dirty="0"/>
-          </a:p>
-        </p:txBody>
-      </p:sp>
-      <p:sp>
-        <p:nvSpPr>
-          <p:cNvPr id="3" name="Text 1"/>
-          <p:cNvSpPr txBox="1"/>
-          <p:nvPr/>
-        </p:nvSpPr>
-        <p:spPr>
-          <a:xfrm>
-            <a:off x="548640" y="2560320"/>
-            <a:ext cx="11094415" cy="1005840"/>
-          </a:xfrm>
-          <a:prstGeom prst="rect">
-            <a:avLst/>
-          </a:prstGeom>
-          <a:noFill/>
-          <a:ln/>
-        </p:spPr>
-        <p:txBody>
-          <a:bodyPr wrap="square" lIns="0" tIns="0" rIns="0" bIns="0" rtlCol="0" anchor="ctr"/>
-          <a:lstStyle/>
-          <a:p>
-            <a:pPr indent="0" marL="0">
-              <a:buNone/>
-            </a:pPr>
-            <a:r>
-              <a:rPr lang="en-US" sz="4800" b="1" dirty="0">
-                <a:solidFill>
-                  <a:srgbClr val="26231E"/>
-                </a:solidFill>
-                <a:latin typeface="Microsoft YaHei" pitchFamily="34" charset="0"/>
-                <a:ea typeface="Microsoft YaHei" pitchFamily="34" charset="-122"/>
-                <a:cs typeface="Microsoft YaHei" pitchFamily="34" charset="-120"/>
-              </a:rPr>
-              <a:t>项目报告标题</a:t>
-            </a:r>
-            <a:endParaRPr lang="en-US" sz="4800" dirty="0"/>
-          </a:p>
-        </p:txBody>
-      </p:sp>
-      <p:sp>
-        <p:nvSpPr>
-          <p:cNvPr id="4" name="Text 2"/>
-          <p:cNvSpPr txBox="1"/>
-          <p:nvPr/>
-        </p:nvSpPr>
-        <p:spPr>
-          <a:xfrm>
-            <a:off x="548640" y="3657600"/>
-            <a:ext cx="11094415" cy="457200"/>
-          </a:xfrm>
-          <a:prstGeom prst="rect">
-            <a:avLst/>
-          </a:prstGeom>
-          <a:noFill/>
-          <a:ln/>
-        </p:spPr>
-        <p:txBody>
-          <a:bodyPr wrap="square" lIns="0" tIns="0" rIns="0" bIns="0" rtlCol="0" anchor="t"/>
-          <a:lstStyle/>
-          <a:p>
-            <a:pPr indent="0" marL="0">
-              <a:buNone/>
-            </a:pPr>
-            <a:r>
-              <a:rPr lang="en-US" sz="2000" dirty="0">
-                <a:solidFill>
-                  <a:srgbClr val="6A6458"/>
-                </a:solidFill>
-                <a:latin typeface="Microsoft YaHei" pitchFamily="34" charset="0"/>
-                <a:ea typeface="Microsoft YaHei" pitchFamily="34" charset="-122"/>
-                <a:cs typeface="Microsoft YaHei" pitchFamily="34" charset="-120"/>
-              </a:rPr>
-              <a:t>用一句话说明本次汇报的主题与结论</a:t>
-            </a:r>
-            <a:endParaRPr lang="en-US" sz="2000" dirty="0"/>
-          </a:p>
-        </p:txBody>
-      </p:sp>
-      <p:sp>
-        <p:nvSpPr>
-          <p:cNvPr id="5" name="Shape 3"/>
+      <p:pic>
+        <p:nvPicPr>
+          <p:cNvPr id="2" name="Image 0" descr="logo-ink.png">    </p:cNvPr>
+          <p:cNvPicPr>
+            <a:picLocks noChangeAspect="1"/>
+          </p:cNvPicPr>
+          <p:nvPr/>
+        </p:nvPicPr>
+        <p:blipFill>
+          <a:blip r:embed="rId1"/>
+          <a:stretch>
+            <a:fillRect/>
+          </a:stretch>
+        </p:blipFill>
+        <p:spPr>
+          <a:xfrm>
+            <a:off x="548640" y="548640"/>
+            <a:ext cx="1828800" cy="548640"/>
+          </a:xfrm>
+          <a:prstGeom prst="rect">
+            <a:avLst/>
+          </a:prstGeom>
+        </p:spPr>
+      </p:pic>
+      <p:sp>
+        <p:nvSpPr>
+          <p:cNvPr id="3" name="Shape 0"/>
           <p:cNvSpPr/>
           <p:nvPr/>
         </p:nvSpPr>
         <p:spPr>
           <a:xfrm>
-            <a:off x="548640" y="5166360"/>
-            <a:ext cx="11094415" cy="32004"/>
-          </a:xfrm>
-          <a:prstGeom prst="rect">
-            <a:avLst/>
+            <a:off x="2514600" y="548640"/>
+            <a:ext cx="9128455" cy="548640"/>
+          </a:xfrm>
+          <a:prstGeom prst="roundRect">
+            <a:avLst>
+              <a:gd name="adj" fmla="val 15000"/>
+            </a:avLst>
           </a:prstGeom>
           <a:solidFill>
             <a:srgbClr val="26231E"/>
@@ -3198,14 +3033,14 @@
       </p:sp>
       <p:sp>
         <p:nvSpPr>
-          <p:cNvPr id="6" name="Text 4"/>
-          <p:cNvSpPr txBox="1"/>
-          <p:nvPr/>
-        </p:nvSpPr>
-        <p:spPr>
-          <a:xfrm>
-            <a:off x="685800" y="5349240"/>
-            <a:ext cx="3423818" cy="274320"/>
+          <p:cNvPr id="4" name="Text 1"/>
+          <p:cNvSpPr txBox="1"/>
+          <p:nvPr/>
+        </p:nvSpPr>
+        <p:spPr>
+          <a:xfrm>
+            <a:off x="548640" y="2148840"/>
+            <a:ext cx="5486400" cy="320040"/>
           </a:xfrm>
           <a:prstGeom prst="rect">
             <a:avLst/>
@@ -3221,30 +3056,69 @@
               <a:buNone/>
             </a:pPr>
             <a:r>
-              <a:rPr lang="en-US" sz="1100" dirty="0">
-                <a:solidFill>
-                  <a:srgbClr val="6A6458"/>
+              <a:rPr lang="en-US" sz="1400" b="1" spc="400" kern="0" dirty="0">
+                <a:solidFill>
+                  <a:srgbClr val="26231E"/>
+                </a:solidFill>
+                <a:latin typeface="Bahnschrift" pitchFamily="34" charset="0"/>
+                <a:ea typeface="Bahnschrift" pitchFamily="34" charset="-122"/>
+                <a:cs typeface="Bahnschrift" pitchFamily="34" charset="-120"/>
+              </a:rPr>
+              <a:t>PROJECT REPORT</a:t>
+            </a:r>
+            <a:endParaRPr lang="en-US" sz="1400" dirty="0"/>
+          </a:p>
+        </p:txBody>
+      </p:sp>
+      <p:sp>
+        <p:nvSpPr>
+          <p:cNvPr id="5" name="Text 2"/>
+          <p:cNvSpPr txBox="1"/>
+          <p:nvPr/>
+        </p:nvSpPr>
+        <p:spPr>
+          <a:xfrm>
+            <a:off x="548640" y="2560320"/>
+            <a:ext cx="11094415" cy="1005840"/>
+          </a:xfrm>
+          <a:prstGeom prst="rect">
+            <a:avLst/>
+          </a:prstGeom>
+          <a:noFill/>
+          <a:ln/>
+        </p:spPr>
+        <p:txBody>
+          <a:bodyPr wrap="square" lIns="0" tIns="0" rIns="0" bIns="0" rtlCol="0" anchor="ctr"/>
+          <a:lstStyle/>
+          <a:p>
+            <a:pPr indent="0" marL="0">
+              <a:buNone/>
+            </a:pPr>
+            <a:r>
+              <a:rPr lang="en-US" sz="4800" b="1" dirty="0">
+                <a:solidFill>
+                  <a:srgbClr val="26231E"/>
                 </a:solidFill>
                 <a:latin typeface="Microsoft YaHei" pitchFamily="34" charset="0"/>
                 <a:ea typeface="Microsoft YaHei" pitchFamily="34" charset="-122"/>
                 <a:cs typeface="Microsoft YaHei" pitchFamily="34" charset="-120"/>
               </a:rPr>
-              <a:t>制作人</a:t>
-            </a:r>
-            <a:endParaRPr lang="en-US" sz="1100" dirty="0"/>
-          </a:p>
-        </p:txBody>
-      </p:sp>
-      <p:sp>
-        <p:nvSpPr>
-          <p:cNvPr id="7" name="Text 5"/>
-          <p:cNvSpPr txBox="1"/>
-          <p:nvPr/>
-        </p:nvSpPr>
-        <p:spPr>
-          <a:xfrm>
-            <a:off x="685800" y="5641848"/>
-            <a:ext cx="3423818" cy="411480"/>
+              <a:t>项目报告标题</a:t>
+            </a:r>
+            <a:endParaRPr lang="en-US" sz="4800" dirty="0"/>
+          </a:p>
+        </p:txBody>
+      </p:sp>
+      <p:sp>
+        <p:nvSpPr>
+          <p:cNvPr id="6" name="Text 3"/>
+          <p:cNvSpPr txBox="1"/>
+          <p:nvPr/>
+        </p:nvSpPr>
+        <p:spPr>
+          <a:xfrm>
+            <a:off x="548640" y="3657600"/>
+            <a:ext cx="11094415" cy="457200"/>
           </a:xfrm>
           <a:prstGeom prst="rect">
             <a:avLst/>
@@ -3260,7 +3134,7 @@
               <a:buNone/>
             </a:pPr>
             <a:r>
-              <a:rPr lang="en-US" sz="1800" b="1" dirty="0">
+              <a:rPr lang="en-US" sz="2000" dirty="0">
                 <a:solidFill>
                   <a:srgbClr val="6A6458"/>
                 </a:solidFill>
@@ -3268,6 +3142,109 @@
                 <a:ea typeface="Microsoft YaHei" pitchFamily="34" charset="-122"/>
                 <a:cs typeface="Microsoft YaHei" pitchFamily="34" charset="-120"/>
               </a:rPr>
+              <a:t>用一句话说明本次汇报的主题与结论</a:t>
+            </a:r>
+            <a:endParaRPr lang="en-US" sz="2000" dirty="0"/>
+          </a:p>
+        </p:txBody>
+      </p:sp>
+      <p:sp>
+        <p:nvSpPr>
+          <p:cNvPr id="7" name="Shape 4"/>
+          <p:cNvSpPr/>
+          <p:nvPr/>
+        </p:nvSpPr>
+        <p:spPr>
+          <a:xfrm>
+            <a:off x="548640" y="5166360"/>
+            <a:ext cx="11094415" cy="32004"/>
+          </a:xfrm>
+          <a:prstGeom prst="rect">
+            <a:avLst/>
+          </a:prstGeom>
+          <a:solidFill>
+            <a:srgbClr val="26231E"/>
+          </a:solidFill>
+          <a:ln w="12700">
+            <a:solidFill>
+              <a:srgbClr val="26231E"/>
+            </a:solidFill>
+            <a:prstDash val="solid"/>
+          </a:ln>
+        </p:spPr>
+      </p:sp>
+      <p:sp>
+        <p:nvSpPr>
+          <p:cNvPr id="8" name="Text 5"/>
+          <p:cNvSpPr txBox="1"/>
+          <p:nvPr/>
+        </p:nvSpPr>
+        <p:spPr>
+          <a:xfrm>
+            <a:off x="685800" y="5349240"/>
+            <a:ext cx="3423818" cy="274320"/>
+          </a:xfrm>
+          <a:prstGeom prst="rect">
+            <a:avLst/>
+          </a:prstGeom>
+          <a:noFill/>
+          <a:ln/>
+        </p:spPr>
+        <p:txBody>
+          <a:bodyPr wrap="square" lIns="0" tIns="0" rIns="0" bIns="0" rtlCol="0" anchor="t"/>
+          <a:lstStyle/>
+          <a:p>
+            <a:pPr indent="0" marL="0">
+              <a:buNone/>
+            </a:pPr>
+            <a:r>
+              <a:rPr lang="en-US" sz="1100" dirty="0">
+                <a:solidFill>
+                  <a:srgbClr val="6A6458"/>
+                </a:solidFill>
+                <a:latin typeface="Microsoft YaHei" pitchFamily="34" charset="0"/>
+                <a:ea typeface="Microsoft YaHei" pitchFamily="34" charset="-122"/>
+                <a:cs typeface="Microsoft YaHei" pitchFamily="34" charset="-120"/>
+              </a:rPr>
+              <a:t>制作人</a:t>
+            </a:r>
+            <a:endParaRPr lang="en-US" sz="1100" dirty="0"/>
+          </a:p>
+        </p:txBody>
+      </p:sp>
+      <p:sp>
+        <p:nvSpPr>
+          <p:cNvPr id="9" name="Text 6"/>
+          <p:cNvSpPr txBox="1"/>
+          <p:nvPr/>
+        </p:nvSpPr>
+        <p:spPr>
+          <a:xfrm>
+            <a:off x="685800" y="5641848"/>
+            <a:ext cx="3423818" cy="411480"/>
+          </a:xfrm>
+          <a:prstGeom prst="rect">
+            <a:avLst/>
+          </a:prstGeom>
+          <a:noFill/>
+          <a:ln/>
+        </p:spPr>
+        <p:txBody>
+          <a:bodyPr wrap="square" lIns="0" tIns="0" rIns="0" bIns="0" rtlCol="0" anchor="t"/>
+          <a:lstStyle/>
+          <a:p>
+            <a:pPr indent="0" marL="0">
+              <a:buNone/>
+            </a:pPr>
+            <a:r>
+              <a:rPr lang="en-US" sz="1800" b="1" dirty="0">
+                <a:solidFill>
+                  <a:srgbClr val="6A6458"/>
+                </a:solidFill>
+                <a:latin typeface="Microsoft YaHei" pitchFamily="34" charset="0"/>
+                <a:ea typeface="Microsoft YaHei" pitchFamily="34" charset="-122"/>
+                <a:cs typeface="Microsoft YaHei" pitchFamily="34" charset="-120"/>
+              </a:rPr>
               <a:t>〔姓名〕</a:t>
             </a:r>
             <a:endParaRPr lang="en-US" sz="1800" dirty="0"/>
@@ -3276,7 +3253,7 @@
       </p:sp>
       <p:sp>
         <p:nvSpPr>
-          <p:cNvPr id="8" name="Shape 6"/>
+          <p:cNvPr id="10" name="Shape 7"/>
           <p:cNvSpPr/>
           <p:nvPr/>
         </p:nvSpPr>
@@ -3299,7 +3276,7 @@
       </p:sp>
       <p:sp>
         <p:nvSpPr>
-          <p:cNvPr id="9" name="Text 7"/>
+          <p:cNvPr id="11" name="Text 8"/>
           <p:cNvSpPr txBox="1"/>
           <p:nvPr/>
         </p:nvSpPr>
@@ -3338,7 +3315,7 @@
       </p:sp>
       <p:sp>
         <p:nvSpPr>
-          <p:cNvPr id="10" name="Text 8"/>
+          <p:cNvPr id="12" name="Text 9"/>
           <p:cNvSpPr txBox="1"/>
           <p:nvPr/>
         </p:nvSpPr>
@@ -3377,7 +3354,7 @@
       </p:sp>
       <p:sp>
         <p:nvSpPr>
-          <p:cNvPr id="11" name="Shape 9"/>
+          <p:cNvPr id="13" name="Shape 10"/>
           <p:cNvSpPr/>
           <p:nvPr/>
         </p:nvSpPr>
@@ -3400,7 +3377,7 @@
       </p:sp>
       <p:sp>
         <p:nvSpPr>
-          <p:cNvPr id="12" name="Text 10"/>
+          <p:cNvPr id="14" name="Text 11"/>
           <p:cNvSpPr txBox="1"/>
           <p:nvPr/>
         </p:nvSpPr>
@@ -3439,7 +3416,7 @@
       </p:sp>
       <p:sp>
         <p:nvSpPr>
-          <p:cNvPr id="13" name="Text 11"/>
+          <p:cNvPr id="15" name="Text 12"/>
           <p:cNvSpPr txBox="1"/>
           <p:nvPr/>
         </p:nvSpPr>
@@ -3478,7 +3455,7 @@
       </p:sp>
       <p:sp>
         <p:nvSpPr>
-          <p:cNvPr id="14" name="Shape 12"/>
+          <p:cNvPr id="16" name="Shape 13"/>
           <p:cNvSpPr/>
           <p:nvPr/>
         </p:nvSpPr>
@@ -3534,8 +3511,8 @@
         </p:nvSpPr>
         <p:spPr>
           <a:xfrm>
-            <a:off x="548640" y="685800"/>
-            <a:ext cx="9082735" cy="685800"/>
+            <a:off x="548640" y="566928"/>
+            <a:ext cx="11094415" cy="685800"/>
           </a:xfrm>
           <a:prstGeom prst="rect">
             <a:avLst/>
@@ -3567,70 +3544,19 @@
       </p:sp>
       <p:sp>
         <p:nvSpPr>
-          <p:cNvPr id="3" name="Text 1"/>
-          <p:cNvSpPr txBox="1"/>
-          <p:nvPr/>
-        </p:nvSpPr>
-        <p:spPr>
-          <a:xfrm>
-            <a:off x="8899855" y="685800"/>
-            <a:ext cx="2743200" cy="685800"/>
-          </a:xfrm>
-          <a:prstGeom prst="rect">
-            <a:avLst/>
-          </a:prstGeom>
-          <a:noFill/>
-          <a:ln/>
-        </p:spPr>
-        <p:txBody>
-          <a:bodyPr wrap="square" lIns="0" tIns="0" rIns="0" bIns="0" rtlCol="0" anchor="ctr"/>
-          <a:lstStyle/>
-          <a:p>
-            <a:pPr algn="r" indent="0" marL="0">
-              <a:buNone/>
-            </a:pPr>
-            <a:r>
-              <a:rPr lang="en-US" sz="1300" b="1" dirty="0">
-                <a:solidFill>
-                  <a:srgbClr val="26231E"/>
-                </a:solidFill>
-                <a:latin typeface="Bahnschrift" pitchFamily="34" charset="0"/>
-                <a:ea typeface="Bahnschrift" pitchFamily="34" charset="-122"/>
-                <a:cs typeface="Bahnschrift" pitchFamily="34" charset="-120"/>
-              </a:rPr>
-              <a:t>02</a:t>
-            </a:r>
-            <a:pPr algn="r" indent="0" marL="0">
-              <a:buNone/>
-            </a:pPr>
-            <a:r>
-              <a:rPr lang="en-US" sz="1300" dirty="0">
-                <a:solidFill>
-                  <a:srgbClr val="6A6458"/>
-                </a:solidFill>
-                <a:latin typeface="Microsoft YaHei" pitchFamily="34" charset="0"/>
-                <a:ea typeface="Microsoft YaHei" pitchFamily="34" charset="-122"/>
-                <a:cs typeface="Microsoft YaHei" pitchFamily="34" charset="-120"/>
-              </a:rPr>
-              <a:t>　设计创新点</a:t>
-            </a:r>
-            <a:endParaRPr lang="en-US" sz="1300" dirty="0"/>
-          </a:p>
-        </p:txBody>
-      </p:sp>
-      <p:sp>
-        <p:nvSpPr>
-          <p:cNvPr id="4" name="Shape 2"/>
+          <p:cNvPr id="3" name="Shape 1"/>
           <p:cNvSpPr/>
           <p:nvPr/>
         </p:nvSpPr>
         <p:spPr>
           <a:xfrm>
-            <a:off x="548640" y="1737360"/>
-            <a:ext cx="5272888" cy="32004"/>
-          </a:xfrm>
-          <a:prstGeom prst="rect">
-            <a:avLst/>
+            <a:off x="1889760" y="699516"/>
+            <a:ext cx="9753295" cy="420624"/>
+          </a:xfrm>
+          <a:prstGeom prst="roundRect">
+            <a:avLst>
+              <a:gd name="adj" fmla="val 19565"/>
+            </a:avLst>
           </a:prstGeom>
           <a:solidFill>
             <a:srgbClr val="26231E"/>
@@ -3645,119 +3571,52 @@
       </p:sp>
       <p:sp>
         <p:nvSpPr>
-          <p:cNvPr id="5" name="Text 3"/>
-          <p:cNvSpPr txBox="1"/>
-          <p:nvPr/>
-        </p:nvSpPr>
-        <p:spPr>
-          <a:xfrm>
-            <a:off x="548640" y="1901952"/>
-            <a:ext cx="914400" cy="365760"/>
-          </a:xfrm>
-          <a:prstGeom prst="rect">
-            <a:avLst/>
-          </a:prstGeom>
-          <a:noFill/>
-          <a:ln/>
-        </p:spPr>
-        <p:txBody>
-          <a:bodyPr wrap="square" lIns="0" tIns="0" rIns="0" bIns="0" rtlCol="0" anchor="t"/>
-          <a:lstStyle/>
-          <a:p>
-            <a:pPr indent="0" marL="0">
-              <a:buNone/>
-            </a:pPr>
-            <a:r>
-              <a:rPr lang="en-US" sz="1600" b="1" dirty="0">
-                <a:solidFill>
-                  <a:srgbClr val="26231E"/>
+          <p:cNvPr id="4" name="Text 2"/>
+          <p:cNvSpPr txBox="1"/>
+          <p:nvPr/>
+        </p:nvSpPr>
+        <p:spPr>
+          <a:xfrm>
+            <a:off x="1889760" y="699516"/>
+            <a:ext cx="9552127" cy="420624"/>
+          </a:xfrm>
+          <a:prstGeom prst="rect">
+            <a:avLst/>
+          </a:prstGeom>
+          <a:noFill/>
+          <a:ln/>
+        </p:spPr>
+        <p:txBody>
+          <a:bodyPr wrap="square" lIns="0" tIns="0" rIns="0" bIns="0" rtlCol="0" anchor="ctr"/>
+          <a:lstStyle/>
+          <a:p>
+            <a:pPr algn="r" indent="0" marL="0">
+              <a:buNone/>
+            </a:pPr>
+            <a:r>
+              <a:rPr lang="en-US" sz="1300" b="1" dirty="0">
+                <a:solidFill>
+                  <a:srgbClr val="D9A441"/>
                 </a:solidFill>
                 <a:latin typeface="Bahnschrift" pitchFamily="34" charset="0"/>
                 <a:ea typeface="Bahnschrift" pitchFamily="34" charset="-122"/>
                 <a:cs typeface="Bahnschrift" pitchFamily="34" charset="-120"/>
               </a:rPr>
-              <a:t>01</a:t>
-            </a:r>
-            <a:endParaRPr lang="en-US" sz="1600" dirty="0"/>
-          </a:p>
-        </p:txBody>
-      </p:sp>
-      <p:sp>
-        <p:nvSpPr>
-          <p:cNvPr id="6" name="Text 4"/>
-          <p:cNvSpPr txBox="1"/>
-          <p:nvPr/>
-        </p:nvSpPr>
-        <p:spPr>
-          <a:xfrm>
-            <a:off x="548640" y="2286000"/>
-            <a:ext cx="5272888" cy="411480"/>
-          </a:xfrm>
-          <a:prstGeom prst="rect">
-            <a:avLst/>
-          </a:prstGeom>
-          <a:noFill/>
-          <a:ln/>
-        </p:spPr>
-        <p:txBody>
-          <a:bodyPr wrap="square" lIns="0" tIns="0" rIns="0" bIns="0" rtlCol="0" anchor="t"/>
-          <a:lstStyle/>
-          <a:p>
-            <a:pPr indent="0" marL="0">
-              <a:buNone/>
-            </a:pPr>
-            <a:r>
-              <a:rPr lang="en-US" sz="1800" b="1" dirty="0">
-                <a:solidFill>
-                  <a:srgbClr val="26231E"/>
+              <a:t>02</a:t>
+            </a:r>
+            <a:pPr algn="r" indent="0" marL="0">
+              <a:buNone/>
+            </a:pPr>
+            <a:r>
+              <a:rPr lang="en-US" sz="1300" dirty="0">
+                <a:solidFill>
+                  <a:srgbClr val="FBFAF7"/>
                 </a:solidFill>
                 <a:latin typeface="Microsoft YaHei" pitchFamily="34" charset="0"/>
                 <a:ea typeface="Microsoft YaHei" pitchFamily="34" charset="-122"/>
                 <a:cs typeface="Microsoft YaHei" pitchFamily="34" charset="-120"/>
               </a:rPr>
-              <a:t>〔创新点一〕</a:t>
-            </a:r>
-            <a:endParaRPr lang="en-US" sz="1800" dirty="0"/>
-          </a:p>
-        </p:txBody>
-      </p:sp>
-      <p:sp>
-        <p:nvSpPr>
-          <p:cNvPr id="7" name="Text 5"/>
-          <p:cNvSpPr txBox="1"/>
-          <p:nvPr/>
-        </p:nvSpPr>
-        <p:spPr>
-          <a:xfrm>
-            <a:off x="548640" y="2743200"/>
-            <a:ext cx="5272888" cy="914400"/>
-          </a:xfrm>
-          <a:prstGeom prst="rect">
-            <a:avLst/>
-          </a:prstGeom>
-          <a:noFill/>
-          <a:ln/>
-        </p:spPr>
-        <p:txBody>
-          <a:bodyPr wrap="square" lIns="0" tIns="0" rIns="0" bIns="0" rtlCol="0" anchor="t"/>
-          <a:lstStyle/>
-          <a:p>
-            <a:pPr indent="0" marL="0">
-              <a:lnSpc>
-                <a:spcPct val="130000"/>
-              </a:lnSpc>
-              <a:buNone/>
-            </a:pPr>
-            <a:r>
-              <a:rPr lang="en-US" sz="1300" dirty="0">
-                <a:solidFill>
-                  <a:srgbClr val="6A6458"/>
-                </a:solidFill>
-                <a:latin typeface="Microsoft YaHei" pitchFamily="34" charset="0"/>
-                <a:ea typeface="Microsoft YaHei" pitchFamily="34" charset="-122"/>
-                <a:cs typeface="Microsoft YaHei" pitchFamily="34" charset="-120"/>
-              </a:rPr>
-              <a:t>〔解决了什么问题、怎么做的、效果如何〕</a:t>
+              <a:t>　设计创新点</a:t>
             </a:r>
             <a:endParaRPr lang="en-US" sz="1300" dirty="0"/>
           </a:p>
@@ -3765,13 +3624,13 @@
       </p:sp>
       <p:sp>
         <p:nvSpPr>
-          <p:cNvPr id="8" name="Shape 6"/>
+          <p:cNvPr id="5" name="Shape 3"/>
           <p:cNvSpPr/>
           <p:nvPr/>
         </p:nvSpPr>
         <p:spPr>
           <a:xfrm>
-            <a:off x="6370168" y="1737360"/>
+            <a:off x="548640" y="1737360"/>
             <a:ext cx="5272888" cy="32004"/>
           </a:xfrm>
           <a:prstGeom prst="rect">
@@ -3790,13 +3649,13 @@
       </p:sp>
       <p:sp>
         <p:nvSpPr>
-          <p:cNvPr id="9" name="Text 7"/>
-          <p:cNvSpPr txBox="1"/>
-          <p:nvPr/>
-        </p:nvSpPr>
-        <p:spPr>
-          <a:xfrm>
-            <a:off x="6370168" y="1901952"/>
+          <p:cNvPr id="6" name="Text 4"/>
+          <p:cNvSpPr txBox="1"/>
+          <p:nvPr/>
+        </p:nvSpPr>
+        <p:spPr>
+          <a:xfrm>
+            <a:off x="548640" y="1901952"/>
             <a:ext cx="914400" cy="365760"/>
           </a:xfrm>
           <a:prstGeom prst="rect">
@@ -3821,7 +3680,7 @@
                 <a:ea typeface="Bahnschrift" pitchFamily="34" charset="-122"/>
                 <a:cs typeface="Bahnschrift" pitchFamily="34" charset="-120"/>
               </a:rPr>
-              <a:t>02</a:t>
+              <a:t>01</a:t>
             </a:r>
             <a:endParaRPr lang="en-US" sz="1600" dirty="0"/>
           </a:p>
@@ -3829,13 +3688,13 @@
       </p:sp>
       <p:sp>
         <p:nvSpPr>
-          <p:cNvPr id="10" name="Text 8"/>
-          <p:cNvSpPr txBox="1"/>
-          <p:nvPr/>
-        </p:nvSpPr>
-        <p:spPr>
-          <a:xfrm>
-            <a:off x="6370168" y="2286000"/>
+          <p:cNvPr id="7" name="Text 5"/>
+          <p:cNvSpPr txBox="1"/>
+          <p:nvPr/>
+        </p:nvSpPr>
+        <p:spPr>
+          <a:xfrm>
+            <a:off x="548640" y="2286000"/>
             <a:ext cx="5272888" cy="411480"/>
           </a:xfrm>
           <a:prstGeom prst="rect">
@@ -3860,7 +3719,7 @@
                 <a:ea typeface="Microsoft YaHei" pitchFamily="34" charset="-122"/>
                 <a:cs typeface="Microsoft YaHei" pitchFamily="34" charset="-120"/>
               </a:rPr>
-              <a:t>〔创新点二〕</a:t>
+              <a:t>〔创新点一〕</a:t>
             </a:r>
             <a:endParaRPr lang="en-US" sz="1800" dirty="0"/>
           </a:p>
@@ -3868,13 +3727,13 @@
       </p:sp>
       <p:sp>
         <p:nvSpPr>
-          <p:cNvPr id="11" name="Text 9"/>
-          <p:cNvSpPr txBox="1"/>
-          <p:nvPr/>
-        </p:nvSpPr>
-        <p:spPr>
-          <a:xfrm>
-            <a:off x="6370168" y="2743200"/>
+          <p:cNvPr id="8" name="Text 6"/>
+          <p:cNvSpPr txBox="1"/>
+          <p:nvPr/>
+        </p:nvSpPr>
+        <p:spPr>
+          <a:xfrm>
+            <a:off x="548640" y="2743200"/>
             <a:ext cx="5272888" cy="914400"/>
           </a:xfrm>
           <a:prstGeom prst="rect">
@@ -3910,13 +3769,13 @@
       </p:sp>
       <p:sp>
         <p:nvSpPr>
-          <p:cNvPr id="12" name="Shape 10"/>
+          <p:cNvPr id="9" name="Shape 7"/>
           <p:cNvSpPr/>
           <p:nvPr/>
         </p:nvSpPr>
         <p:spPr>
           <a:xfrm>
-            <a:off x="548640" y="3977640"/>
+            <a:off x="6370168" y="1737360"/>
             <a:ext cx="5272888" cy="32004"/>
           </a:xfrm>
           <a:prstGeom prst="rect">
@@ -3935,13 +3794,13 @@
       </p:sp>
       <p:sp>
         <p:nvSpPr>
-          <p:cNvPr id="13" name="Text 11"/>
-          <p:cNvSpPr txBox="1"/>
-          <p:nvPr/>
-        </p:nvSpPr>
-        <p:spPr>
-          <a:xfrm>
-            <a:off x="548640" y="4142232"/>
+          <p:cNvPr id="10" name="Text 8"/>
+          <p:cNvSpPr txBox="1"/>
+          <p:nvPr/>
+        </p:nvSpPr>
+        <p:spPr>
+          <a:xfrm>
+            <a:off x="6370168" y="1901952"/>
             <a:ext cx="914400" cy="365760"/>
           </a:xfrm>
           <a:prstGeom prst="rect">
@@ -3966,7 +3825,7 @@
                 <a:ea typeface="Bahnschrift" pitchFamily="34" charset="-122"/>
                 <a:cs typeface="Bahnschrift" pitchFamily="34" charset="-120"/>
               </a:rPr>
-              <a:t>03</a:t>
+              <a:t>02</a:t>
             </a:r>
             <a:endParaRPr lang="en-US" sz="1600" dirty="0"/>
           </a:p>
@@ -3974,13 +3833,13 @@
       </p:sp>
       <p:sp>
         <p:nvSpPr>
-          <p:cNvPr id="14" name="Text 12"/>
-          <p:cNvSpPr txBox="1"/>
-          <p:nvPr/>
-        </p:nvSpPr>
-        <p:spPr>
-          <a:xfrm>
-            <a:off x="548640" y="4526280"/>
+          <p:cNvPr id="11" name="Text 9"/>
+          <p:cNvSpPr txBox="1"/>
+          <p:nvPr/>
+        </p:nvSpPr>
+        <p:spPr>
+          <a:xfrm>
+            <a:off x="6370168" y="2286000"/>
             <a:ext cx="5272888" cy="411480"/>
           </a:xfrm>
           <a:prstGeom prst="rect">
@@ -4005,7 +3864,7 @@
                 <a:ea typeface="Microsoft YaHei" pitchFamily="34" charset="-122"/>
                 <a:cs typeface="Microsoft YaHei" pitchFamily="34" charset="-120"/>
               </a:rPr>
-              <a:t>〔创新点三〕</a:t>
+              <a:t>〔创新点二〕</a:t>
             </a:r>
             <a:endParaRPr lang="en-US" sz="1800" dirty="0"/>
           </a:p>
@@ -4013,13 +3872,13 @@
       </p:sp>
       <p:sp>
         <p:nvSpPr>
-          <p:cNvPr id="15" name="Text 13"/>
-          <p:cNvSpPr txBox="1"/>
-          <p:nvPr/>
-        </p:nvSpPr>
-        <p:spPr>
-          <a:xfrm>
-            <a:off x="548640" y="4983480"/>
+          <p:cNvPr id="12" name="Text 10"/>
+          <p:cNvSpPr txBox="1"/>
+          <p:nvPr/>
+        </p:nvSpPr>
+        <p:spPr>
+          <a:xfrm>
+            <a:off x="6370168" y="2743200"/>
             <a:ext cx="5272888" cy="914400"/>
           </a:xfrm>
           <a:prstGeom prst="rect">
@@ -4055,13 +3914,13 @@
       </p:sp>
       <p:sp>
         <p:nvSpPr>
-          <p:cNvPr id="16" name="Shape 14"/>
+          <p:cNvPr id="13" name="Shape 11"/>
           <p:cNvSpPr/>
           <p:nvPr/>
         </p:nvSpPr>
         <p:spPr>
           <a:xfrm>
-            <a:off x="6370168" y="3977640"/>
+            <a:off x="548640" y="3977640"/>
             <a:ext cx="5272888" cy="32004"/>
           </a:xfrm>
           <a:prstGeom prst="rect">
@@ -4080,13 +3939,13 @@
       </p:sp>
       <p:sp>
         <p:nvSpPr>
-          <p:cNvPr id="17" name="Text 15"/>
-          <p:cNvSpPr txBox="1"/>
-          <p:nvPr/>
-        </p:nvSpPr>
-        <p:spPr>
-          <a:xfrm>
-            <a:off x="6370168" y="4142232"/>
+          <p:cNvPr id="14" name="Text 12"/>
+          <p:cNvSpPr txBox="1"/>
+          <p:nvPr/>
+        </p:nvSpPr>
+        <p:spPr>
+          <a:xfrm>
+            <a:off x="548640" y="4142232"/>
             <a:ext cx="914400" cy="365760"/>
           </a:xfrm>
           <a:prstGeom prst="rect">
@@ -4111,7 +3970,7 @@
                 <a:ea typeface="Bahnschrift" pitchFamily="34" charset="-122"/>
                 <a:cs typeface="Bahnschrift" pitchFamily="34" charset="-120"/>
               </a:rPr>
-              <a:t>04</a:t>
+              <a:t>03</a:t>
             </a:r>
             <a:endParaRPr lang="en-US" sz="1600" dirty="0"/>
           </a:p>
@@ -4119,13 +3978,13 @@
       </p:sp>
       <p:sp>
         <p:nvSpPr>
-          <p:cNvPr id="18" name="Text 16"/>
-          <p:cNvSpPr txBox="1"/>
-          <p:nvPr/>
-        </p:nvSpPr>
-        <p:spPr>
-          <a:xfrm>
-            <a:off x="6370168" y="4526280"/>
+          <p:cNvPr id="15" name="Text 13"/>
+          <p:cNvSpPr txBox="1"/>
+          <p:nvPr/>
+        </p:nvSpPr>
+        <p:spPr>
+          <a:xfrm>
+            <a:off x="548640" y="4526280"/>
             <a:ext cx="5272888" cy="411480"/>
           </a:xfrm>
           <a:prstGeom prst="rect">
@@ -4150,6 +4009,151 @@
                 <a:ea typeface="Microsoft YaHei" pitchFamily="34" charset="-122"/>
                 <a:cs typeface="Microsoft YaHei" pitchFamily="34" charset="-120"/>
               </a:rPr>
+              <a:t>〔创新点三〕</a:t>
+            </a:r>
+            <a:endParaRPr lang="en-US" sz="1800" dirty="0"/>
+          </a:p>
+        </p:txBody>
+      </p:sp>
+      <p:sp>
+        <p:nvSpPr>
+          <p:cNvPr id="16" name="Text 14"/>
+          <p:cNvSpPr txBox="1"/>
+          <p:nvPr/>
+        </p:nvSpPr>
+        <p:spPr>
+          <a:xfrm>
+            <a:off x="548640" y="4983480"/>
+            <a:ext cx="5272888" cy="914400"/>
+          </a:xfrm>
+          <a:prstGeom prst="rect">
+            <a:avLst/>
+          </a:prstGeom>
+          <a:noFill/>
+          <a:ln/>
+        </p:spPr>
+        <p:txBody>
+          <a:bodyPr wrap="square" lIns="0" tIns="0" rIns="0" bIns="0" rtlCol="0" anchor="t"/>
+          <a:lstStyle/>
+          <a:p>
+            <a:pPr indent="0" marL="0">
+              <a:lnSpc>
+                <a:spcPct val="130000"/>
+              </a:lnSpc>
+              <a:buNone/>
+            </a:pPr>
+            <a:r>
+              <a:rPr lang="en-US" sz="1300" dirty="0">
+                <a:solidFill>
+                  <a:srgbClr val="6A6458"/>
+                </a:solidFill>
+                <a:latin typeface="Microsoft YaHei" pitchFamily="34" charset="0"/>
+                <a:ea typeface="Microsoft YaHei" pitchFamily="34" charset="-122"/>
+                <a:cs typeface="Microsoft YaHei" pitchFamily="34" charset="-120"/>
+              </a:rPr>
+              <a:t>〔解决了什么问题、怎么做的、效果如何〕</a:t>
+            </a:r>
+            <a:endParaRPr lang="en-US" sz="1300" dirty="0"/>
+          </a:p>
+        </p:txBody>
+      </p:sp>
+      <p:sp>
+        <p:nvSpPr>
+          <p:cNvPr id="17" name="Shape 15"/>
+          <p:cNvSpPr/>
+          <p:nvPr/>
+        </p:nvSpPr>
+        <p:spPr>
+          <a:xfrm>
+            <a:off x="6370168" y="3977640"/>
+            <a:ext cx="5272888" cy="32004"/>
+          </a:xfrm>
+          <a:prstGeom prst="rect">
+            <a:avLst/>
+          </a:prstGeom>
+          <a:solidFill>
+            <a:srgbClr val="26231E"/>
+          </a:solidFill>
+          <a:ln w="12700">
+            <a:solidFill>
+              <a:srgbClr val="26231E"/>
+            </a:solidFill>
+            <a:prstDash val="solid"/>
+          </a:ln>
+        </p:spPr>
+      </p:sp>
+      <p:sp>
+        <p:nvSpPr>
+          <p:cNvPr id="18" name="Text 16"/>
+          <p:cNvSpPr txBox="1"/>
+          <p:nvPr/>
+        </p:nvSpPr>
+        <p:spPr>
+          <a:xfrm>
+            <a:off x="6370168" y="4142232"/>
+            <a:ext cx="914400" cy="365760"/>
+          </a:xfrm>
+          <a:prstGeom prst="rect">
+            <a:avLst/>
+          </a:prstGeom>
+          <a:noFill/>
+          <a:ln/>
+        </p:spPr>
+        <p:txBody>
+          <a:bodyPr wrap="square" lIns="0" tIns="0" rIns="0" bIns="0" rtlCol="0" anchor="t"/>
+          <a:lstStyle/>
+          <a:p>
+            <a:pPr indent="0" marL="0">
+              <a:buNone/>
+            </a:pPr>
+            <a:r>
+              <a:rPr lang="en-US" sz="1600" b="1" dirty="0">
+                <a:solidFill>
+                  <a:srgbClr val="26231E"/>
+                </a:solidFill>
+                <a:latin typeface="Bahnschrift" pitchFamily="34" charset="0"/>
+                <a:ea typeface="Bahnschrift" pitchFamily="34" charset="-122"/>
+                <a:cs typeface="Bahnschrift" pitchFamily="34" charset="-120"/>
+              </a:rPr>
+              <a:t>04</a:t>
+            </a:r>
+            <a:endParaRPr lang="en-US" sz="1600" dirty="0"/>
+          </a:p>
+        </p:txBody>
+      </p:sp>
+      <p:sp>
+        <p:nvSpPr>
+          <p:cNvPr id="19" name="Text 17"/>
+          <p:cNvSpPr txBox="1"/>
+          <p:nvPr/>
+        </p:nvSpPr>
+        <p:spPr>
+          <a:xfrm>
+            <a:off x="6370168" y="4526280"/>
+            <a:ext cx="5272888" cy="411480"/>
+          </a:xfrm>
+          <a:prstGeom prst="rect">
+            <a:avLst/>
+          </a:prstGeom>
+          <a:noFill/>
+          <a:ln/>
+        </p:spPr>
+        <p:txBody>
+          <a:bodyPr wrap="square" lIns="0" tIns="0" rIns="0" bIns="0" rtlCol="0" anchor="t"/>
+          <a:lstStyle/>
+          <a:p>
+            <a:pPr indent="0" marL="0">
+              <a:buNone/>
+            </a:pPr>
+            <a:r>
+              <a:rPr lang="en-US" sz="1800" b="1" dirty="0">
+                <a:solidFill>
+                  <a:srgbClr val="26231E"/>
+                </a:solidFill>
+                <a:latin typeface="Microsoft YaHei" pitchFamily="34" charset="0"/>
+                <a:ea typeface="Microsoft YaHei" pitchFamily="34" charset="-122"/>
+                <a:cs typeface="Microsoft YaHei" pitchFamily="34" charset="-120"/>
+              </a:rPr>
               <a:t>〔创新点四〕</a:t>
             </a:r>
             <a:endParaRPr lang="en-US" sz="1800" dirty="0"/>
@@ -4158,7 +4162,7 @@
       </p:sp>
       <p:sp>
         <p:nvSpPr>
-          <p:cNvPr id="19" name="Text 17"/>
+          <p:cNvPr id="20" name="Text 18"/>
           <p:cNvSpPr txBox="1"/>
           <p:nvPr/>
         </p:nvSpPr>
@@ -4279,8 +4283,8 @@
         </p:nvSpPr>
         <p:spPr>
           <a:xfrm>
-            <a:off x="548640" y="685800"/>
-            <a:ext cx="9082735" cy="685800"/>
+            <a:off x="548640" y="566928"/>
+            <a:ext cx="11094415" cy="685800"/>
           </a:xfrm>
           <a:prstGeom prst="rect">
             <a:avLst/>
@@ -4312,70 +4316,19 @@
       </p:sp>
       <p:sp>
         <p:nvSpPr>
-          <p:cNvPr id="3" name="Text 1"/>
-          <p:cNvSpPr txBox="1"/>
-          <p:nvPr/>
-        </p:nvSpPr>
-        <p:spPr>
-          <a:xfrm>
-            <a:off x="8899855" y="685800"/>
-            <a:ext cx="2743200" cy="685800"/>
-          </a:xfrm>
-          <a:prstGeom prst="rect">
-            <a:avLst/>
-          </a:prstGeom>
-          <a:noFill/>
-          <a:ln/>
-        </p:spPr>
-        <p:txBody>
-          <a:bodyPr wrap="square" lIns="0" tIns="0" rIns="0" bIns="0" rtlCol="0" anchor="ctr"/>
-          <a:lstStyle/>
-          <a:p>
-            <a:pPr algn="r" indent="0" marL="0">
-              <a:buNone/>
-            </a:pPr>
-            <a:r>
-              <a:rPr lang="en-US" sz="1300" b="1" dirty="0">
-                <a:solidFill>
-                  <a:srgbClr val="26231E"/>
-                </a:solidFill>
-                <a:latin typeface="Bahnschrift" pitchFamily="34" charset="0"/>
-                <a:ea typeface="Bahnschrift" pitchFamily="34" charset="-122"/>
-                <a:cs typeface="Bahnschrift" pitchFamily="34" charset="-120"/>
-              </a:rPr>
-              <a:t>02</a:t>
-            </a:r>
-            <a:pPr algn="r" indent="0" marL="0">
-              <a:buNone/>
-            </a:pPr>
-            <a:r>
-              <a:rPr lang="en-US" sz="1300" dirty="0">
-                <a:solidFill>
-                  <a:srgbClr val="6A6458"/>
-                </a:solidFill>
-                <a:latin typeface="Microsoft YaHei" pitchFamily="34" charset="0"/>
-                <a:ea typeface="Microsoft YaHei" pitchFamily="34" charset="-122"/>
-                <a:cs typeface="Microsoft YaHei" pitchFamily="34" charset="-120"/>
-              </a:rPr>
-              <a:t>　设计创新点</a:t>
-            </a:r>
-            <a:endParaRPr lang="en-US" sz="1300" dirty="0"/>
-          </a:p>
-        </p:txBody>
-      </p:sp>
-      <p:sp>
-        <p:nvSpPr>
-          <p:cNvPr id="4" name="Shape 2"/>
+          <p:cNvPr id="3" name="Shape 1"/>
           <p:cNvSpPr/>
           <p:nvPr/>
         </p:nvSpPr>
         <p:spPr>
           <a:xfrm>
-            <a:off x="548640" y="1737360"/>
-            <a:ext cx="5272888" cy="32004"/>
-          </a:xfrm>
-          <a:prstGeom prst="rect">
-            <a:avLst/>
+            <a:off x="2956560" y="699516"/>
+            <a:ext cx="8686495" cy="420624"/>
+          </a:xfrm>
+          <a:prstGeom prst="roundRect">
+            <a:avLst>
+              <a:gd name="adj" fmla="val 19565"/>
+            </a:avLst>
           </a:prstGeom>
           <a:solidFill>
             <a:srgbClr val="26231E"/>
@@ -4390,14 +4343,14 @@
       </p:sp>
       <p:sp>
         <p:nvSpPr>
-          <p:cNvPr id="5" name="Text 3"/>
-          <p:cNvSpPr txBox="1"/>
-          <p:nvPr/>
-        </p:nvSpPr>
-        <p:spPr>
-          <a:xfrm>
-            <a:off x="548640" y="1737360"/>
-            <a:ext cx="4907128" cy="502920"/>
+          <p:cNvPr id="4" name="Text 2"/>
+          <p:cNvSpPr txBox="1"/>
+          <p:nvPr/>
+        </p:nvSpPr>
+        <p:spPr>
+          <a:xfrm>
+            <a:off x="2956560" y="699516"/>
+            <a:ext cx="8485327" cy="420624"/>
           </a:xfrm>
           <a:prstGeom prst="rect">
             <a:avLst/>
@@ -4409,18 +4362,96 @@
           <a:bodyPr wrap="square" lIns="0" tIns="0" rIns="0" bIns="0" rtlCol="0" anchor="ctr"/>
           <a:lstStyle/>
           <a:p>
-            <a:pPr indent="0" marL="0">
-              <a:buNone/>
-            </a:pPr>
-            <a:r>
-              <a:rPr lang="en-US" sz="1800" b="1" dirty="0">
-                <a:solidFill>
-                  <a:srgbClr val="26231E"/>
+            <a:pPr algn="r" indent="0" marL="0">
+              <a:buNone/>
+            </a:pPr>
+            <a:r>
+              <a:rPr lang="en-US" sz="1300" b="1" dirty="0">
+                <a:solidFill>
+                  <a:srgbClr val="D9A441"/>
+                </a:solidFill>
+                <a:latin typeface="Bahnschrift" pitchFamily="34" charset="0"/>
+                <a:ea typeface="Bahnschrift" pitchFamily="34" charset="-122"/>
+                <a:cs typeface="Bahnschrift" pitchFamily="34" charset="-120"/>
+              </a:rPr>
+              <a:t>02</a:t>
+            </a:r>
+            <a:pPr algn="r" indent="0" marL="0">
+              <a:buNone/>
+            </a:pPr>
+            <a:r>
+              <a:rPr lang="en-US" sz="1300" dirty="0">
+                <a:solidFill>
+                  <a:srgbClr val="FBFAF7"/>
                 </a:solidFill>
                 <a:latin typeface="Microsoft YaHei" pitchFamily="34" charset="0"/>
                 <a:ea typeface="Microsoft YaHei" pitchFamily="34" charset="-122"/>
                 <a:cs typeface="Microsoft YaHei" pitchFamily="34" charset="-120"/>
               </a:rPr>
+              <a:t>　设计创新点</a:t>
+            </a:r>
+            <a:endParaRPr lang="en-US" sz="1300" dirty="0"/>
+          </a:p>
+        </p:txBody>
+      </p:sp>
+      <p:sp>
+        <p:nvSpPr>
+          <p:cNvPr id="5" name="Shape 3"/>
+          <p:cNvSpPr/>
+          <p:nvPr/>
+        </p:nvSpPr>
+        <p:spPr>
+          <a:xfrm>
+            <a:off x="548640" y="1737360"/>
+            <a:ext cx="5272888" cy="32004"/>
+          </a:xfrm>
+          <a:prstGeom prst="rect">
+            <a:avLst/>
+          </a:prstGeom>
+          <a:solidFill>
+            <a:srgbClr val="26231E"/>
+          </a:solidFill>
+          <a:ln w="12700">
+            <a:solidFill>
+              <a:srgbClr val="26231E"/>
+            </a:solidFill>
+            <a:prstDash val="solid"/>
+          </a:ln>
+        </p:spPr>
+      </p:sp>
+      <p:sp>
+        <p:nvSpPr>
+          <p:cNvPr id="6" name="Text 4"/>
+          <p:cNvSpPr txBox="1"/>
+          <p:nvPr/>
+        </p:nvSpPr>
+        <p:spPr>
+          <a:xfrm>
+            <a:off x="548640" y="1783080"/>
+            <a:ext cx="4907128" cy="502920"/>
+          </a:xfrm>
+          <a:prstGeom prst="rect">
+            <a:avLst/>
+          </a:prstGeom>
+          <a:noFill/>
+          <a:ln/>
+        </p:spPr>
+        <p:txBody>
+          <a:bodyPr wrap="square" lIns="0" tIns="0" rIns="0" bIns="0" rtlCol="0" anchor="ctr"/>
+          <a:lstStyle/>
+          <a:p>
+            <a:pPr indent="0" marL="0">
+              <a:buNone/>
+            </a:pPr>
+            <a:r>
+              <a:rPr lang="en-US" sz="1800" b="1" dirty="0">
+                <a:solidFill>
+                  <a:srgbClr val="26231E"/>
+                </a:solidFill>
+                <a:latin typeface="Microsoft YaHei" pitchFamily="34" charset="0"/>
+                <a:ea typeface="Microsoft YaHei" pitchFamily="34" charset="-122"/>
+                <a:cs typeface="Microsoft YaHei" pitchFamily="34" charset="-120"/>
+              </a:rPr>
               <a:t>改进前</a:t>
             </a:r>
             <a:pPr indent="0" marL="0">
@@ -4443,7 +4474,7 @@
       </p:sp>
       <p:sp>
         <p:nvSpPr>
-          <p:cNvPr id="6" name="Shape 4"/>
+          <p:cNvPr id="7" name="Shape 5"/>
           <p:cNvSpPr/>
           <p:nvPr/>
         </p:nvSpPr>
@@ -4452,8 +4483,10 @@
             <a:off x="548640" y="2468880"/>
             <a:ext cx="5272888" cy="2103120"/>
           </a:xfrm>
-          <a:prstGeom prst="rect">
-            <a:avLst/>
+          <a:prstGeom prst="roundRect">
+            <a:avLst>
+              <a:gd name="adj" fmla="val 6957"/>
+            </a:avLst>
           </a:prstGeom>
           <a:solidFill>
             <a:srgbClr val="FBFAF7"/>
@@ -4468,7 +4501,7 @@
       </p:sp>
       <p:sp>
         <p:nvSpPr>
-          <p:cNvPr id="7" name="Text 5"/>
+          <p:cNvPr id="8" name="Text 6"/>
           <p:cNvSpPr txBox="1"/>
           <p:nvPr/>
         </p:nvSpPr>
@@ -4507,7 +4540,7 @@
       </p:sp>
       <p:sp>
         <p:nvSpPr>
-          <p:cNvPr id="8" name="Text 6"/>
+          <p:cNvPr id="9" name="Text 7"/>
           <p:cNvSpPr txBox="1"/>
           <p:nvPr/>
         </p:nvSpPr>
@@ -4571,14 +4604,14 @@
       </p:sp>
       <p:sp>
         <p:nvSpPr>
-          <p:cNvPr id="9" name="Shape 7"/>
+          <p:cNvPr id="10" name="Shape 8"/>
           <p:cNvSpPr/>
           <p:nvPr/>
         </p:nvSpPr>
         <p:spPr>
           <a:xfrm>
             <a:off x="6370168" y="1737360"/>
-            <a:ext cx="5272888" cy="502920"/>
+            <a:ext cx="5272888" cy="32004"/>
           </a:xfrm>
           <a:prstGeom prst="rect">
             <a:avLst/>
@@ -4596,13 +4629,13 @@
       </p:sp>
       <p:sp>
         <p:nvSpPr>
-          <p:cNvPr id="10" name="Text 8"/>
-          <p:cNvSpPr txBox="1"/>
-          <p:nvPr/>
-        </p:nvSpPr>
-        <p:spPr>
-          <a:xfrm>
-            <a:off x="6553048" y="1737360"/>
+          <p:cNvPr id="11" name="Text 9"/>
+          <p:cNvSpPr txBox="1"/>
+          <p:nvPr/>
+        </p:nvSpPr>
+        <p:spPr>
+          <a:xfrm>
+            <a:off x="6370168" y="1783080"/>
             <a:ext cx="4907128" cy="502920"/>
           </a:xfrm>
           <a:prstGeom prst="rect">
@@ -4621,7 +4654,7 @@
             <a:r>
               <a:rPr lang="en-US" sz="1800" b="1" dirty="0">
                 <a:solidFill>
-                  <a:srgbClr val="FBFAF7"/>
+                  <a:srgbClr val="26231E"/>
                 </a:solidFill>
                 <a:latin typeface="Microsoft YaHei" pitchFamily="34" charset="0"/>
                 <a:ea typeface="Microsoft YaHei" pitchFamily="34" charset="-122"/>
@@ -4635,7 +4668,7 @@
             <a:r>
               <a:rPr lang="en-US" sz="1200" dirty="0">
                 <a:solidFill>
-                  <a:srgbClr val="ACA593"/>
+                  <a:srgbClr val="6A6458"/>
                 </a:solidFill>
                 <a:latin typeface="Bahnschrift" pitchFamily="34" charset="0"/>
                 <a:ea typeface="Bahnschrift" pitchFamily="34" charset="-122"/>
@@ -4649,7 +4682,7 @@
       </p:sp>
       <p:sp>
         <p:nvSpPr>
-          <p:cNvPr id="11" name="Shape 9"/>
+          <p:cNvPr id="12" name="Shape 10"/>
           <p:cNvSpPr/>
           <p:nvPr/>
         </p:nvSpPr>
@@ -4658,15 +4691,17 @@
             <a:off x="6370168" y="2468880"/>
             <a:ext cx="5272888" cy="2103120"/>
           </a:xfrm>
-          <a:prstGeom prst="rect">
-            <a:avLst/>
+          <a:prstGeom prst="roundRect">
+            <a:avLst>
+              <a:gd name="adj" fmla="val 6957"/>
+            </a:avLst>
           </a:prstGeom>
           <a:solidFill>
             <a:srgbClr val="FBFAF7"/>
           </a:solidFill>
-          <a:ln w="12700">
+          <a:ln w="19050">
             <a:solidFill>
-              <a:srgbClr val="D5D1C8"/>
+              <a:srgbClr val="26231E"/>
             </a:solidFill>
             <a:prstDash val="solid"/>
           </a:ln>
@@ -4674,7 +4709,7 @@
       </p:sp>
       <p:sp>
         <p:nvSpPr>
-          <p:cNvPr id="12" name="Text 10"/>
+          <p:cNvPr id="13" name="Text 11"/>
           <p:cNvSpPr txBox="1"/>
           <p:nvPr/>
         </p:nvSpPr>
@@ -4713,7 +4748,7 @@
       </p:sp>
       <p:sp>
         <p:nvSpPr>
-          <p:cNvPr id="13" name="Text 11"/>
+          <p:cNvPr id="14" name="Text 12"/>
           <p:cNvSpPr txBox="1"/>
           <p:nvPr/>
         </p:nvSpPr>
@@ -5037,8 +5072,8 @@
         </p:nvSpPr>
         <p:spPr>
           <a:xfrm>
-            <a:off x="548640" y="685800"/>
-            <a:ext cx="9082735" cy="685800"/>
+            <a:off x="548640" y="566928"/>
+            <a:ext cx="11094415" cy="685800"/>
           </a:xfrm>
           <a:prstGeom prst="rect">
             <a:avLst/>
@@ -5070,14 +5105,41 @@
       </p:sp>
       <p:sp>
         <p:nvSpPr>
-          <p:cNvPr id="3" name="Text 1"/>
-          <p:cNvSpPr txBox="1"/>
-          <p:nvPr/>
-        </p:nvSpPr>
-        <p:spPr>
-          <a:xfrm>
-            <a:off x="8899855" y="685800"/>
-            <a:ext cx="2743200" cy="685800"/>
+          <p:cNvPr id="3" name="Shape 1"/>
+          <p:cNvSpPr/>
+          <p:nvPr/>
+        </p:nvSpPr>
+        <p:spPr>
+          <a:xfrm>
+            <a:off x="2245360" y="699516"/>
+            <a:ext cx="9397695" cy="420624"/>
+          </a:xfrm>
+          <a:prstGeom prst="roundRect">
+            <a:avLst>
+              <a:gd name="adj" fmla="val 19565"/>
+            </a:avLst>
+          </a:prstGeom>
+          <a:solidFill>
+            <a:srgbClr val="26231E"/>
+          </a:solidFill>
+          <a:ln w="12700">
+            <a:solidFill>
+              <a:srgbClr val="26231E"/>
+            </a:solidFill>
+            <a:prstDash val="solid"/>
+          </a:ln>
+        </p:spPr>
+      </p:sp>
+      <p:sp>
+        <p:nvSpPr>
+          <p:cNvPr id="4" name="Text 2"/>
+          <p:cNvSpPr txBox="1"/>
+          <p:nvPr/>
+        </p:nvSpPr>
+        <p:spPr>
+          <a:xfrm>
+            <a:off x="2245360" y="699516"/>
+            <a:ext cx="9196527" cy="420624"/>
           </a:xfrm>
           <a:prstGeom prst="rect">
             <a:avLst/>
@@ -5095,7 +5157,7 @@
             <a:r>
               <a:rPr lang="en-US" sz="1300" b="1" dirty="0">
                 <a:solidFill>
-                  <a:srgbClr val="26231E"/>
+                  <a:srgbClr val="D9A441"/>
                 </a:solidFill>
                 <a:latin typeface="Bahnschrift" pitchFamily="34" charset="0"/>
                 <a:ea typeface="Bahnschrift" pitchFamily="34" charset="-122"/>
@@ -5109,7 +5171,7 @@
             <a:r>
               <a:rPr lang="en-US" sz="1300" dirty="0">
                 <a:solidFill>
-                  <a:srgbClr val="6A6458"/>
+                  <a:srgbClr val="FBFAF7"/>
                 </a:solidFill>
                 <a:latin typeface="Microsoft YaHei" pitchFamily="34" charset="0"/>
                 <a:ea typeface="Microsoft YaHei" pitchFamily="34" charset="-122"/>
@@ -6213,8 +6275,8 @@
         </p:nvSpPr>
         <p:spPr>
           <a:xfrm>
-            <a:off x="548640" y="685800"/>
-            <a:ext cx="9082735" cy="685800"/>
+            <a:off x="548640" y="566928"/>
+            <a:ext cx="11094415" cy="685800"/>
           </a:xfrm>
           <a:prstGeom prst="rect">
             <a:avLst/>
@@ -6246,14 +6308,41 @@
       </p:sp>
       <p:sp>
         <p:nvSpPr>
-          <p:cNvPr id="3" name="Text 1"/>
-          <p:cNvSpPr txBox="1"/>
-          <p:nvPr/>
-        </p:nvSpPr>
-        <p:spPr>
-          <a:xfrm>
-            <a:off x="8899855" y="685800"/>
-            <a:ext cx="2743200" cy="685800"/>
+          <p:cNvPr id="3" name="Shape 1"/>
+          <p:cNvSpPr/>
+          <p:nvPr/>
+        </p:nvSpPr>
+        <p:spPr>
+          <a:xfrm>
+            <a:off x="2245360" y="699516"/>
+            <a:ext cx="9397695" cy="420624"/>
+          </a:xfrm>
+          <a:prstGeom prst="roundRect">
+            <a:avLst>
+              <a:gd name="adj" fmla="val 19565"/>
+            </a:avLst>
+          </a:prstGeom>
+          <a:solidFill>
+            <a:srgbClr val="26231E"/>
+          </a:solidFill>
+          <a:ln w="12700">
+            <a:solidFill>
+              <a:srgbClr val="26231E"/>
+            </a:solidFill>
+            <a:prstDash val="solid"/>
+          </a:ln>
+        </p:spPr>
+      </p:sp>
+      <p:sp>
+        <p:nvSpPr>
+          <p:cNvPr id="4" name="Text 2"/>
+          <p:cNvSpPr txBox="1"/>
+          <p:nvPr/>
+        </p:nvSpPr>
+        <p:spPr>
+          <a:xfrm>
+            <a:off x="2245360" y="699516"/>
+            <a:ext cx="9196527" cy="420624"/>
           </a:xfrm>
           <a:prstGeom prst="rect">
             <a:avLst/>
@@ -6271,7 +6360,7 @@
             <a:r>
               <a:rPr lang="en-US" sz="1300" b="1" dirty="0">
                 <a:solidFill>
-                  <a:srgbClr val="26231E"/>
+                  <a:srgbClr val="D9A441"/>
                 </a:solidFill>
                 <a:latin typeface="Bahnschrift" pitchFamily="34" charset="0"/>
                 <a:ea typeface="Bahnschrift" pitchFamily="34" charset="-122"/>
@@ -6285,7 +6374,7 @@
             <a:r>
               <a:rPr lang="en-US" sz="1300" dirty="0">
                 <a:solidFill>
-                  <a:srgbClr val="6A6458"/>
+                  <a:srgbClr val="FBFAF7"/>
                 </a:solidFill>
                 <a:latin typeface="Microsoft YaHei" pitchFamily="34" charset="0"/>
                 <a:ea typeface="Microsoft YaHei" pitchFamily="34" charset="-122"/>
@@ -6299,7 +6388,7 @@
       </p:sp>
       <p:sp>
         <p:nvSpPr>
-          <p:cNvPr id="4" name="Shape 2"/>
+          <p:cNvPr id="5" name="Shape 3"/>
           <p:cNvSpPr/>
           <p:nvPr/>
         </p:nvSpPr>
@@ -6308,8 +6397,10 @@
             <a:off x="548640" y="1691640"/>
             <a:ext cx="6766560" cy="4343400"/>
           </a:xfrm>
-          <a:prstGeom prst="rect">
-            <a:avLst/>
+          <a:prstGeom prst="roundRect">
+            <a:avLst>
+              <a:gd name="adj" fmla="val 3368"/>
+            </a:avLst>
           </a:prstGeom>
           <a:solidFill>
             <a:srgbClr val="FBFAF7"/>
@@ -6324,7 +6415,7 @@
       </p:sp>
       <p:sp>
         <p:nvSpPr>
-          <p:cNvPr id="5" name="Text 3"/>
+          <p:cNvPr id="6" name="Text 4"/>
           <p:cNvSpPr txBox="1"/>
           <p:nvPr/>
         </p:nvSpPr>
@@ -6363,7 +6454,7 @@
       </p:sp>
       <p:sp>
         <p:nvSpPr>
-          <p:cNvPr id="6" name="Text 4"/>
+          <p:cNvPr id="7" name="Text 5"/>
           <p:cNvSpPr txBox="1"/>
           <p:nvPr/>
         </p:nvSpPr>
@@ -6402,7 +6493,7 @@
       </p:sp>
       <p:sp>
         <p:nvSpPr>
-          <p:cNvPr id="7" name="Shape 5"/>
+          <p:cNvPr id="8" name="Shape 6"/>
           <p:cNvSpPr/>
           <p:nvPr/>
         </p:nvSpPr>
@@ -6427,7 +6518,7 @@
       </p:sp>
       <p:sp>
         <p:nvSpPr>
-          <p:cNvPr id="8" name="Text 6"/>
+          <p:cNvPr id="9" name="Text 7"/>
           <p:cNvSpPr txBox="1"/>
           <p:nvPr/>
         </p:nvSpPr>
@@ -6624,8 +6715,8 @@
         </p:nvSpPr>
         <p:spPr>
           <a:xfrm>
-            <a:off x="548640" y="685800"/>
-            <a:ext cx="9082735" cy="685800"/>
+            <a:off x="548640" y="566928"/>
+            <a:ext cx="11094415" cy="685800"/>
           </a:xfrm>
           <a:prstGeom prst="rect">
             <a:avLst/>
@@ -6657,75 +6748,24 @@
       </p:sp>
       <p:sp>
         <p:nvSpPr>
-          <p:cNvPr id="3" name="Text 1"/>
-          <p:cNvSpPr txBox="1"/>
-          <p:nvPr/>
-        </p:nvSpPr>
-        <p:spPr>
-          <a:xfrm>
-            <a:off x="8899855" y="685800"/>
-            <a:ext cx="2743200" cy="685800"/>
-          </a:xfrm>
-          <a:prstGeom prst="rect">
-            <a:avLst/>
-          </a:prstGeom>
-          <a:noFill/>
-          <a:ln/>
-        </p:spPr>
-        <p:txBody>
-          <a:bodyPr wrap="square" lIns="0" tIns="0" rIns="0" bIns="0" rtlCol="0" anchor="ctr"/>
-          <a:lstStyle/>
-          <a:p>
-            <a:pPr algn="r" indent="0" marL="0">
-              <a:buNone/>
-            </a:pPr>
-            <a:r>
-              <a:rPr lang="en-US" sz="1300" b="1" dirty="0">
-                <a:solidFill>
-                  <a:srgbClr val="26231E"/>
-                </a:solidFill>
-                <a:latin typeface="Bahnschrift" pitchFamily="34" charset="0"/>
-                <a:ea typeface="Bahnschrift" pitchFamily="34" charset="-122"/>
-                <a:cs typeface="Bahnschrift" pitchFamily="34" charset="-120"/>
-              </a:rPr>
-              <a:t>03</a:t>
-            </a:r>
-            <a:pPr algn="r" indent="0" marL="0">
-              <a:buNone/>
-            </a:pPr>
-            <a:r>
-              <a:rPr lang="en-US" sz="1300" dirty="0">
-                <a:solidFill>
-                  <a:srgbClr val="6A6458"/>
-                </a:solidFill>
-                <a:latin typeface="Microsoft YaHei" pitchFamily="34" charset="0"/>
-                <a:ea typeface="Microsoft YaHei" pitchFamily="34" charset="-122"/>
-                <a:cs typeface="Microsoft YaHei" pitchFamily="34" charset="-120"/>
-              </a:rPr>
-              <a:t>　主要设计难点</a:t>
-            </a:r>
-            <a:endParaRPr lang="en-US" sz="1300" dirty="0"/>
-          </a:p>
-        </p:txBody>
-      </p:sp>
-      <p:sp>
-        <p:nvSpPr>
-          <p:cNvPr id="4" name="Shape 2"/>
+          <p:cNvPr id="3" name="Shape 1"/>
           <p:cNvSpPr/>
           <p:nvPr/>
         </p:nvSpPr>
         <p:spPr>
           <a:xfrm>
-            <a:off x="548640" y="2103120"/>
-            <a:ext cx="2464994" cy="2377440"/>
-          </a:xfrm>
-          <a:prstGeom prst="rect">
-            <a:avLst/>
+            <a:off x="2245360" y="699516"/>
+            <a:ext cx="9397695" cy="420624"/>
+          </a:xfrm>
+          <a:prstGeom prst="roundRect">
+            <a:avLst>
+              <a:gd name="adj" fmla="val 19565"/>
+            </a:avLst>
           </a:prstGeom>
           <a:solidFill>
-            <a:srgbClr val="FBFAF7"/>
+            <a:srgbClr val="26231E"/>
           </a:solidFill>
-          <a:ln w="19050">
+          <a:ln w="12700">
             <a:solidFill>
               <a:srgbClr val="26231E"/>
             </a:solidFill>
@@ -6735,79 +6775,120 @@
       </p:sp>
       <p:sp>
         <p:nvSpPr>
-          <p:cNvPr id="5" name="Text 3"/>
-          <p:cNvSpPr txBox="1"/>
-          <p:nvPr/>
-        </p:nvSpPr>
-        <p:spPr>
-          <a:xfrm>
-            <a:off x="777240" y="2286000"/>
-            <a:ext cx="914400" cy="411480"/>
-          </a:xfrm>
-          <a:prstGeom prst="rect">
-            <a:avLst/>
-          </a:prstGeom>
-          <a:noFill/>
-          <a:ln/>
-        </p:spPr>
-        <p:txBody>
-          <a:bodyPr wrap="square" lIns="0" tIns="0" rIns="0" bIns="0" rtlCol="0" anchor="t"/>
-          <a:lstStyle/>
-          <a:p>
-            <a:pPr indent="0" marL="0">
-              <a:buNone/>
-            </a:pPr>
-            <a:r>
-              <a:rPr lang="en-US" sz="1800" b="1" dirty="0">
-                <a:solidFill>
-                  <a:srgbClr val="26231E"/>
+          <p:cNvPr id="4" name="Text 2"/>
+          <p:cNvSpPr txBox="1"/>
+          <p:nvPr/>
+        </p:nvSpPr>
+        <p:spPr>
+          <a:xfrm>
+            <a:off x="2245360" y="699516"/>
+            <a:ext cx="9196527" cy="420624"/>
+          </a:xfrm>
+          <a:prstGeom prst="rect">
+            <a:avLst/>
+          </a:prstGeom>
+          <a:noFill/>
+          <a:ln/>
+        </p:spPr>
+        <p:txBody>
+          <a:bodyPr wrap="square" lIns="0" tIns="0" rIns="0" bIns="0" rtlCol="0" anchor="ctr"/>
+          <a:lstStyle/>
+          <a:p>
+            <a:pPr algn="r" indent="0" marL="0">
+              <a:buNone/>
+            </a:pPr>
+            <a:r>
+              <a:rPr lang="en-US" sz="1300" b="1" dirty="0">
+                <a:solidFill>
+                  <a:srgbClr val="D9A441"/>
                 </a:solidFill>
                 <a:latin typeface="Bahnschrift" pitchFamily="34" charset="0"/>
                 <a:ea typeface="Bahnschrift" pitchFamily="34" charset="-122"/>
                 <a:cs typeface="Bahnschrift" pitchFamily="34" charset="-120"/>
               </a:rPr>
-              <a:t>01</a:t>
-            </a:r>
-            <a:endParaRPr lang="en-US" sz="1800" dirty="0"/>
-          </a:p>
-        </p:txBody>
-      </p:sp>
-      <p:sp>
-        <p:nvSpPr>
-          <p:cNvPr id="6" name="Text 4"/>
-          <p:cNvSpPr txBox="1"/>
-          <p:nvPr/>
-        </p:nvSpPr>
-        <p:spPr>
-          <a:xfrm>
-            <a:off x="777240" y="2834640"/>
-            <a:ext cx="2007794" cy="457200"/>
-          </a:xfrm>
-          <a:prstGeom prst="rect">
-            <a:avLst/>
-          </a:prstGeom>
-          <a:noFill/>
-          <a:ln/>
-        </p:spPr>
-        <p:txBody>
-          <a:bodyPr wrap="square" lIns="0" tIns="0" rIns="0" bIns="0" rtlCol="0" anchor="t"/>
-          <a:lstStyle/>
-          <a:p>
-            <a:pPr indent="0" marL="0">
-              <a:buNone/>
-            </a:pPr>
-            <a:r>
-              <a:rPr lang="en-US" sz="2200" b="1" dirty="0">
-                <a:solidFill>
-                  <a:srgbClr val="26231E"/>
+              <a:t>03</a:t>
+            </a:r>
+            <a:pPr algn="r" indent="0" marL="0">
+              <a:buNone/>
+            </a:pPr>
+            <a:r>
+              <a:rPr lang="en-US" sz="1300" dirty="0">
+                <a:solidFill>
+                  <a:srgbClr val="FBFAF7"/>
                 </a:solidFill>
                 <a:latin typeface="Microsoft YaHei" pitchFamily="34" charset="0"/>
                 <a:ea typeface="Microsoft YaHei" pitchFamily="34" charset="-122"/>
                 <a:cs typeface="Microsoft YaHei" pitchFamily="34" charset="-120"/>
               </a:rPr>
-              <a:t>问题</a:t>
-            </a:r>
-            <a:endParaRPr lang="en-US" sz="2200" dirty="0"/>
+              <a:t>　主要设计难点</a:t>
+            </a:r>
+            <a:endParaRPr lang="en-US" sz="1300" dirty="0"/>
+          </a:p>
+        </p:txBody>
+      </p:sp>
+      <p:sp>
+        <p:nvSpPr>
+          <p:cNvPr id="5" name="Shape 3"/>
+          <p:cNvSpPr/>
+          <p:nvPr/>
+        </p:nvSpPr>
+        <p:spPr>
+          <a:xfrm>
+            <a:off x="548640" y="2103120"/>
+            <a:ext cx="2464994" cy="2377440"/>
+          </a:xfrm>
+          <a:prstGeom prst="roundRect">
+            <a:avLst>
+              <a:gd name="adj" fmla="val 6154"/>
+            </a:avLst>
+          </a:prstGeom>
+          <a:solidFill>
+            <a:srgbClr val="FBFAF7"/>
+          </a:solidFill>
+          <a:ln w="12700">
+            <a:solidFill>
+              <a:srgbClr val="D5D1C8"/>
+            </a:solidFill>
+            <a:prstDash val="solid"/>
+          </a:ln>
+        </p:spPr>
+      </p:sp>
+      <p:sp>
+        <p:nvSpPr>
+          <p:cNvPr id="6" name="Text 4"/>
+          <p:cNvSpPr txBox="1"/>
+          <p:nvPr/>
+        </p:nvSpPr>
+        <p:spPr>
+          <a:xfrm>
+            <a:off x="777240" y="2286000"/>
+            <a:ext cx="914400" cy="411480"/>
+          </a:xfrm>
+          <a:prstGeom prst="rect">
+            <a:avLst/>
+          </a:prstGeom>
+          <a:noFill/>
+          <a:ln/>
+        </p:spPr>
+        <p:txBody>
+          <a:bodyPr wrap="square" lIns="0" tIns="0" rIns="0" bIns="0" rtlCol="0" anchor="t"/>
+          <a:lstStyle/>
+          <a:p>
+            <a:pPr indent="0" marL="0">
+              <a:buNone/>
+            </a:pPr>
+            <a:r>
+              <a:rPr lang="en-US" sz="1800" b="1" dirty="0">
+                <a:solidFill>
+                  <a:srgbClr val="26231E"/>
+                </a:solidFill>
+                <a:latin typeface="Bahnschrift" pitchFamily="34" charset="0"/>
+                <a:ea typeface="Bahnschrift" pitchFamily="34" charset="-122"/>
+                <a:cs typeface="Bahnschrift" pitchFamily="34" charset="-120"/>
+              </a:rPr>
+              <a:t>01</a:t>
+            </a:r>
+            <a:endParaRPr lang="en-US" sz="1800" dirty="0"/>
           </a:p>
         </p:txBody>
       </p:sp>
@@ -6819,8 +6900,8 @@
         </p:nvSpPr>
         <p:spPr>
           <a:xfrm>
-            <a:off x="777240" y="3429000"/>
-            <a:ext cx="2007794" cy="822960"/>
+            <a:off x="777240" y="2834640"/>
+            <a:ext cx="2007794" cy="457200"/>
           </a:xfrm>
           <a:prstGeom prst="rect">
             <a:avLst/>
@@ -6836,14 +6917,53 @@
               <a:buNone/>
             </a:pPr>
             <a:r>
-              <a:rPr lang="en-US" sz="1300" dirty="0">
-                <a:solidFill>
-                  <a:srgbClr val="6A6458"/>
+              <a:rPr lang="en-US" sz="2200" b="1" dirty="0">
+                <a:solidFill>
+                  <a:srgbClr val="26231E"/>
                 </a:solidFill>
                 <a:latin typeface="Microsoft YaHei" pitchFamily="34" charset="0"/>
                 <a:ea typeface="Microsoft YaHei" pitchFamily="34" charset="-122"/>
                 <a:cs typeface="Microsoft YaHei" pitchFamily="34" charset="-120"/>
               </a:rPr>
+              <a:t>问题</a:t>
+            </a:r>
+            <a:endParaRPr lang="en-US" sz="2200" dirty="0"/>
+          </a:p>
+        </p:txBody>
+      </p:sp>
+      <p:sp>
+        <p:nvSpPr>
+          <p:cNvPr id="8" name="Text 6"/>
+          <p:cNvSpPr txBox="1"/>
+          <p:nvPr/>
+        </p:nvSpPr>
+        <p:spPr>
+          <a:xfrm>
+            <a:off x="777240" y="3429000"/>
+            <a:ext cx="2007794" cy="822960"/>
+          </a:xfrm>
+          <a:prstGeom prst="rect">
+            <a:avLst/>
+          </a:prstGeom>
+          <a:noFill/>
+          <a:ln/>
+        </p:spPr>
+        <p:txBody>
+          <a:bodyPr wrap="square" lIns="0" tIns="0" rIns="0" bIns="0" rtlCol="0" anchor="t"/>
+          <a:lstStyle/>
+          <a:p>
+            <a:pPr indent="0" marL="0">
+              <a:buNone/>
+            </a:pPr>
+            <a:r>
+              <a:rPr lang="en-US" sz="1300" dirty="0">
+                <a:solidFill>
+                  <a:srgbClr val="6A6458"/>
+                </a:solidFill>
+                <a:latin typeface="Microsoft YaHei" pitchFamily="34" charset="0"/>
+                <a:ea typeface="Microsoft YaHei" pitchFamily="34" charset="-122"/>
+                <a:cs typeface="Microsoft YaHei" pitchFamily="34" charset="-120"/>
+              </a:rPr>
               <a:t>〔描述问题〕</a:t>
             </a:r>
             <a:endParaRPr lang="en-US" sz="1300" dirty="0"/>
@@ -6852,7 +6972,7 @@
       </p:sp>
       <p:sp>
         <p:nvSpPr>
-          <p:cNvPr id="8" name="Text 6"/>
+          <p:cNvPr id="9" name="Text 7"/>
           <p:cNvSpPr txBox="1"/>
           <p:nvPr/>
         </p:nvSpPr>
@@ -6891,7 +7011,7 @@
       </p:sp>
       <p:sp>
         <p:nvSpPr>
-          <p:cNvPr id="9" name="Shape 7"/>
+          <p:cNvPr id="10" name="Shape 8"/>
           <p:cNvSpPr/>
           <p:nvPr/>
         </p:nvSpPr>
@@ -6900,13 +7020,381 @@
             <a:off x="3425114" y="2103120"/>
             <a:ext cx="2464994" cy="2377440"/>
           </a:xfrm>
-          <a:prstGeom prst="rect">
-            <a:avLst/>
+          <a:prstGeom prst="roundRect">
+            <a:avLst>
+              <a:gd name="adj" fmla="val 6154"/>
+            </a:avLst>
           </a:prstGeom>
           <a:solidFill>
             <a:srgbClr val="FBFAF7"/>
           </a:solidFill>
-          <a:ln w="19050">
+          <a:ln w="12700">
+            <a:solidFill>
+              <a:srgbClr val="D5D1C8"/>
+            </a:solidFill>
+            <a:prstDash val="solid"/>
+          </a:ln>
+        </p:spPr>
+      </p:sp>
+      <p:sp>
+        <p:nvSpPr>
+          <p:cNvPr id="11" name="Text 9"/>
+          <p:cNvSpPr txBox="1"/>
+          <p:nvPr/>
+        </p:nvSpPr>
+        <p:spPr>
+          <a:xfrm>
+            <a:off x="3653714" y="2286000"/>
+            <a:ext cx="914400" cy="411480"/>
+          </a:xfrm>
+          <a:prstGeom prst="rect">
+            <a:avLst/>
+          </a:prstGeom>
+          <a:noFill/>
+          <a:ln/>
+        </p:spPr>
+        <p:txBody>
+          <a:bodyPr wrap="square" lIns="0" tIns="0" rIns="0" bIns="0" rtlCol="0" anchor="t"/>
+          <a:lstStyle/>
+          <a:p>
+            <a:pPr indent="0" marL="0">
+              <a:buNone/>
+            </a:pPr>
+            <a:r>
+              <a:rPr lang="en-US" sz="1800" b="1" dirty="0">
+                <a:solidFill>
+                  <a:srgbClr val="26231E"/>
+                </a:solidFill>
+                <a:latin typeface="Bahnschrift" pitchFamily="34" charset="0"/>
+                <a:ea typeface="Bahnschrift" pitchFamily="34" charset="-122"/>
+                <a:cs typeface="Bahnschrift" pitchFamily="34" charset="-120"/>
+              </a:rPr>
+              <a:t>02</a:t>
+            </a:r>
+            <a:endParaRPr lang="en-US" sz="1800" dirty="0"/>
+          </a:p>
+        </p:txBody>
+      </p:sp>
+      <p:sp>
+        <p:nvSpPr>
+          <p:cNvPr id="12" name="Text 10"/>
+          <p:cNvSpPr txBox="1"/>
+          <p:nvPr/>
+        </p:nvSpPr>
+        <p:spPr>
+          <a:xfrm>
+            <a:off x="3653714" y="2834640"/>
+            <a:ext cx="2007794" cy="457200"/>
+          </a:xfrm>
+          <a:prstGeom prst="rect">
+            <a:avLst/>
+          </a:prstGeom>
+          <a:noFill/>
+          <a:ln/>
+        </p:spPr>
+        <p:txBody>
+          <a:bodyPr wrap="square" lIns="0" tIns="0" rIns="0" bIns="0" rtlCol="0" anchor="t"/>
+          <a:lstStyle/>
+          <a:p>
+            <a:pPr indent="0" marL="0">
+              <a:buNone/>
+            </a:pPr>
+            <a:r>
+              <a:rPr lang="en-US" sz="2200" b="1" dirty="0">
+                <a:solidFill>
+                  <a:srgbClr val="26231E"/>
+                </a:solidFill>
+                <a:latin typeface="Microsoft YaHei" pitchFamily="34" charset="0"/>
+                <a:ea typeface="Microsoft YaHei" pitchFamily="34" charset="-122"/>
+                <a:cs typeface="Microsoft YaHei" pitchFamily="34" charset="-120"/>
+              </a:rPr>
+              <a:t>分析</a:t>
+            </a:r>
+            <a:endParaRPr lang="en-US" sz="2200" dirty="0"/>
+          </a:p>
+        </p:txBody>
+      </p:sp>
+      <p:sp>
+        <p:nvSpPr>
+          <p:cNvPr id="13" name="Text 11"/>
+          <p:cNvSpPr txBox="1"/>
+          <p:nvPr/>
+        </p:nvSpPr>
+        <p:spPr>
+          <a:xfrm>
+            <a:off x="3653714" y="3429000"/>
+            <a:ext cx="2007794" cy="822960"/>
+          </a:xfrm>
+          <a:prstGeom prst="rect">
+            <a:avLst/>
+          </a:prstGeom>
+          <a:noFill/>
+          <a:ln/>
+        </p:spPr>
+        <p:txBody>
+          <a:bodyPr wrap="square" lIns="0" tIns="0" rIns="0" bIns="0" rtlCol="0" anchor="t"/>
+          <a:lstStyle/>
+          <a:p>
+            <a:pPr indent="0" marL="0">
+              <a:buNone/>
+            </a:pPr>
+            <a:r>
+              <a:rPr lang="en-US" sz="1300" dirty="0">
+                <a:solidFill>
+                  <a:srgbClr val="6A6458"/>
+                </a:solidFill>
+                <a:latin typeface="Microsoft YaHei" pitchFamily="34" charset="0"/>
+                <a:ea typeface="Microsoft YaHei" pitchFamily="34" charset="-122"/>
+                <a:cs typeface="Microsoft YaHei" pitchFamily="34" charset="-120"/>
+              </a:rPr>
+              <a:t>〔定位原因〕</a:t>
+            </a:r>
+            <a:endParaRPr lang="en-US" sz="1300" dirty="0"/>
+          </a:p>
+        </p:txBody>
+      </p:sp>
+      <p:sp>
+        <p:nvSpPr>
+          <p:cNvPr id="14" name="Text 12"/>
+          <p:cNvSpPr txBox="1"/>
+          <p:nvPr/>
+        </p:nvSpPr>
+        <p:spPr>
+          <a:xfrm>
+            <a:off x="5890108" y="3017520"/>
+            <a:ext cx="411480" cy="548640"/>
+          </a:xfrm>
+          <a:prstGeom prst="rect">
+            <a:avLst/>
+          </a:prstGeom>
+          <a:noFill/>
+          <a:ln/>
+        </p:spPr>
+        <p:txBody>
+          <a:bodyPr wrap="square" lIns="0" tIns="0" rIns="0" bIns="0" rtlCol="0" anchor="ctr"/>
+          <a:lstStyle/>
+          <a:p>
+            <a:pPr algn="ctr" indent="0" marL="0">
+              <a:buNone/>
+            </a:pPr>
+            <a:r>
+              <a:rPr lang="en-US" sz="2200" dirty="0">
+                <a:solidFill>
+                  <a:srgbClr val="26231E"/>
+                </a:solidFill>
+                <a:latin typeface="Bahnschrift" pitchFamily="34" charset="0"/>
+                <a:ea typeface="Bahnschrift" pitchFamily="34" charset="-122"/>
+                <a:cs typeface="Bahnschrift" pitchFamily="34" charset="-120"/>
+              </a:rPr>
+              <a:t>→</a:t>
+            </a:r>
+            <a:endParaRPr lang="en-US" sz="2200" dirty="0"/>
+          </a:p>
+        </p:txBody>
+      </p:sp>
+      <p:sp>
+        <p:nvSpPr>
+          <p:cNvPr id="15" name="Shape 13"/>
+          <p:cNvSpPr/>
+          <p:nvPr/>
+        </p:nvSpPr>
+        <p:spPr>
+          <a:xfrm>
+            <a:off x="6301588" y="2103120"/>
+            <a:ext cx="2464994" cy="2377440"/>
+          </a:xfrm>
+          <a:prstGeom prst="roundRect">
+            <a:avLst>
+              <a:gd name="adj" fmla="val 6154"/>
+            </a:avLst>
+          </a:prstGeom>
+          <a:solidFill>
+            <a:srgbClr val="FBFAF7"/>
+          </a:solidFill>
+          <a:ln w="12700">
+            <a:solidFill>
+              <a:srgbClr val="D5D1C8"/>
+            </a:solidFill>
+            <a:prstDash val="solid"/>
+          </a:ln>
+        </p:spPr>
+      </p:sp>
+      <p:sp>
+        <p:nvSpPr>
+          <p:cNvPr id="16" name="Text 14"/>
+          <p:cNvSpPr txBox="1"/>
+          <p:nvPr/>
+        </p:nvSpPr>
+        <p:spPr>
+          <a:xfrm>
+            <a:off x="6530188" y="2286000"/>
+            <a:ext cx="914400" cy="411480"/>
+          </a:xfrm>
+          <a:prstGeom prst="rect">
+            <a:avLst/>
+          </a:prstGeom>
+          <a:noFill/>
+          <a:ln/>
+        </p:spPr>
+        <p:txBody>
+          <a:bodyPr wrap="square" lIns="0" tIns="0" rIns="0" bIns="0" rtlCol="0" anchor="t"/>
+          <a:lstStyle/>
+          <a:p>
+            <a:pPr indent="0" marL="0">
+              <a:buNone/>
+            </a:pPr>
+            <a:r>
+              <a:rPr lang="en-US" sz="1800" b="1" dirty="0">
+                <a:solidFill>
+                  <a:srgbClr val="26231E"/>
+                </a:solidFill>
+                <a:latin typeface="Bahnschrift" pitchFamily="34" charset="0"/>
+                <a:ea typeface="Bahnschrift" pitchFamily="34" charset="-122"/>
+                <a:cs typeface="Bahnschrift" pitchFamily="34" charset="-120"/>
+              </a:rPr>
+              <a:t>03</a:t>
+            </a:r>
+            <a:endParaRPr lang="en-US" sz="1800" dirty="0"/>
+          </a:p>
+        </p:txBody>
+      </p:sp>
+      <p:sp>
+        <p:nvSpPr>
+          <p:cNvPr id="17" name="Text 15"/>
+          <p:cNvSpPr txBox="1"/>
+          <p:nvPr/>
+        </p:nvSpPr>
+        <p:spPr>
+          <a:xfrm>
+            <a:off x="6530188" y="2834640"/>
+            <a:ext cx="2007794" cy="457200"/>
+          </a:xfrm>
+          <a:prstGeom prst="rect">
+            <a:avLst/>
+          </a:prstGeom>
+          <a:noFill/>
+          <a:ln/>
+        </p:spPr>
+        <p:txBody>
+          <a:bodyPr wrap="square" lIns="0" tIns="0" rIns="0" bIns="0" rtlCol="0" anchor="t"/>
+          <a:lstStyle/>
+          <a:p>
+            <a:pPr indent="0" marL="0">
+              <a:buNone/>
+            </a:pPr>
+            <a:r>
+              <a:rPr lang="en-US" sz="2200" b="1" dirty="0">
+                <a:solidFill>
+                  <a:srgbClr val="26231E"/>
+                </a:solidFill>
+                <a:latin typeface="Microsoft YaHei" pitchFamily="34" charset="0"/>
+                <a:ea typeface="Microsoft YaHei" pitchFamily="34" charset="-122"/>
+                <a:cs typeface="Microsoft YaHei" pitchFamily="34" charset="-120"/>
+              </a:rPr>
+              <a:t>方案</a:t>
+            </a:r>
+            <a:endParaRPr lang="en-US" sz="2200" dirty="0"/>
+          </a:p>
+        </p:txBody>
+      </p:sp>
+      <p:sp>
+        <p:nvSpPr>
+          <p:cNvPr id="18" name="Text 16"/>
+          <p:cNvSpPr txBox="1"/>
+          <p:nvPr/>
+        </p:nvSpPr>
+        <p:spPr>
+          <a:xfrm>
+            <a:off x="6530188" y="3429000"/>
+            <a:ext cx="2007794" cy="822960"/>
+          </a:xfrm>
+          <a:prstGeom prst="rect">
+            <a:avLst/>
+          </a:prstGeom>
+          <a:noFill/>
+          <a:ln/>
+        </p:spPr>
+        <p:txBody>
+          <a:bodyPr wrap="square" lIns="0" tIns="0" rIns="0" bIns="0" rtlCol="0" anchor="t"/>
+          <a:lstStyle/>
+          <a:p>
+            <a:pPr indent="0" marL="0">
+              <a:buNone/>
+            </a:pPr>
+            <a:r>
+              <a:rPr lang="en-US" sz="1300" dirty="0">
+                <a:solidFill>
+                  <a:srgbClr val="6A6458"/>
+                </a:solidFill>
+                <a:latin typeface="Microsoft YaHei" pitchFamily="34" charset="0"/>
+                <a:ea typeface="Microsoft YaHei" pitchFamily="34" charset="-122"/>
+                <a:cs typeface="Microsoft YaHei" pitchFamily="34" charset="-120"/>
+              </a:rPr>
+              <a:t>〔提出对策〕</a:t>
+            </a:r>
+            <a:endParaRPr lang="en-US" sz="1300" dirty="0"/>
+          </a:p>
+        </p:txBody>
+      </p:sp>
+      <p:sp>
+        <p:nvSpPr>
+          <p:cNvPr id="19" name="Text 17"/>
+          <p:cNvSpPr txBox="1"/>
+          <p:nvPr/>
+        </p:nvSpPr>
+        <p:spPr>
+          <a:xfrm>
+            <a:off x="8766581" y="3017520"/>
+            <a:ext cx="411480" cy="548640"/>
+          </a:xfrm>
+          <a:prstGeom prst="rect">
+            <a:avLst/>
+          </a:prstGeom>
+          <a:noFill/>
+          <a:ln/>
+        </p:spPr>
+        <p:txBody>
+          <a:bodyPr wrap="square" lIns="0" tIns="0" rIns="0" bIns="0" rtlCol="0" anchor="ctr"/>
+          <a:lstStyle/>
+          <a:p>
+            <a:pPr algn="ctr" indent="0" marL="0">
+              <a:buNone/>
+            </a:pPr>
+            <a:r>
+              <a:rPr lang="en-US" sz="2200" dirty="0">
+                <a:solidFill>
+                  <a:srgbClr val="26231E"/>
+                </a:solidFill>
+                <a:latin typeface="Bahnschrift" pitchFamily="34" charset="0"/>
+                <a:ea typeface="Bahnschrift" pitchFamily="34" charset="-122"/>
+                <a:cs typeface="Bahnschrift" pitchFamily="34" charset="-120"/>
+              </a:rPr>
+              <a:t>→</a:t>
+            </a:r>
+            <a:endParaRPr lang="en-US" sz="2200" dirty="0"/>
+          </a:p>
+        </p:txBody>
+      </p:sp>
+      <p:sp>
+        <p:nvSpPr>
+          <p:cNvPr id="20" name="Shape 18"/>
+          <p:cNvSpPr/>
+          <p:nvPr/>
+        </p:nvSpPr>
+        <p:spPr>
+          <a:xfrm>
+            <a:off x="9178061" y="2103120"/>
+            <a:ext cx="2464994" cy="2377440"/>
+          </a:xfrm>
+          <a:prstGeom prst="roundRect">
+            <a:avLst>
+              <a:gd name="adj" fmla="val 6154"/>
+            </a:avLst>
+          </a:prstGeom>
+          <a:solidFill>
+            <a:srgbClr val="FBFAF7"/>
+          </a:solidFill>
+          <a:ln w="28575">
             <a:solidFill>
               <a:srgbClr val="26231E"/>
             </a:solidFill>
@@ -6916,13 +7404,13 @@
       </p:sp>
       <p:sp>
         <p:nvSpPr>
-          <p:cNvPr id="10" name="Text 8"/>
-          <p:cNvSpPr txBox="1"/>
-          <p:nvPr/>
-        </p:nvSpPr>
-        <p:spPr>
-          <a:xfrm>
-            <a:off x="3653714" y="2286000"/>
+          <p:cNvPr id="21" name="Text 19"/>
+          <p:cNvSpPr txBox="1"/>
+          <p:nvPr/>
+        </p:nvSpPr>
+        <p:spPr>
+          <a:xfrm>
+            <a:off x="9406661" y="2286000"/>
             <a:ext cx="914400" cy="411480"/>
           </a:xfrm>
           <a:prstGeom prst="rect">
@@ -6947,7 +7435,7 @@
                 <a:ea typeface="Bahnschrift" pitchFamily="34" charset="-122"/>
                 <a:cs typeface="Bahnschrift" pitchFamily="34" charset="-120"/>
               </a:rPr>
-              <a:t>02</a:t>
+              <a:t>04</a:t>
             </a:r>
             <a:endParaRPr lang="en-US" sz="1800" dirty="0"/>
           </a:p>
@@ -6955,13 +7443,13 @@
       </p:sp>
       <p:sp>
         <p:nvSpPr>
-          <p:cNvPr id="11" name="Text 9"/>
-          <p:cNvSpPr txBox="1"/>
-          <p:nvPr/>
-        </p:nvSpPr>
-        <p:spPr>
-          <a:xfrm>
-            <a:off x="3653714" y="2834640"/>
+          <p:cNvPr id="22" name="Text 20"/>
+          <p:cNvSpPr txBox="1"/>
+          <p:nvPr/>
+        </p:nvSpPr>
+        <p:spPr>
+          <a:xfrm>
+            <a:off x="9406661" y="2834640"/>
             <a:ext cx="2007794" cy="457200"/>
           </a:xfrm>
           <a:prstGeom prst="rect">
@@ -6986,7 +7474,7 @@
                 <a:ea typeface="Microsoft YaHei" pitchFamily="34" charset="-122"/>
                 <a:cs typeface="Microsoft YaHei" pitchFamily="34" charset="-120"/>
               </a:rPr>
-              <a:t>分析</a:t>
+              <a:t>验证</a:t>
             </a:r>
             <a:endParaRPr lang="en-US" sz="2200" dirty="0"/>
           </a:p>
@@ -6994,369 +7482,7 @@
       </p:sp>
       <p:sp>
         <p:nvSpPr>
-          <p:cNvPr id="12" name="Text 10"/>
-          <p:cNvSpPr txBox="1"/>
-          <p:nvPr/>
-        </p:nvSpPr>
-        <p:spPr>
-          <a:xfrm>
-            <a:off x="3653714" y="3429000"/>
-            <a:ext cx="2007794" cy="822960"/>
-          </a:xfrm>
-          <a:prstGeom prst="rect">
-            <a:avLst/>
-          </a:prstGeom>
-          <a:noFill/>
-          <a:ln/>
-        </p:spPr>
-        <p:txBody>
-          <a:bodyPr wrap="square" lIns="0" tIns="0" rIns="0" bIns="0" rtlCol="0" anchor="t"/>
-          <a:lstStyle/>
-          <a:p>
-            <a:pPr indent="0" marL="0">
-              <a:buNone/>
-            </a:pPr>
-            <a:r>
-              <a:rPr lang="en-US" sz="1300" dirty="0">
-                <a:solidFill>
-                  <a:srgbClr val="6A6458"/>
-                </a:solidFill>
-                <a:latin typeface="Microsoft YaHei" pitchFamily="34" charset="0"/>
-                <a:ea typeface="Microsoft YaHei" pitchFamily="34" charset="-122"/>
-                <a:cs typeface="Microsoft YaHei" pitchFamily="34" charset="-120"/>
-              </a:rPr>
-              <a:t>〔定位原因〕</a:t>
-            </a:r>
-            <a:endParaRPr lang="en-US" sz="1300" dirty="0"/>
-          </a:p>
-        </p:txBody>
-      </p:sp>
-      <p:sp>
-        <p:nvSpPr>
-          <p:cNvPr id="13" name="Text 11"/>
-          <p:cNvSpPr txBox="1"/>
-          <p:nvPr/>
-        </p:nvSpPr>
-        <p:spPr>
-          <a:xfrm>
-            <a:off x="5890108" y="3017520"/>
-            <a:ext cx="411480" cy="548640"/>
-          </a:xfrm>
-          <a:prstGeom prst="rect">
-            <a:avLst/>
-          </a:prstGeom>
-          <a:noFill/>
-          <a:ln/>
-        </p:spPr>
-        <p:txBody>
-          <a:bodyPr wrap="square" lIns="0" tIns="0" rIns="0" bIns="0" rtlCol="0" anchor="ctr"/>
-          <a:lstStyle/>
-          <a:p>
-            <a:pPr algn="ctr" indent="0" marL="0">
-              <a:buNone/>
-            </a:pPr>
-            <a:r>
-              <a:rPr lang="en-US" sz="2200" dirty="0">
-                <a:solidFill>
-                  <a:srgbClr val="26231E"/>
-                </a:solidFill>
-                <a:latin typeface="Bahnschrift" pitchFamily="34" charset="0"/>
-                <a:ea typeface="Bahnschrift" pitchFamily="34" charset="-122"/>
-                <a:cs typeface="Bahnschrift" pitchFamily="34" charset="-120"/>
-              </a:rPr>
-              <a:t>→</a:t>
-            </a:r>
-            <a:endParaRPr lang="en-US" sz="2200" dirty="0"/>
-          </a:p>
-        </p:txBody>
-      </p:sp>
-      <p:sp>
-        <p:nvSpPr>
-          <p:cNvPr id="14" name="Shape 12"/>
-          <p:cNvSpPr/>
-          <p:nvPr/>
-        </p:nvSpPr>
-        <p:spPr>
-          <a:xfrm>
-            <a:off x="6301588" y="2103120"/>
-            <a:ext cx="2464994" cy="2377440"/>
-          </a:xfrm>
-          <a:prstGeom prst="rect">
-            <a:avLst/>
-          </a:prstGeom>
-          <a:solidFill>
-            <a:srgbClr val="FBFAF7"/>
-          </a:solidFill>
-          <a:ln w="19050">
-            <a:solidFill>
-              <a:srgbClr val="26231E"/>
-            </a:solidFill>
-            <a:prstDash val="solid"/>
-          </a:ln>
-        </p:spPr>
-      </p:sp>
-      <p:sp>
-        <p:nvSpPr>
-          <p:cNvPr id="15" name="Text 13"/>
-          <p:cNvSpPr txBox="1"/>
-          <p:nvPr/>
-        </p:nvSpPr>
-        <p:spPr>
-          <a:xfrm>
-            <a:off x="6530188" y="2286000"/>
-            <a:ext cx="914400" cy="411480"/>
-          </a:xfrm>
-          <a:prstGeom prst="rect">
-            <a:avLst/>
-          </a:prstGeom>
-          <a:noFill/>
-          <a:ln/>
-        </p:spPr>
-        <p:txBody>
-          <a:bodyPr wrap="square" lIns="0" tIns="0" rIns="0" bIns="0" rtlCol="0" anchor="t"/>
-          <a:lstStyle/>
-          <a:p>
-            <a:pPr indent="0" marL="0">
-              <a:buNone/>
-            </a:pPr>
-            <a:r>
-              <a:rPr lang="en-US" sz="1800" b="1" dirty="0">
-                <a:solidFill>
-                  <a:srgbClr val="26231E"/>
-                </a:solidFill>
-                <a:latin typeface="Bahnschrift" pitchFamily="34" charset="0"/>
-                <a:ea typeface="Bahnschrift" pitchFamily="34" charset="-122"/>
-                <a:cs typeface="Bahnschrift" pitchFamily="34" charset="-120"/>
-              </a:rPr>
-              <a:t>03</a:t>
-            </a:r>
-            <a:endParaRPr lang="en-US" sz="1800" dirty="0"/>
-          </a:p>
-        </p:txBody>
-      </p:sp>
-      <p:sp>
-        <p:nvSpPr>
-          <p:cNvPr id="16" name="Text 14"/>
-          <p:cNvSpPr txBox="1"/>
-          <p:nvPr/>
-        </p:nvSpPr>
-        <p:spPr>
-          <a:xfrm>
-            <a:off x="6530188" y="2834640"/>
-            <a:ext cx="2007794" cy="457200"/>
-          </a:xfrm>
-          <a:prstGeom prst="rect">
-            <a:avLst/>
-          </a:prstGeom>
-          <a:noFill/>
-          <a:ln/>
-        </p:spPr>
-        <p:txBody>
-          <a:bodyPr wrap="square" lIns="0" tIns="0" rIns="0" bIns="0" rtlCol="0" anchor="t"/>
-          <a:lstStyle/>
-          <a:p>
-            <a:pPr indent="0" marL="0">
-              <a:buNone/>
-            </a:pPr>
-            <a:r>
-              <a:rPr lang="en-US" sz="2200" b="1" dirty="0">
-                <a:solidFill>
-                  <a:srgbClr val="26231E"/>
-                </a:solidFill>
-                <a:latin typeface="Microsoft YaHei" pitchFamily="34" charset="0"/>
-                <a:ea typeface="Microsoft YaHei" pitchFamily="34" charset="-122"/>
-                <a:cs typeface="Microsoft YaHei" pitchFamily="34" charset="-120"/>
-              </a:rPr>
-              <a:t>方案</a:t>
-            </a:r>
-            <a:endParaRPr lang="en-US" sz="2200" dirty="0"/>
-          </a:p>
-        </p:txBody>
-      </p:sp>
-      <p:sp>
-        <p:nvSpPr>
-          <p:cNvPr id="17" name="Text 15"/>
-          <p:cNvSpPr txBox="1"/>
-          <p:nvPr/>
-        </p:nvSpPr>
-        <p:spPr>
-          <a:xfrm>
-            <a:off x="6530188" y="3429000"/>
-            <a:ext cx="2007794" cy="822960"/>
-          </a:xfrm>
-          <a:prstGeom prst="rect">
-            <a:avLst/>
-          </a:prstGeom>
-          <a:noFill/>
-          <a:ln/>
-        </p:spPr>
-        <p:txBody>
-          <a:bodyPr wrap="square" lIns="0" tIns="0" rIns="0" bIns="0" rtlCol="0" anchor="t"/>
-          <a:lstStyle/>
-          <a:p>
-            <a:pPr indent="0" marL="0">
-              <a:buNone/>
-            </a:pPr>
-            <a:r>
-              <a:rPr lang="en-US" sz="1300" dirty="0">
-                <a:solidFill>
-                  <a:srgbClr val="6A6458"/>
-                </a:solidFill>
-                <a:latin typeface="Microsoft YaHei" pitchFamily="34" charset="0"/>
-                <a:ea typeface="Microsoft YaHei" pitchFamily="34" charset="-122"/>
-                <a:cs typeface="Microsoft YaHei" pitchFamily="34" charset="-120"/>
-              </a:rPr>
-              <a:t>〔提出对策〕</a:t>
-            </a:r>
-            <a:endParaRPr lang="en-US" sz="1300" dirty="0"/>
-          </a:p>
-        </p:txBody>
-      </p:sp>
-      <p:sp>
-        <p:nvSpPr>
-          <p:cNvPr id="18" name="Text 16"/>
-          <p:cNvSpPr txBox="1"/>
-          <p:nvPr/>
-        </p:nvSpPr>
-        <p:spPr>
-          <a:xfrm>
-            <a:off x="8766581" y="3017520"/>
-            <a:ext cx="411480" cy="548640"/>
-          </a:xfrm>
-          <a:prstGeom prst="rect">
-            <a:avLst/>
-          </a:prstGeom>
-          <a:noFill/>
-          <a:ln/>
-        </p:spPr>
-        <p:txBody>
-          <a:bodyPr wrap="square" lIns="0" tIns="0" rIns="0" bIns="0" rtlCol="0" anchor="ctr"/>
-          <a:lstStyle/>
-          <a:p>
-            <a:pPr algn="ctr" indent="0" marL="0">
-              <a:buNone/>
-            </a:pPr>
-            <a:r>
-              <a:rPr lang="en-US" sz="2200" dirty="0">
-                <a:solidFill>
-                  <a:srgbClr val="26231E"/>
-                </a:solidFill>
-                <a:latin typeface="Bahnschrift" pitchFamily="34" charset="0"/>
-                <a:ea typeface="Bahnschrift" pitchFamily="34" charset="-122"/>
-                <a:cs typeface="Bahnschrift" pitchFamily="34" charset="-120"/>
-              </a:rPr>
-              <a:t>→</a:t>
-            </a:r>
-            <a:endParaRPr lang="en-US" sz="2200" dirty="0"/>
-          </a:p>
-        </p:txBody>
-      </p:sp>
-      <p:sp>
-        <p:nvSpPr>
-          <p:cNvPr id="19" name="Shape 17"/>
-          <p:cNvSpPr/>
-          <p:nvPr/>
-        </p:nvSpPr>
-        <p:spPr>
-          <a:xfrm>
-            <a:off x="9178061" y="2103120"/>
-            <a:ext cx="2464994" cy="2377440"/>
-          </a:xfrm>
-          <a:prstGeom prst="rect">
-            <a:avLst/>
-          </a:prstGeom>
-          <a:solidFill>
-            <a:srgbClr val="26231E"/>
-          </a:solidFill>
-          <a:ln w="19050">
-            <a:solidFill>
-              <a:srgbClr val="26231E"/>
-            </a:solidFill>
-            <a:prstDash val="solid"/>
-          </a:ln>
-        </p:spPr>
-      </p:sp>
-      <p:sp>
-        <p:nvSpPr>
-          <p:cNvPr id="20" name="Text 18"/>
-          <p:cNvSpPr txBox="1"/>
-          <p:nvPr/>
-        </p:nvSpPr>
-        <p:spPr>
-          <a:xfrm>
-            <a:off x="9406661" y="2286000"/>
-            <a:ext cx="914400" cy="411480"/>
-          </a:xfrm>
-          <a:prstGeom prst="rect">
-            <a:avLst/>
-          </a:prstGeom>
-          <a:noFill/>
-          <a:ln/>
-        </p:spPr>
-        <p:txBody>
-          <a:bodyPr wrap="square" lIns="0" tIns="0" rIns="0" bIns="0" rtlCol="0" anchor="t"/>
-          <a:lstStyle/>
-          <a:p>
-            <a:pPr indent="0" marL="0">
-              <a:buNone/>
-            </a:pPr>
-            <a:r>
-              <a:rPr lang="en-US" sz="1800" b="1" dirty="0">
-                <a:solidFill>
-                  <a:srgbClr val="FBFAF7"/>
-                </a:solidFill>
-                <a:latin typeface="Bahnschrift" pitchFamily="34" charset="0"/>
-                <a:ea typeface="Bahnschrift" pitchFamily="34" charset="-122"/>
-                <a:cs typeface="Bahnschrift" pitchFamily="34" charset="-120"/>
-              </a:rPr>
-              <a:t>04</a:t>
-            </a:r>
-            <a:endParaRPr lang="en-US" sz="1800" dirty="0"/>
-          </a:p>
-        </p:txBody>
-      </p:sp>
-      <p:sp>
-        <p:nvSpPr>
-          <p:cNvPr id="21" name="Text 19"/>
-          <p:cNvSpPr txBox="1"/>
-          <p:nvPr/>
-        </p:nvSpPr>
-        <p:spPr>
-          <a:xfrm>
-            <a:off x="9406661" y="2834640"/>
-            <a:ext cx="2007794" cy="457200"/>
-          </a:xfrm>
-          <a:prstGeom prst="rect">
-            <a:avLst/>
-          </a:prstGeom>
-          <a:noFill/>
-          <a:ln/>
-        </p:spPr>
-        <p:txBody>
-          <a:bodyPr wrap="square" lIns="0" tIns="0" rIns="0" bIns="0" rtlCol="0" anchor="t"/>
-          <a:lstStyle/>
-          <a:p>
-            <a:pPr indent="0" marL="0">
-              <a:buNone/>
-            </a:pPr>
-            <a:r>
-              <a:rPr lang="en-US" sz="2200" b="1" dirty="0">
-                <a:solidFill>
-                  <a:srgbClr val="FBFAF7"/>
-                </a:solidFill>
-                <a:latin typeface="Microsoft YaHei" pitchFamily="34" charset="0"/>
-                <a:ea typeface="Microsoft YaHei" pitchFamily="34" charset="-122"/>
-                <a:cs typeface="Microsoft YaHei" pitchFamily="34" charset="-120"/>
-              </a:rPr>
-              <a:t>验证</a:t>
-            </a:r>
-            <a:endParaRPr lang="en-US" sz="2200" dirty="0"/>
-          </a:p>
-        </p:txBody>
-      </p:sp>
-      <p:sp>
-        <p:nvSpPr>
-          <p:cNvPr id="22" name="Text 20"/>
+          <p:cNvPr id="23" name="Text 21"/>
           <p:cNvSpPr txBox="1"/>
           <p:nvPr/>
         </p:nvSpPr>
@@ -7381,7 +7507,7 @@
             <a:r>
               <a:rPr lang="en-US" sz="1300" dirty="0">
                 <a:solidFill>
-                  <a:srgbClr val="ACA593"/>
+                  <a:srgbClr val="6A6458"/>
                 </a:solidFill>
                 <a:latin typeface="Microsoft YaHei" pitchFamily="34" charset="0"/>
                 <a:ea typeface="Microsoft YaHei" pitchFamily="34" charset="-122"/>
@@ -7655,8 +7781,8 @@
         </p:nvSpPr>
         <p:spPr>
           <a:xfrm>
-            <a:off x="548640" y="685800"/>
-            <a:ext cx="9082735" cy="685800"/>
+            <a:off x="548640" y="566928"/>
+            <a:ext cx="11094415" cy="685800"/>
           </a:xfrm>
           <a:prstGeom prst="rect">
             <a:avLst/>
@@ -7688,70 +7814,19 @@
       </p:sp>
       <p:sp>
         <p:nvSpPr>
-          <p:cNvPr id="3" name="Text 1"/>
-          <p:cNvSpPr txBox="1"/>
-          <p:nvPr/>
-        </p:nvSpPr>
-        <p:spPr>
-          <a:xfrm>
-            <a:off x="8899855" y="685800"/>
-            <a:ext cx="2743200" cy="685800"/>
-          </a:xfrm>
-          <a:prstGeom prst="rect">
-            <a:avLst/>
-          </a:prstGeom>
-          <a:noFill/>
-          <a:ln/>
-        </p:spPr>
-        <p:txBody>
-          <a:bodyPr wrap="square" lIns="0" tIns="0" rIns="0" bIns="0" rtlCol="0" anchor="ctr"/>
-          <a:lstStyle/>
-          <a:p>
-            <a:pPr algn="r" indent="0" marL="0">
-              <a:buNone/>
-            </a:pPr>
-            <a:r>
-              <a:rPr lang="en-US" sz="1300" b="1" dirty="0">
-                <a:solidFill>
-                  <a:srgbClr val="26231E"/>
-                </a:solidFill>
-                <a:latin typeface="Bahnschrift" pitchFamily="34" charset="0"/>
-                <a:ea typeface="Bahnschrift" pitchFamily="34" charset="-122"/>
-                <a:cs typeface="Bahnschrift" pitchFamily="34" charset="-120"/>
-              </a:rPr>
-              <a:t>04</a:t>
-            </a:r>
-            <a:pPr algn="r" indent="0" marL="0">
-              <a:buNone/>
-            </a:pPr>
-            <a:r>
-              <a:rPr lang="en-US" sz="1300" dirty="0">
-                <a:solidFill>
-                  <a:srgbClr val="6A6458"/>
-                </a:solidFill>
-                <a:latin typeface="Microsoft YaHei" pitchFamily="34" charset="0"/>
-                <a:ea typeface="Microsoft YaHei" pitchFamily="34" charset="-122"/>
-                <a:cs typeface="Microsoft YaHei" pitchFamily="34" charset="-120"/>
-              </a:rPr>
-              <a:t>　接下来的规划</a:t>
-            </a:r>
-            <a:endParaRPr lang="en-US" sz="1300" dirty="0"/>
-          </a:p>
-        </p:txBody>
-      </p:sp>
-      <p:sp>
-        <p:nvSpPr>
-          <p:cNvPr id="4" name="Shape 2"/>
+          <p:cNvPr id="3" name="Shape 1"/>
           <p:cNvSpPr/>
           <p:nvPr/>
         </p:nvSpPr>
         <p:spPr>
           <a:xfrm>
-            <a:off x="548640" y="1737360"/>
-            <a:ext cx="11094415" cy="32004"/>
-          </a:xfrm>
-          <a:prstGeom prst="rect">
-            <a:avLst/>
+            <a:off x="2245360" y="699516"/>
+            <a:ext cx="9397695" cy="420624"/>
+          </a:xfrm>
+          <a:prstGeom prst="roundRect">
+            <a:avLst>
+              <a:gd name="adj" fmla="val 19565"/>
+            </a:avLst>
           </a:prstGeom>
           <a:solidFill>
             <a:srgbClr val="26231E"/>
@@ -7766,14 +7841,14 @@
       </p:sp>
       <p:sp>
         <p:nvSpPr>
-          <p:cNvPr id="5" name="Text 3"/>
-          <p:cNvSpPr txBox="1"/>
-          <p:nvPr/>
-        </p:nvSpPr>
-        <p:spPr>
-          <a:xfrm>
-            <a:off x="3291840" y="1828800"/>
-            <a:ext cx="1391869" cy="365760"/>
+          <p:cNvPr id="4" name="Text 2"/>
+          <p:cNvSpPr txBox="1"/>
+          <p:nvPr/>
+        </p:nvSpPr>
+        <p:spPr>
+          <a:xfrm>
+            <a:off x="2245360" y="699516"/>
+            <a:ext cx="9196527" cy="420624"/>
           </a:xfrm>
           <a:prstGeom prst="rect">
             <a:avLst/>
@@ -7785,19 +7860,33 @@
           <a:bodyPr wrap="square" lIns="0" tIns="0" rIns="0" bIns="0" rtlCol="0" anchor="ctr"/>
           <a:lstStyle/>
           <a:p>
-            <a:pPr algn="ctr" indent="0" marL="0">
+            <a:pPr algn="r" indent="0" marL="0">
               <a:buNone/>
             </a:pPr>
             <a:r>
               <a:rPr lang="en-US" sz="1300" b="1" dirty="0">
                 <a:solidFill>
-                  <a:srgbClr val="26231E"/>
+                  <a:srgbClr val="D9A441"/>
                 </a:solidFill>
                 <a:latin typeface="Bahnschrift" pitchFamily="34" charset="0"/>
                 <a:ea typeface="Bahnschrift" pitchFamily="34" charset="-122"/>
                 <a:cs typeface="Bahnschrift" pitchFamily="34" charset="-120"/>
               </a:rPr>
-              <a:t>M1</a:t>
+              <a:t>04</a:t>
+            </a:r>
+            <a:pPr algn="r" indent="0" marL="0">
+              <a:buNone/>
+            </a:pPr>
+            <a:r>
+              <a:rPr lang="en-US" sz="1300" dirty="0">
+                <a:solidFill>
+                  <a:srgbClr val="FBFAF7"/>
+                </a:solidFill>
+                <a:latin typeface="Microsoft YaHei" pitchFamily="34" charset="0"/>
+                <a:ea typeface="Microsoft YaHei" pitchFamily="34" charset="-122"/>
+                <a:cs typeface="Microsoft YaHei" pitchFamily="34" charset="-120"/>
+              </a:rPr>
+              <a:t>　接下来的规划</a:t>
             </a:r>
             <a:endParaRPr lang="en-US" sz="1300" dirty="0"/>
           </a:p>
@@ -7805,209 +7894,14 @@
       </p:sp>
       <p:sp>
         <p:nvSpPr>
-          <p:cNvPr id="6" name="Text 4"/>
-          <p:cNvSpPr txBox="1"/>
-          <p:nvPr/>
-        </p:nvSpPr>
-        <p:spPr>
-          <a:xfrm>
-            <a:off x="4683709" y="1828800"/>
-            <a:ext cx="1391869" cy="365760"/>
-          </a:xfrm>
-          <a:prstGeom prst="rect">
-            <a:avLst/>
-          </a:prstGeom>
-          <a:noFill/>
-          <a:ln/>
-        </p:spPr>
-        <p:txBody>
-          <a:bodyPr wrap="square" lIns="0" tIns="0" rIns="0" bIns="0" rtlCol="0" anchor="ctr"/>
-          <a:lstStyle/>
-          <a:p>
-            <a:pPr algn="ctr" indent="0" marL="0">
-              <a:buNone/>
-            </a:pPr>
-            <a:r>
-              <a:rPr lang="en-US" sz="1300" b="1" dirty="0">
-                <a:solidFill>
-                  <a:srgbClr val="26231E"/>
-                </a:solidFill>
-                <a:latin typeface="Bahnschrift" pitchFamily="34" charset="0"/>
-                <a:ea typeface="Bahnschrift" pitchFamily="34" charset="-122"/>
-                <a:cs typeface="Bahnschrift" pitchFamily="34" charset="-120"/>
-              </a:rPr>
-              <a:t>M2</a:t>
-            </a:r>
-            <a:endParaRPr lang="en-US" sz="1300" dirty="0"/>
-          </a:p>
-        </p:txBody>
-      </p:sp>
-      <p:sp>
-        <p:nvSpPr>
-          <p:cNvPr id="7" name="Text 5"/>
-          <p:cNvSpPr txBox="1"/>
-          <p:nvPr/>
-        </p:nvSpPr>
-        <p:spPr>
-          <a:xfrm>
-            <a:off x="6075578" y="1828800"/>
-            <a:ext cx="1391869" cy="365760"/>
-          </a:xfrm>
-          <a:prstGeom prst="rect">
-            <a:avLst/>
-          </a:prstGeom>
-          <a:noFill/>
-          <a:ln/>
-        </p:spPr>
-        <p:txBody>
-          <a:bodyPr wrap="square" lIns="0" tIns="0" rIns="0" bIns="0" rtlCol="0" anchor="ctr"/>
-          <a:lstStyle/>
-          <a:p>
-            <a:pPr algn="ctr" indent="0" marL="0">
-              <a:buNone/>
-            </a:pPr>
-            <a:r>
-              <a:rPr lang="en-US" sz="1300" b="1" dirty="0">
-                <a:solidFill>
-                  <a:srgbClr val="26231E"/>
-                </a:solidFill>
-                <a:latin typeface="Bahnschrift" pitchFamily="34" charset="0"/>
-                <a:ea typeface="Bahnschrift" pitchFamily="34" charset="-122"/>
-                <a:cs typeface="Bahnschrift" pitchFamily="34" charset="-120"/>
-              </a:rPr>
-              <a:t>M3</a:t>
-            </a:r>
-            <a:endParaRPr lang="en-US" sz="1300" dirty="0"/>
-          </a:p>
-        </p:txBody>
-      </p:sp>
-      <p:sp>
-        <p:nvSpPr>
-          <p:cNvPr id="8" name="Text 6"/>
-          <p:cNvSpPr txBox="1"/>
-          <p:nvPr/>
-        </p:nvSpPr>
-        <p:spPr>
-          <a:xfrm>
-            <a:off x="7467448" y="1828800"/>
-            <a:ext cx="1391869" cy="365760"/>
-          </a:xfrm>
-          <a:prstGeom prst="rect">
-            <a:avLst/>
-          </a:prstGeom>
-          <a:noFill/>
-          <a:ln/>
-        </p:spPr>
-        <p:txBody>
-          <a:bodyPr wrap="square" lIns="0" tIns="0" rIns="0" bIns="0" rtlCol="0" anchor="ctr"/>
-          <a:lstStyle/>
-          <a:p>
-            <a:pPr algn="ctr" indent="0" marL="0">
-              <a:buNone/>
-            </a:pPr>
-            <a:r>
-              <a:rPr lang="en-US" sz="1300" b="1" dirty="0">
-                <a:solidFill>
-                  <a:srgbClr val="26231E"/>
-                </a:solidFill>
-                <a:latin typeface="Bahnschrift" pitchFamily="34" charset="0"/>
-                <a:ea typeface="Bahnschrift" pitchFamily="34" charset="-122"/>
-                <a:cs typeface="Bahnschrift" pitchFamily="34" charset="-120"/>
-              </a:rPr>
-              <a:t>M4</a:t>
-            </a:r>
-            <a:endParaRPr lang="en-US" sz="1300" dirty="0"/>
-          </a:p>
-        </p:txBody>
-      </p:sp>
-      <p:sp>
-        <p:nvSpPr>
-          <p:cNvPr id="9" name="Text 7"/>
-          <p:cNvSpPr txBox="1"/>
-          <p:nvPr/>
-        </p:nvSpPr>
-        <p:spPr>
-          <a:xfrm>
-            <a:off x="8859317" y="1828800"/>
-            <a:ext cx="1391869" cy="365760"/>
-          </a:xfrm>
-          <a:prstGeom prst="rect">
-            <a:avLst/>
-          </a:prstGeom>
-          <a:noFill/>
-          <a:ln/>
-        </p:spPr>
-        <p:txBody>
-          <a:bodyPr wrap="square" lIns="0" tIns="0" rIns="0" bIns="0" rtlCol="0" anchor="ctr"/>
-          <a:lstStyle/>
-          <a:p>
-            <a:pPr algn="ctr" indent="0" marL="0">
-              <a:buNone/>
-            </a:pPr>
-            <a:r>
-              <a:rPr lang="en-US" sz="1300" b="1" dirty="0">
-                <a:solidFill>
-                  <a:srgbClr val="26231E"/>
-                </a:solidFill>
-                <a:latin typeface="Bahnschrift" pitchFamily="34" charset="0"/>
-                <a:ea typeface="Bahnschrift" pitchFamily="34" charset="-122"/>
-                <a:cs typeface="Bahnschrift" pitchFamily="34" charset="-120"/>
-              </a:rPr>
-              <a:t>M5</a:t>
-            </a:r>
-            <a:endParaRPr lang="en-US" sz="1300" dirty="0"/>
-          </a:p>
-        </p:txBody>
-      </p:sp>
-      <p:sp>
-        <p:nvSpPr>
-          <p:cNvPr id="10" name="Text 8"/>
-          <p:cNvSpPr txBox="1"/>
-          <p:nvPr/>
-        </p:nvSpPr>
-        <p:spPr>
-          <a:xfrm>
-            <a:off x="10251186" y="1828800"/>
-            <a:ext cx="1391869" cy="365760"/>
-          </a:xfrm>
-          <a:prstGeom prst="rect">
-            <a:avLst/>
-          </a:prstGeom>
-          <a:noFill/>
-          <a:ln/>
-        </p:spPr>
-        <p:txBody>
-          <a:bodyPr wrap="square" lIns="0" tIns="0" rIns="0" bIns="0" rtlCol="0" anchor="ctr"/>
-          <a:lstStyle/>
-          <a:p>
-            <a:pPr algn="ctr" indent="0" marL="0">
-              <a:buNone/>
-            </a:pPr>
-            <a:r>
-              <a:rPr lang="en-US" sz="1300" b="1" dirty="0">
-                <a:solidFill>
-                  <a:srgbClr val="26231E"/>
-                </a:solidFill>
-                <a:latin typeface="Bahnschrift" pitchFamily="34" charset="0"/>
-                <a:ea typeface="Bahnschrift" pitchFamily="34" charset="-122"/>
-                <a:cs typeface="Bahnschrift" pitchFamily="34" charset="-120"/>
-              </a:rPr>
-              <a:t>M6</a:t>
-            </a:r>
-            <a:endParaRPr lang="en-US" sz="1300" dirty="0"/>
-          </a:p>
-        </p:txBody>
-      </p:sp>
-      <p:sp>
-        <p:nvSpPr>
-          <p:cNvPr id="11" name="Shape 9"/>
+          <p:cNvPr id="5" name="Shape 3"/>
           <p:cNvSpPr/>
           <p:nvPr/>
         </p:nvSpPr>
         <p:spPr>
           <a:xfrm>
-            <a:off x="548640" y="2240280"/>
-            <a:ext cx="11094415" cy="10973"/>
+            <a:off x="548640" y="1737360"/>
+            <a:ext cx="11094415" cy="32004"/>
           </a:xfrm>
           <a:prstGeom prst="rect">
             <a:avLst/>
@@ -8025,168 +7919,248 @@
       </p:sp>
       <p:sp>
         <p:nvSpPr>
+          <p:cNvPr id="6" name="Text 4"/>
+          <p:cNvSpPr txBox="1"/>
+          <p:nvPr/>
+        </p:nvSpPr>
+        <p:spPr>
+          <a:xfrm>
+            <a:off x="3291840" y="1828800"/>
+            <a:ext cx="1391869" cy="365760"/>
+          </a:xfrm>
+          <a:prstGeom prst="rect">
+            <a:avLst/>
+          </a:prstGeom>
+          <a:noFill/>
+          <a:ln/>
+        </p:spPr>
+        <p:txBody>
+          <a:bodyPr wrap="square" lIns="0" tIns="0" rIns="0" bIns="0" rtlCol="0" anchor="ctr"/>
+          <a:lstStyle/>
+          <a:p>
+            <a:pPr algn="ctr" indent="0" marL="0">
+              <a:buNone/>
+            </a:pPr>
+            <a:r>
+              <a:rPr lang="en-US" sz="1300" b="1" dirty="0">
+                <a:solidFill>
+                  <a:srgbClr val="26231E"/>
+                </a:solidFill>
+                <a:latin typeface="Bahnschrift" pitchFamily="34" charset="0"/>
+                <a:ea typeface="Bahnschrift" pitchFamily="34" charset="-122"/>
+                <a:cs typeface="Bahnschrift" pitchFamily="34" charset="-120"/>
+              </a:rPr>
+              <a:t>M1</a:t>
+            </a:r>
+            <a:endParaRPr lang="en-US" sz="1300" dirty="0"/>
+          </a:p>
+        </p:txBody>
+      </p:sp>
+      <p:sp>
+        <p:nvSpPr>
+          <p:cNvPr id="7" name="Text 5"/>
+          <p:cNvSpPr txBox="1"/>
+          <p:nvPr/>
+        </p:nvSpPr>
+        <p:spPr>
+          <a:xfrm>
+            <a:off x="4683709" y="1828800"/>
+            <a:ext cx="1391869" cy="365760"/>
+          </a:xfrm>
+          <a:prstGeom prst="rect">
+            <a:avLst/>
+          </a:prstGeom>
+          <a:noFill/>
+          <a:ln/>
+        </p:spPr>
+        <p:txBody>
+          <a:bodyPr wrap="square" lIns="0" tIns="0" rIns="0" bIns="0" rtlCol="0" anchor="ctr"/>
+          <a:lstStyle/>
+          <a:p>
+            <a:pPr algn="ctr" indent="0" marL="0">
+              <a:buNone/>
+            </a:pPr>
+            <a:r>
+              <a:rPr lang="en-US" sz="1300" b="1" dirty="0">
+                <a:solidFill>
+                  <a:srgbClr val="26231E"/>
+                </a:solidFill>
+                <a:latin typeface="Bahnschrift" pitchFamily="34" charset="0"/>
+                <a:ea typeface="Bahnschrift" pitchFamily="34" charset="-122"/>
+                <a:cs typeface="Bahnschrift" pitchFamily="34" charset="-120"/>
+              </a:rPr>
+              <a:t>M2</a:t>
+            </a:r>
+            <a:endParaRPr lang="en-US" sz="1300" dirty="0"/>
+          </a:p>
+        </p:txBody>
+      </p:sp>
+      <p:sp>
+        <p:nvSpPr>
+          <p:cNvPr id="8" name="Text 6"/>
+          <p:cNvSpPr txBox="1"/>
+          <p:nvPr/>
+        </p:nvSpPr>
+        <p:spPr>
+          <a:xfrm>
+            <a:off x="6075578" y="1828800"/>
+            <a:ext cx="1391869" cy="365760"/>
+          </a:xfrm>
+          <a:prstGeom prst="rect">
+            <a:avLst/>
+          </a:prstGeom>
+          <a:noFill/>
+          <a:ln/>
+        </p:spPr>
+        <p:txBody>
+          <a:bodyPr wrap="square" lIns="0" tIns="0" rIns="0" bIns="0" rtlCol="0" anchor="ctr"/>
+          <a:lstStyle/>
+          <a:p>
+            <a:pPr algn="ctr" indent="0" marL="0">
+              <a:buNone/>
+            </a:pPr>
+            <a:r>
+              <a:rPr lang="en-US" sz="1300" b="1" dirty="0">
+                <a:solidFill>
+                  <a:srgbClr val="26231E"/>
+                </a:solidFill>
+                <a:latin typeface="Bahnschrift" pitchFamily="34" charset="0"/>
+                <a:ea typeface="Bahnschrift" pitchFamily="34" charset="-122"/>
+                <a:cs typeface="Bahnschrift" pitchFamily="34" charset="-120"/>
+              </a:rPr>
+              <a:t>M3</a:t>
+            </a:r>
+            <a:endParaRPr lang="en-US" sz="1300" dirty="0"/>
+          </a:p>
+        </p:txBody>
+      </p:sp>
+      <p:sp>
+        <p:nvSpPr>
+          <p:cNvPr id="9" name="Text 7"/>
+          <p:cNvSpPr txBox="1"/>
+          <p:nvPr/>
+        </p:nvSpPr>
+        <p:spPr>
+          <a:xfrm>
+            <a:off x="7467448" y="1828800"/>
+            <a:ext cx="1391869" cy="365760"/>
+          </a:xfrm>
+          <a:prstGeom prst="rect">
+            <a:avLst/>
+          </a:prstGeom>
+          <a:noFill/>
+          <a:ln/>
+        </p:spPr>
+        <p:txBody>
+          <a:bodyPr wrap="square" lIns="0" tIns="0" rIns="0" bIns="0" rtlCol="0" anchor="ctr"/>
+          <a:lstStyle/>
+          <a:p>
+            <a:pPr algn="ctr" indent="0" marL="0">
+              <a:buNone/>
+            </a:pPr>
+            <a:r>
+              <a:rPr lang="en-US" sz="1300" b="1" dirty="0">
+                <a:solidFill>
+                  <a:srgbClr val="26231E"/>
+                </a:solidFill>
+                <a:latin typeface="Bahnschrift" pitchFamily="34" charset="0"/>
+                <a:ea typeface="Bahnschrift" pitchFamily="34" charset="-122"/>
+                <a:cs typeface="Bahnschrift" pitchFamily="34" charset="-120"/>
+              </a:rPr>
+              <a:t>M4</a:t>
+            </a:r>
+            <a:endParaRPr lang="en-US" sz="1300" dirty="0"/>
+          </a:p>
+        </p:txBody>
+      </p:sp>
+      <p:sp>
+        <p:nvSpPr>
+          <p:cNvPr id="10" name="Text 8"/>
+          <p:cNvSpPr txBox="1"/>
+          <p:nvPr/>
+        </p:nvSpPr>
+        <p:spPr>
+          <a:xfrm>
+            <a:off x="8859317" y="1828800"/>
+            <a:ext cx="1391869" cy="365760"/>
+          </a:xfrm>
+          <a:prstGeom prst="rect">
+            <a:avLst/>
+          </a:prstGeom>
+          <a:noFill/>
+          <a:ln/>
+        </p:spPr>
+        <p:txBody>
+          <a:bodyPr wrap="square" lIns="0" tIns="0" rIns="0" bIns="0" rtlCol="0" anchor="ctr"/>
+          <a:lstStyle/>
+          <a:p>
+            <a:pPr algn="ctr" indent="0" marL="0">
+              <a:buNone/>
+            </a:pPr>
+            <a:r>
+              <a:rPr lang="en-US" sz="1300" b="1" dirty="0">
+                <a:solidFill>
+                  <a:srgbClr val="26231E"/>
+                </a:solidFill>
+                <a:latin typeface="Bahnschrift" pitchFamily="34" charset="0"/>
+                <a:ea typeface="Bahnschrift" pitchFamily="34" charset="-122"/>
+                <a:cs typeface="Bahnschrift" pitchFamily="34" charset="-120"/>
+              </a:rPr>
+              <a:t>M5</a:t>
+            </a:r>
+            <a:endParaRPr lang="en-US" sz="1300" dirty="0"/>
+          </a:p>
+        </p:txBody>
+      </p:sp>
+      <p:sp>
+        <p:nvSpPr>
+          <p:cNvPr id="11" name="Text 9"/>
+          <p:cNvSpPr txBox="1"/>
+          <p:nvPr/>
+        </p:nvSpPr>
+        <p:spPr>
+          <a:xfrm>
+            <a:off x="10251186" y="1828800"/>
+            <a:ext cx="1391869" cy="365760"/>
+          </a:xfrm>
+          <a:prstGeom prst="rect">
+            <a:avLst/>
+          </a:prstGeom>
+          <a:noFill/>
+          <a:ln/>
+        </p:spPr>
+        <p:txBody>
+          <a:bodyPr wrap="square" lIns="0" tIns="0" rIns="0" bIns="0" rtlCol="0" anchor="ctr"/>
+          <a:lstStyle/>
+          <a:p>
+            <a:pPr algn="ctr" indent="0" marL="0">
+              <a:buNone/>
+            </a:pPr>
+            <a:r>
+              <a:rPr lang="en-US" sz="1300" b="1" dirty="0">
+                <a:solidFill>
+                  <a:srgbClr val="26231E"/>
+                </a:solidFill>
+                <a:latin typeface="Bahnschrift" pitchFamily="34" charset="0"/>
+                <a:ea typeface="Bahnschrift" pitchFamily="34" charset="-122"/>
+                <a:cs typeface="Bahnschrift" pitchFamily="34" charset="-120"/>
+              </a:rPr>
+              <a:t>M6</a:t>
+            </a:r>
+            <a:endParaRPr lang="en-US" sz="1300" dirty="0"/>
+          </a:p>
+        </p:txBody>
+      </p:sp>
+      <p:sp>
+        <p:nvSpPr>
           <p:cNvPr id="12" name="Shape 10"/>
           <p:cNvSpPr/>
           <p:nvPr/>
         </p:nvSpPr>
         <p:spPr>
           <a:xfrm>
-            <a:off x="4683709" y="2286000"/>
-            <a:ext cx="0" cy="2926080"/>
-          </a:xfrm>
-          <a:prstGeom prst="line">
-            <a:avLst/>
-          </a:prstGeom>
-          <a:noFill/>
-          <a:ln w="6350">
-            <a:solidFill>
-              <a:srgbClr val="E5E3DE"/>
-            </a:solidFill>
-            <a:prstDash val="solid"/>
-          </a:ln>
-        </p:spPr>
-      </p:sp>
-      <p:sp>
-        <p:nvSpPr>
-          <p:cNvPr id="13" name="Shape 11"/>
-          <p:cNvSpPr/>
-          <p:nvPr/>
-        </p:nvSpPr>
-        <p:spPr>
-          <a:xfrm>
-            <a:off x="6075578" y="2286000"/>
-            <a:ext cx="0" cy="2926080"/>
-          </a:xfrm>
-          <a:prstGeom prst="line">
-            <a:avLst/>
-          </a:prstGeom>
-          <a:noFill/>
-          <a:ln w="6350">
-            <a:solidFill>
-              <a:srgbClr val="E5E3DE"/>
-            </a:solidFill>
-            <a:prstDash val="solid"/>
-          </a:ln>
-        </p:spPr>
-      </p:sp>
-      <p:sp>
-        <p:nvSpPr>
-          <p:cNvPr id="14" name="Shape 12"/>
-          <p:cNvSpPr/>
-          <p:nvPr/>
-        </p:nvSpPr>
-        <p:spPr>
-          <a:xfrm>
-            <a:off x="7467448" y="2286000"/>
-            <a:ext cx="0" cy="2926080"/>
-          </a:xfrm>
-          <a:prstGeom prst="line">
-            <a:avLst/>
-          </a:prstGeom>
-          <a:noFill/>
-          <a:ln w="6350">
-            <a:solidFill>
-              <a:srgbClr val="E5E3DE"/>
-            </a:solidFill>
-            <a:prstDash val="solid"/>
-          </a:ln>
-        </p:spPr>
-      </p:sp>
-      <p:sp>
-        <p:nvSpPr>
-          <p:cNvPr id="15" name="Shape 13"/>
-          <p:cNvSpPr/>
-          <p:nvPr/>
-        </p:nvSpPr>
-        <p:spPr>
-          <a:xfrm>
-            <a:off x="8859317" y="2286000"/>
-            <a:ext cx="0" cy="2926080"/>
-          </a:xfrm>
-          <a:prstGeom prst="line">
-            <a:avLst/>
-          </a:prstGeom>
-          <a:noFill/>
-          <a:ln w="6350">
-            <a:solidFill>
-              <a:srgbClr val="E5E3DE"/>
-            </a:solidFill>
-            <a:prstDash val="solid"/>
-          </a:ln>
-        </p:spPr>
-      </p:sp>
-      <p:sp>
-        <p:nvSpPr>
-          <p:cNvPr id="16" name="Shape 14"/>
-          <p:cNvSpPr/>
-          <p:nvPr/>
-        </p:nvSpPr>
-        <p:spPr>
-          <a:xfrm>
-            <a:off x="10251186" y="2286000"/>
-            <a:ext cx="0" cy="2926080"/>
-          </a:xfrm>
-          <a:prstGeom prst="line">
-            <a:avLst/>
-          </a:prstGeom>
-          <a:noFill/>
-          <a:ln w="6350">
-            <a:solidFill>
-              <a:srgbClr val="E5E3DE"/>
-            </a:solidFill>
-            <a:prstDash val="solid"/>
-          </a:ln>
-        </p:spPr>
-      </p:sp>
-      <p:sp>
-        <p:nvSpPr>
-          <p:cNvPr id="17" name="Text 15"/>
-          <p:cNvSpPr txBox="1"/>
-          <p:nvPr/>
-        </p:nvSpPr>
-        <p:spPr>
-          <a:xfrm>
-            <a:off x="548640" y="2286000"/>
-            <a:ext cx="2743200" cy="731520"/>
-          </a:xfrm>
-          <a:prstGeom prst="rect">
-            <a:avLst/>
-          </a:prstGeom>
-          <a:noFill/>
-          <a:ln/>
-        </p:spPr>
-        <p:txBody>
-          <a:bodyPr wrap="square" lIns="0" tIns="0" rIns="0" bIns="0" rtlCol="0" anchor="ctr"/>
-          <a:lstStyle/>
-          <a:p>
-            <a:pPr indent="0" marL="0">
-              <a:buNone/>
-            </a:pPr>
-            <a:r>
-              <a:rPr lang="en-US" sz="1500" dirty="0">
-                <a:solidFill>
-                  <a:srgbClr val="6A6458"/>
-                </a:solidFill>
-                <a:latin typeface="Microsoft YaHei" pitchFamily="34" charset="0"/>
-                <a:ea typeface="Microsoft YaHei" pitchFamily="34" charset="-122"/>
-                <a:cs typeface="Microsoft YaHei" pitchFamily="34" charset="-120"/>
-              </a:rPr>
-              <a:t>〔任务一〕</a:t>
-            </a:r>
-            <a:endParaRPr lang="en-US" sz="1500" dirty="0"/>
-          </a:p>
-        </p:txBody>
-      </p:sp>
-      <p:sp>
-        <p:nvSpPr>
-          <p:cNvPr id="18" name="Shape 16"/>
-          <p:cNvSpPr/>
-          <p:nvPr/>
-        </p:nvSpPr>
-        <p:spPr>
-          <a:xfrm>
-            <a:off x="3337560" y="2514600"/>
-            <a:ext cx="2692298" cy="274320"/>
+            <a:off x="548640" y="2240280"/>
+            <a:ext cx="11094415" cy="10973"/>
           </a:xfrm>
           <a:prstGeom prst="rect">
             <a:avLst/>
@@ -8204,7 +8178,188 @@
       </p:sp>
       <p:sp>
         <p:nvSpPr>
+          <p:cNvPr id="13" name="Shape 11"/>
+          <p:cNvSpPr/>
+          <p:nvPr/>
+        </p:nvSpPr>
+        <p:spPr>
+          <a:xfrm>
+            <a:off x="4683709" y="2286000"/>
+            <a:ext cx="0" cy="2926080"/>
+          </a:xfrm>
+          <a:prstGeom prst="line">
+            <a:avLst/>
+          </a:prstGeom>
+          <a:noFill/>
+          <a:ln w="6350">
+            <a:solidFill>
+              <a:srgbClr val="E5E3DE"/>
+            </a:solidFill>
+            <a:prstDash val="solid"/>
+          </a:ln>
+        </p:spPr>
+      </p:sp>
+      <p:sp>
+        <p:nvSpPr>
+          <p:cNvPr id="14" name="Shape 12"/>
+          <p:cNvSpPr/>
+          <p:nvPr/>
+        </p:nvSpPr>
+        <p:spPr>
+          <a:xfrm>
+            <a:off x="6075578" y="2286000"/>
+            <a:ext cx="0" cy="2926080"/>
+          </a:xfrm>
+          <a:prstGeom prst="line">
+            <a:avLst/>
+          </a:prstGeom>
+          <a:noFill/>
+          <a:ln w="6350">
+            <a:solidFill>
+              <a:srgbClr val="E5E3DE"/>
+            </a:solidFill>
+            <a:prstDash val="solid"/>
+          </a:ln>
+        </p:spPr>
+      </p:sp>
+      <p:sp>
+        <p:nvSpPr>
+          <p:cNvPr id="15" name="Shape 13"/>
+          <p:cNvSpPr/>
+          <p:nvPr/>
+        </p:nvSpPr>
+        <p:spPr>
+          <a:xfrm>
+            <a:off x="7467448" y="2286000"/>
+            <a:ext cx="0" cy="2926080"/>
+          </a:xfrm>
+          <a:prstGeom prst="line">
+            <a:avLst/>
+          </a:prstGeom>
+          <a:noFill/>
+          <a:ln w="6350">
+            <a:solidFill>
+              <a:srgbClr val="E5E3DE"/>
+            </a:solidFill>
+            <a:prstDash val="solid"/>
+          </a:ln>
+        </p:spPr>
+      </p:sp>
+      <p:sp>
+        <p:nvSpPr>
+          <p:cNvPr id="16" name="Shape 14"/>
+          <p:cNvSpPr/>
+          <p:nvPr/>
+        </p:nvSpPr>
+        <p:spPr>
+          <a:xfrm>
+            <a:off x="8859317" y="2286000"/>
+            <a:ext cx="0" cy="2926080"/>
+          </a:xfrm>
+          <a:prstGeom prst="line">
+            <a:avLst/>
+          </a:prstGeom>
+          <a:noFill/>
+          <a:ln w="6350">
+            <a:solidFill>
+              <a:srgbClr val="E5E3DE"/>
+            </a:solidFill>
+            <a:prstDash val="solid"/>
+          </a:ln>
+        </p:spPr>
+      </p:sp>
+      <p:sp>
+        <p:nvSpPr>
+          <p:cNvPr id="17" name="Shape 15"/>
+          <p:cNvSpPr/>
+          <p:nvPr/>
+        </p:nvSpPr>
+        <p:spPr>
+          <a:xfrm>
+            <a:off x="10251186" y="2286000"/>
+            <a:ext cx="0" cy="2926080"/>
+          </a:xfrm>
+          <a:prstGeom prst="line">
+            <a:avLst/>
+          </a:prstGeom>
+          <a:noFill/>
+          <a:ln w="6350">
+            <a:solidFill>
+              <a:srgbClr val="E5E3DE"/>
+            </a:solidFill>
+            <a:prstDash val="solid"/>
+          </a:ln>
+        </p:spPr>
+      </p:sp>
+      <p:sp>
+        <p:nvSpPr>
+          <p:cNvPr id="18" name="Text 16"/>
+          <p:cNvSpPr txBox="1"/>
+          <p:nvPr/>
+        </p:nvSpPr>
+        <p:spPr>
+          <a:xfrm>
+            <a:off x="548640" y="2286000"/>
+            <a:ext cx="2743200" cy="731520"/>
+          </a:xfrm>
+          <a:prstGeom prst="rect">
+            <a:avLst/>
+          </a:prstGeom>
+          <a:noFill/>
+          <a:ln/>
+        </p:spPr>
+        <p:txBody>
+          <a:bodyPr wrap="square" lIns="0" tIns="0" rIns="0" bIns="0" rtlCol="0" anchor="ctr"/>
+          <a:lstStyle/>
+          <a:p>
+            <a:pPr indent="0" marL="0">
+              <a:buNone/>
+            </a:pPr>
+            <a:r>
+              <a:rPr lang="en-US" sz="1500" dirty="0">
+                <a:solidFill>
+                  <a:srgbClr val="6A6458"/>
+                </a:solidFill>
+                <a:latin typeface="Microsoft YaHei" pitchFamily="34" charset="0"/>
+                <a:ea typeface="Microsoft YaHei" pitchFamily="34" charset="-122"/>
+                <a:cs typeface="Microsoft YaHei" pitchFamily="34" charset="-120"/>
+              </a:rPr>
+              <a:t>〔任务一〕</a:t>
+            </a:r>
+            <a:endParaRPr lang="en-US" sz="1500" dirty="0"/>
+          </a:p>
+        </p:txBody>
+      </p:sp>
+      <p:sp>
+        <p:nvSpPr>
           <p:cNvPr id="19" name="Shape 17"/>
+          <p:cNvSpPr/>
+          <p:nvPr/>
+        </p:nvSpPr>
+        <p:spPr>
+          <a:xfrm>
+            <a:off x="3337560" y="2514600"/>
+            <a:ext cx="2692298" cy="274320"/>
+          </a:xfrm>
+          <a:prstGeom prst="roundRect">
+            <a:avLst>
+              <a:gd name="adj" fmla="val 20000"/>
+            </a:avLst>
+          </a:prstGeom>
+          <a:solidFill>
+            <a:srgbClr val="26231E"/>
+          </a:solidFill>
+          <a:ln w="12700">
+            <a:solidFill>
+              <a:srgbClr val="26231E"/>
+            </a:solidFill>
+            <a:prstDash val="solid"/>
+          </a:ln>
+        </p:spPr>
+      </p:sp>
+      <p:sp>
+        <p:nvSpPr>
+          <p:cNvPr id="20" name="Shape 18"/>
           <p:cNvSpPr/>
           <p:nvPr/>
         </p:nvSpPr>
@@ -8229,7 +8384,7 @@
       </p:sp>
       <p:sp>
         <p:nvSpPr>
-          <p:cNvPr id="20" name="Text 18"/>
+          <p:cNvPr id="21" name="Text 19"/>
           <p:cNvSpPr txBox="1"/>
           <p:nvPr/>
         </p:nvSpPr>
@@ -8268,7 +8423,7 @@
       </p:sp>
       <p:sp>
         <p:nvSpPr>
-          <p:cNvPr id="21" name="Shape 19"/>
+          <p:cNvPr id="22" name="Shape 20"/>
           <p:cNvSpPr/>
           <p:nvPr/>
         </p:nvSpPr>
@@ -8277,8 +8432,10 @@
             <a:off x="4729429" y="3246120"/>
             <a:ext cx="2692298" cy="274320"/>
           </a:xfrm>
-          <a:prstGeom prst="rect">
-            <a:avLst/>
+          <a:prstGeom prst="roundRect">
+            <a:avLst>
+              <a:gd name="adj" fmla="val 20000"/>
+            </a:avLst>
           </a:prstGeom>
           <a:solidFill>
             <a:srgbClr val="26231E"/>
@@ -8293,7 +8450,7 @@
       </p:sp>
       <p:sp>
         <p:nvSpPr>
-          <p:cNvPr id="22" name="Shape 20"/>
+          <p:cNvPr id="23" name="Shape 21"/>
           <p:cNvSpPr/>
           <p:nvPr/>
         </p:nvSpPr>
@@ -8318,7 +8475,7 @@
       </p:sp>
       <p:sp>
         <p:nvSpPr>
-          <p:cNvPr id="23" name="Text 21"/>
+          <p:cNvPr id="24" name="Text 22"/>
           <p:cNvSpPr txBox="1"/>
           <p:nvPr/>
         </p:nvSpPr>
@@ -8357,7 +8514,7 @@
       </p:sp>
       <p:sp>
         <p:nvSpPr>
-          <p:cNvPr id="24" name="Shape 22"/>
+          <p:cNvPr id="25" name="Shape 23"/>
           <p:cNvSpPr/>
           <p:nvPr/>
         </p:nvSpPr>
@@ -8366,8 +8523,10 @@
             <a:off x="6121298" y="3977640"/>
             <a:ext cx="2692298" cy="274320"/>
           </a:xfrm>
-          <a:prstGeom prst="rect">
-            <a:avLst/>
+          <a:prstGeom prst="roundRect">
+            <a:avLst>
+              <a:gd name="adj" fmla="val 20000"/>
+            </a:avLst>
           </a:prstGeom>
           <a:solidFill>
             <a:srgbClr val="26231E"/>
@@ -8382,7 +8541,7 @@
       </p:sp>
       <p:sp>
         <p:nvSpPr>
-          <p:cNvPr id="25" name="Shape 23"/>
+          <p:cNvPr id="26" name="Shape 24"/>
           <p:cNvSpPr/>
           <p:nvPr/>
         </p:nvSpPr>
@@ -8407,7 +8566,7 @@
       </p:sp>
       <p:sp>
         <p:nvSpPr>
-          <p:cNvPr id="26" name="Text 24"/>
+          <p:cNvPr id="27" name="Text 25"/>
           <p:cNvSpPr txBox="1"/>
           <p:nvPr/>
         </p:nvSpPr>
@@ -8446,7 +8605,7 @@
       </p:sp>
       <p:sp>
         <p:nvSpPr>
-          <p:cNvPr id="27" name="Shape 25"/>
+          <p:cNvPr id="28" name="Shape 26"/>
           <p:cNvSpPr/>
           <p:nvPr/>
         </p:nvSpPr>
@@ -8455,8 +8614,10 @@
             <a:off x="8905037" y="4709160"/>
             <a:ext cx="2692298" cy="274320"/>
           </a:xfrm>
-          <a:prstGeom prst="rect">
-            <a:avLst/>
+          <a:prstGeom prst="roundRect">
+            <a:avLst>
+              <a:gd name="adj" fmla="val 20000"/>
+            </a:avLst>
           </a:prstGeom>
           <a:solidFill>
             <a:srgbClr val="26231E"/>
@@ -8471,7 +8632,7 @@
       </p:sp>
       <p:sp>
         <p:nvSpPr>
-          <p:cNvPr id="28" name="Shape 26"/>
+          <p:cNvPr id="29" name="Shape 27"/>
           <p:cNvSpPr/>
           <p:nvPr/>
         </p:nvSpPr>
@@ -8575,8 +8736,8 @@
         </p:nvSpPr>
         <p:spPr>
           <a:xfrm>
-            <a:off x="548640" y="685800"/>
-            <a:ext cx="9082735" cy="685800"/>
+            <a:off x="548640" y="566928"/>
+            <a:ext cx="11094415" cy="685800"/>
           </a:xfrm>
           <a:prstGeom prst="rect">
             <a:avLst/>
@@ -8608,70 +8769,19 @@
       </p:sp>
       <p:sp>
         <p:nvSpPr>
-          <p:cNvPr id="3" name="Text 1"/>
-          <p:cNvSpPr txBox="1"/>
-          <p:nvPr/>
-        </p:nvSpPr>
-        <p:spPr>
-          <a:xfrm>
-            <a:off x="8899855" y="685800"/>
-            <a:ext cx="2743200" cy="685800"/>
-          </a:xfrm>
-          <a:prstGeom prst="rect">
-            <a:avLst/>
-          </a:prstGeom>
-          <a:noFill/>
-          <a:ln/>
-        </p:spPr>
-        <p:txBody>
-          <a:bodyPr wrap="square" lIns="0" tIns="0" rIns="0" bIns="0" rtlCol="0" anchor="ctr"/>
-          <a:lstStyle/>
-          <a:p>
-            <a:pPr algn="r" indent="0" marL="0">
-              <a:buNone/>
-            </a:pPr>
-            <a:r>
-              <a:rPr lang="en-US" sz="1300" b="1" dirty="0">
-                <a:solidFill>
-                  <a:srgbClr val="26231E"/>
-                </a:solidFill>
-                <a:latin typeface="Bahnschrift" pitchFamily="34" charset="0"/>
-                <a:ea typeface="Bahnschrift" pitchFamily="34" charset="-122"/>
-                <a:cs typeface="Bahnschrift" pitchFamily="34" charset="-120"/>
-              </a:rPr>
-              <a:t>04</a:t>
-            </a:r>
-            <a:pPr algn="r" indent="0" marL="0">
-              <a:buNone/>
-            </a:pPr>
-            <a:r>
-              <a:rPr lang="en-US" sz="1300" dirty="0">
-                <a:solidFill>
-                  <a:srgbClr val="6A6458"/>
-                </a:solidFill>
-                <a:latin typeface="Microsoft YaHei" pitchFamily="34" charset="0"/>
-                <a:ea typeface="Microsoft YaHei" pitchFamily="34" charset="-122"/>
-                <a:cs typeface="Microsoft YaHei" pitchFamily="34" charset="-120"/>
-              </a:rPr>
-              <a:t>　接下来的规划</a:t>
-            </a:r>
-            <a:endParaRPr lang="en-US" sz="1300" dirty="0"/>
-          </a:p>
-        </p:txBody>
-      </p:sp>
-      <p:sp>
-        <p:nvSpPr>
-          <p:cNvPr id="4" name="Shape 2"/>
+          <p:cNvPr id="3" name="Shape 1"/>
           <p:cNvSpPr/>
           <p:nvPr/>
         </p:nvSpPr>
         <p:spPr>
           <a:xfrm>
-            <a:off x="548640" y="1737360"/>
-            <a:ext cx="5272888" cy="32004"/>
-          </a:xfrm>
-          <a:prstGeom prst="rect">
-            <a:avLst/>
+            <a:off x="2600960" y="699516"/>
+            <a:ext cx="9042095" cy="420624"/>
+          </a:xfrm>
+          <a:prstGeom prst="roundRect">
+            <a:avLst>
+              <a:gd name="adj" fmla="val 19565"/>
+            </a:avLst>
           </a:prstGeom>
           <a:solidFill>
             <a:srgbClr val="26231E"/>
@@ -8686,37 +8796,115 @@
       </p:sp>
       <p:sp>
         <p:nvSpPr>
-          <p:cNvPr id="5" name="Text 3"/>
-          <p:cNvSpPr txBox="1"/>
-          <p:nvPr/>
-        </p:nvSpPr>
-        <p:spPr>
-          <a:xfrm>
-            <a:off x="548640" y="1874520"/>
-            <a:ext cx="5272888" cy="457200"/>
-          </a:xfrm>
-          <a:prstGeom prst="rect">
-            <a:avLst/>
-          </a:prstGeom>
-          <a:noFill/>
-          <a:ln/>
-        </p:spPr>
-        <p:txBody>
-          <a:bodyPr wrap="square" lIns="0" tIns="0" rIns="0" bIns="0" rtlCol="0" anchor="t"/>
-          <a:lstStyle/>
-          <a:p>
-            <a:pPr indent="0" marL="0">
-              <a:buNone/>
-            </a:pPr>
-            <a:r>
-              <a:rPr lang="en-US" sz="2000" b="1" dirty="0">
-                <a:solidFill>
-                  <a:srgbClr val="26231E"/>
+          <p:cNvPr id="4" name="Text 2"/>
+          <p:cNvSpPr txBox="1"/>
+          <p:nvPr/>
+        </p:nvSpPr>
+        <p:spPr>
+          <a:xfrm>
+            <a:off x="2600960" y="699516"/>
+            <a:ext cx="8840927" cy="420624"/>
+          </a:xfrm>
+          <a:prstGeom prst="rect">
+            <a:avLst/>
+          </a:prstGeom>
+          <a:noFill/>
+          <a:ln/>
+        </p:spPr>
+        <p:txBody>
+          <a:bodyPr wrap="square" lIns="0" tIns="0" rIns="0" bIns="0" rtlCol="0" anchor="ctr"/>
+          <a:lstStyle/>
+          <a:p>
+            <a:pPr algn="r" indent="0" marL="0">
+              <a:buNone/>
+            </a:pPr>
+            <a:r>
+              <a:rPr lang="en-US" sz="1300" b="1" dirty="0">
+                <a:solidFill>
+                  <a:srgbClr val="D9A441"/>
+                </a:solidFill>
+                <a:latin typeface="Bahnschrift" pitchFamily="34" charset="0"/>
+                <a:ea typeface="Bahnschrift" pitchFamily="34" charset="-122"/>
+                <a:cs typeface="Bahnschrift" pitchFamily="34" charset="-120"/>
+              </a:rPr>
+              <a:t>04</a:t>
+            </a:r>
+            <a:pPr algn="r" indent="0" marL="0">
+              <a:buNone/>
+            </a:pPr>
+            <a:r>
+              <a:rPr lang="en-US" sz="1300" dirty="0">
+                <a:solidFill>
+                  <a:srgbClr val="FBFAF7"/>
                 </a:solidFill>
                 <a:latin typeface="Microsoft YaHei" pitchFamily="34" charset="0"/>
                 <a:ea typeface="Microsoft YaHei" pitchFamily="34" charset="-122"/>
                 <a:cs typeface="Microsoft YaHei" pitchFamily="34" charset="-120"/>
               </a:rPr>
+              <a:t>　接下来的规划</a:t>
+            </a:r>
+            <a:endParaRPr lang="en-US" sz="1300" dirty="0"/>
+          </a:p>
+        </p:txBody>
+      </p:sp>
+      <p:sp>
+        <p:nvSpPr>
+          <p:cNvPr id="5" name="Shape 3"/>
+          <p:cNvSpPr/>
+          <p:nvPr/>
+        </p:nvSpPr>
+        <p:spPr>
+          <a:xfrm>
+            <a:off x="548640" y="1737360"/>
+            <a:ext cx="5272888" cy="32004"/>
+          </a:xfrm>
+          <a:prstGeom prst="rect">
+            <a:avLst/>
+          </a:prstGeom>
+          <a:solidFill>
+            <a:srgbClr val="26231E"/>
+          </a:solidFill>
+          <a:ln w="12700">
+            <a:solidFill>
+              <a:srgbClr val="26231E"/>
+            </a:solidFill>
+            <a:prstDash val="solid"/>
+          </a:ln>
+        </p:spPr>
+      </p:sp>
+      <p:sp>
+        <p:nvSpPr>
+          <p:cNvPr id="6" name="Text 4"/>
+          <p:cNvSpPr txBox="1"/>
+          <p:nvPr/>
+        </p:nvSpPr>
+        <p:spPr>
+          <a:xfrm>
+            <a:off x="548640" y="1874520"/>
+            <a:ext cx="5272888" cy="457200"/>
+          </a:xfrm>
+          <a:prstGeom prst="rect">
+            <a:avLst/>
+          </a:prstGeom>
+          <a:noFill/>
+          <a:ln/>
+        </p:spPr>
+        <p:txBody>
+          <a:bodyPr wrap="square" lIns="0" tIns="0" rIns="0" bIns="0" rtlCol="0" anchor="t"/>
+          <a:lstStyle/>
+          <a:p>
+            <a:pPr indent="0" marL="0">
+              <a:buNone/>
+            </a:pPr>
+            <a:r>
+              <a:rPr lang="en-US" sz="2000" b="1" dirty="0">
+                <a:solidFill>
+                  <a:srgbClr val="26231E"/>
+                </a:solidFill>
+                <a:latin typeface="Microsoft YaHei" pitchFamily="34" charset="0"/>
+                <a:ea typeface="Microsoft YaHei" pitchFamily="34" charset="-122"/>
+                <a:cs typeface="Microsoft YaHei" pitchFamily="34" charset="-120"/>
+              </a:rPr>
               <a:t>必须完成</a:t>
             </a:r>
             <a:endParaRPr lang="en-US" sz="2000" dirty="0"/>
@@ -8725,7 +8913,7 @@
       </p:sp>
       <p:sp>
         <p:nvSpPr>
-          <p:cNvPr id="6" name="Text 4"/>
+          <p:cNvPr id="7" name="Text 5"/>
           <p:cNvSpPr txBox="1"/>
           <p:nvPr/>
         </p:nvSpPr>
@@ -8819,7 +9007,7 @@
       </p:sp>
       <p:sp>
         <p:nvSpPr>
-          <p:cNvPr id="7" name="Shape 5"/>
+          <p:cNvPr id="8" name="Shape 6"/>
           <p:cNvSpPr/>
           <p:nvPr/>
         </p:nvSpPr>
@@ -8844,7 +9032,7 @@
       </p:sp>
       <p:sp>
         <p:nvSpPr>
-          <p:cNvPr id="8" name="Text 6"/>
+          <p:cNvPr id="9" name="Text 7"/>
           <p:cNvSpPr txBox="1"/>
           <p:nvPr/>
         </p:nvSpPr>
@@ -8883,7 +9071,7 @@
       </p:sp>
       <p:sp>
         <p:nvSpPr>
-          <p:cNvPr id="9" name="Text 7"/>
+          <p:cNvPr id="10" name="Text 8"/>
           <p:cNvSpPr txBox="1"/>
           <p:nvPr/>
         </p:nvSpPr>
@@ -9056,8 +9244,8 @@
         </p:nvSpPr>
         <p:spPr>
           <a:xfrm>
-            <a:off x="548640" y="685800"/>
-            <a:ext cx="9082735" cy="685800"/>
+            <a:off x="548640" y="566928"/>
+            <a:ext cx="11094415" cy="685800"/>
           </a:xfrm>
           <a:prstGeom prst="rect">
             <a:avLst/>
@@ -9089,14 +9277,41 @@
       </p:sp>
       <p:sp>
         <p:nvSpPr>
-          <p:cNvPr id="3" name="Text 1"/>
-          <p:cNvSpPr txBox="1"/>
-          <p:nvPr/>
-        </p:nvSpPr>
-        <p:spPr>
-          <a:xfrm>
-            <a:off x="8899855" y="685800"/>
-            <a:ext cx="2743200" cy="685800"/>
+          <p:cNvPr id="3" name="Shape 1"/>
+          <p:cNvSpPr/>
+          <p:nvPr/>
+        </p:nvSpPr>
+        <p:spPr>
+          <a:xfrm>
+            <a:off x="2600960" y="699516"/>
+            <a:ext cx="9042095" cy="420624"/>
+          </a:xfrm>
+          <a:prstGeom prst="roundRect">
+            <a:avLst>
+              <a:gd name="adj" fmla="val 19565"/>
+            </a:avLst>
+          </a:prstGeom>
+          <a:solidFill>
+            <a:srgbClr val="26231E"/>
+          </a:solidFill>
+          <a:ln w="12700">
+            <a:solidFill>
+              <a:srgbClr val="26231E"/>
+            </a:solidFill>
+            <a:prstDash val="solid"/>
+          </a:ln>
+        </p:spPr>
+      </p:sp>
+      <p:sp>
+        <p:nvSpPr>
+          <p:cNvPr id="4" name="Text 2"/>
+          <p:cNvSpPr txBox="1"/>
+          <p:nvPr/>
+        </p:nvSpPr>
+        <p:spPr>
+          <a:xfrm>
+            <a:off x="2600960" y="699516"/>
+            <a:ext cx="8840927" cy="420624"/>
           </a:xfrm>
           <a:prstGeom prst="rect">
             <a:avLst/>
@@ -9114,7 +9329,7 @@
             <a:r>
               <a:rPr lang="en-US" sz="1300" b="1" dirty="0">
                 <a:solidFill>
-                  <a:srgbClr val="26231E"/>
+                  <a:srgbClr val="D9A441"/>
                 </a:solidFill>
                 <a:latin typeface="Bahnschrift" pitchFamily="34" charset="0"/>
                 <a:ea typeface="Bahnschrift" pitchFamily="34" charset="-122"/>
@@ -9128,7 +9343,7 @@
             <a:r>
               <a:rPr lang="en-US" sz="1300" dirty="0">
                 <a:solidFill>
-                  <a:srgbClr val="6A6458"/>
+                  <a:srgbClr val="FBFAF7"/>
                 </a:solidFill>
                 <a:latin typeface="Microsoft YaHei" pitchFamily="34" charset="0"/>
                 <a:ea typeface="Microsoft YaHei" pitchFamily="34" charset="-122"/>
@@ -10037,8 +10252,8 @@
         </p:nvSpPr>
         <p:spPr>
           <a:xfrm>
-            <a:off x="548640" y="685800"/>
-            <a:ext cx="3657600" cy="685800"/>
+            <a:off x="548640" y="566928"/>
+            <a:ext cx="11094415" cy="685800"/>
           </a:xfrm>
           <a:prstGeom prst="rect">
             <a:avLst/>
@@ -10070,7 +10285,73 @@
       </p:sp>
       <p:sp>
         <p:nvSpPr>
-          <p:cNvPr id="3" name="Text 1"/>
+          <p:cNvPr id="3" name="Shape 1"/>
+          <p:cNvSpPr/>
+          <p:nvPr/>
+        </p:nvSpPr>
+        <p:spPr>
+          <a:xfrm>
+            <a:off x="1534160" y="699516"/>
+            <a:ext cx="10108895" cy="420624"/>
+          </a:xfrm>
+          <a:prstGeom prst="roundRect">
+            <a:avLst>
+              <a:gd name="adj" fmla="val 19565"/>
+            </a:avLst>
+          </a:prstGeom>
+          <a:solidFill>
+            <a:srgbClr val="26231E"/>
+          </a:solidFill>
+          <a:ln w="12700">
+            <a:solidFill>
+              <a:srgbClr val="26231E"/>
+            </a:solidFill>
+            <a:prstDash val="solid"/>
+          </a:ln>
+        </p:spPr>
+      </p:sp>
+      <p:sp>
+        <p:nvSpPr>
+          <p:cNvPr id="4" name="Text 2"/>
+          <p:cNvSpPr txBox="1"/>
+          <p:nvPr/>
+        </p:nvSpPr>
+        <p:spPr>
+          <a:xfrm>
+            <a:off x="1534160" y="699516"/>
+            <a:ext cx="9907727" cy="420624"/>
+          </a:xfrm>
+          <a:prstGeom prst="rect">
+            <a:avLst/>
+          </a:prstGeom>
+          <a:noFill/>
+          <a:ln/>
+        </p:spPr>
+        <p:txBody>
+          <a:bodyPr wrap="square" lIns="0" tIns="0" rIns="0" bIns="0" rtlCol="0" anchor="ctr"/>
+          <a:lstStyle/>
+          <a:p>
+            <a:pPr algn="r" indent="0" marL="0">
+              <a:buNone/>
+            </a:pPr>
+            <a:r>
+              <a:rPr lang="en-US" sz="1300" dirty="0">
+                <a:solidFill>
+                  <a:srgbClr val="FBFAF7"/>
+                </a:solidFill>
+                <a:latin typeface="Microsoft YaHei" pitchFamily="34" charset="0"/>
+                <a:ea typeface="Microsoft YaHei" pitchFamily="34" charset="-122"/>
+                <a:cs typeface="Microsoft YaHei" pitchFamily="34" charset="-120"/>
+              </a:rPr>
+              <a:t>共 5 部分</a:t>
+            </a:r>
+            <a:endParaRPr lang="en-US" sz="1300" dirty="0"/>
+          </a:p>
+        </p:txBody>
+      </p:sp>
+      <p:sp>
+        <p:nvSpPr>
+          <p:cNvPr id="5" name="Text 3"/>
           <p:cNvSpPr txBox="1"/>
           <p:nvPr/>
         </p:nvSpPr>
@@ -10095,7 +10376,7 @@
             <a:r>
               <a:rPr lang="en-US" sz="3000" b="1" dirty="0">
                 <a:solidFill>
-                  <a:srgbClr val="26231E"/>
+                  <a:srgbClr val="7F5E0F"/>
                 </a:solidFill>
                 <a:latin typeface="Bahnschrift" pitchFamily="34" charset="0"/>
                 <a:ea typeface="Bahnschrift" pitchFamily="34" charset="-122"/>
@@ -10109,7 +10390,7 @@
       </p:sp>
       <p:sp>
         <p:nvSpPr>
-          <p:cNvPr id="4" name="Text 2"/>
+          <p:cNvPr id="6" name="Text 4"/>
           <p:cNvSpPr txBox="1"/>
           <p:nvPr/>
         </p:nvSpPr>
@@ -10148,7 +10429,7 @@
       </p:sp>
       <p:sp>
         <p:nvSpPr>
-          <p:cNvPr id="5" name="Text 3"/>
+          <p:cNvPr id="7" name="Text 5"/>
           <p:cNvSpPr txBox="1"/>
           <p:nvPr/>
         </p:nvSpPr>
@@ -10187,7 +10468,7 @@
       </p:sp>
       <p:sp>
         <p:nvSpPr>
-          <p:cNvPr id="6" name="Shape 4"/>
+          <p:cNvPr id="8" name="Shape 6"/>
           <p:cNvSpPr/>
           <p:nvPr/>
         </p:nvSpPr>
@@ -10212,7 +10493,7 @@
       </p:sp>
       <p:sp>
         <p:nvSpPr>
-          <p:cNvPr id="7" name="Text 5"/>
+          <p:cNvPr id="9" name="Text 7"/>
           <p:cNvSpPr txBox="1"/>
           <p:nvPr/>
         </p:nvSpPr>
@@ -10237,7 +10518,7 @@
             <a:r>
               <a:rPr lang="en-US" sz="3000" b="1" dirty="0">
                 <a:solidFill>
-                  <a:srgbClr val="26231E"/>
+                  <a:srgbClr val="7F5E0F"/>
                 </a:solidFill>
                 <a:latin typeface="Bahnschrift" pitchFamily="34" charset="0"/>
                 <a:ea typeface="Bahnschrift" pitchFamily="34" charset="-122"/>
@@ -10251,7 +10532,7 @@
       </p:sp>
       <p:sp>
         <p:nvSpPr>
-          <p:cNvPr id="8" name="Text 6"/>
+          <p:cNvPr id="10" name="Text 8"/>
           <p:cNvSpPr txBox="1"/>
           <p:nvPr/>
         </p:nvSpPr>
@@ -10290,7 +10571,7 @@
       </p:sp>
       <p:sp>
         <p:nvSpPr>
-          <p:cNvPr id="9" name="Text 7"/>
+          <p:cNvPr id="11" name="Text 9"/>
           <p:cNvSpPr txBox="1"/>
           <p:nvPr/>
         </p:nvSpPr>
@@ -10329,7 +10610,7 @@
       </p:sp>
       <p:sp>
         <p:nvSpPr>
-          <p:cNvPr id="10" name="Shape 8"/>
+          <p:cNvPr id="12" name="Shape 10"/>
           <p:cNvSpPr/>
           <p:nvPr/>
         </p:nvSpPr>
@@ -10354,7 +10635,7 @@
       </p:sp>
       <p:sp>
         <p:nvSpPr>
-          <p:cNvPr id="11" name="Text 9"/>
+          <p:cNvPr id="13" name="Text 11"/>
           <p:cNvSpPr txBox="1"/>
           <p:nvPr/>
         </p:nvSpPr>
@@ -10379,7 +10660,7 @@
             <a:r>
               <a:rPr lang="en-US" sz="3000" b="1" dirty="0">
                 <a:solidFill>
-                  <a:srgbClr val="26231E"/>
+                  <a:srgbClr val="7F5E0F"/>
                 </a:solidFill>
                 <a:latin typeface="Bahnschrift" pitchFamily="34" charset="0"/>
                 <a:ea typeface="Bahnschrift" pitchFamily="34" charset="-122"/>
@@ -10393,7 +10674,7 @@
       </p:sp>
       <p:sp>
         <p:nvSpPr>
-          <p:cNvPr id="12" name="Text 10"/>
+          <p:cNvPr id="14" name="Text 12"/>
           <p:cNvSpPr txBox="1"/>
           <p:nvPr/>
         </p:nvSpPr>
@@ -10432,7 +10713,7 @@
       </p:sp>
       <p:sp>
         <p:nvSpPr>
-          <p:cNvPr id="13" name="Text 11"/>
+          <p:cNvPr id="15" name="Text 13"/>
           <p:cNvSpPr txBox="1"/>
           <p:nvPr/>
         </p:nvSpPr>
@@ -10471,7 +10752,7 @@
       </p:sp>
       <p:sp>
         <p:nvSpPr>
-          <p:cNvPr id="14" name="Shape 12"/>
+          <p:cNvPr id="16" name="Shape 14"/>
           <p:cNvSpPr/>
           <p:nvPr/>
         </p:nvSpPr>
@@ -10496,7 +10777,7 @@
       </p:sp>
       <p:sp>
         <p:nvSpPr>
-          <p:cNvPr id="15" name="Text 13"/>
+          <p:cNvPr id="17" name="Text 15"/>
           <p:cNvSpPr txBox="1"/>
           <p:nvPr/>
         </p:nvSpPr>
@@ -10521,7 +10802,7 @@
             <a:r>
               <a:rPr lang="en-US" sz="3000" b="1" dirty="0">
                 <a:solidFill>
-                  <a:srgbClr val="26231E"/>
+                  <a:srgbClr val="7F5E0F"/>
                 </a:solidFill>
                 <a:latin typeface="Bahnschrift" pitchFamily="34" charset="0"/>
                 <a:ea typeface="Bahnschrift" pitchFamily="34" charset="-122"/>
@@ -10535,7 +10816,7 @@
       </p:sp>
       <p:sp>
         <p:nvSpPr>
-          <p:cNvPr id="16" name="Text 14"/>
+          <p:cNvPr id="18" name="Text 16"/>
           <p:cNvSpPr txBox="1"/>
           <p:nvPr/>
         </p:nvSpPr>
@@ -10574,7 +10855,7 @@
       </p:sp>
       <p:sp>
         <p:nvSpPr>
-          <p:cNvPr id="17" name="Text 15"/>
+          <p:cNvPr id="19" name="Text 17"/>
           <p:cNvSpPr txBox="1"/>
           <p:nvPr/>
         </p:nvSpPr>
@@ -10613,7 +10894,7 @@
       </p:sp>
       <p:sp>
         <p:nvSpPr>
-          <p:cNvPr id="18" name="Shape 16"/>
+          <p:cNvPr id="20" name="Shape 18"/>
           <p:cNvSpPr/>
           <p:nvPr/>
         </p:nvSpPr>
@@ -10638,7 +10919,7 @@
       </p:sp>
       <p:sp>
         <p:nvSpPr>
-          <p:cNvPr id="19" name="Text 17"/>
+          <p:cNvPr id="21" name="Text 19"/>
           <p:cNvSpPr txBox="1"/>
           <p:nvPr/>
         </p:nvSpPr>
@@ -10663,7 +10944,7 @@
             <a:r>
               <a:rPr lang="en-US" sz="3000" b="1" dirty="0">
                 <a:solidFill>
-                  <a:srgbClr val="26231E"/>
+                  <a:srgbClr val="7F5E0F"/>
                 </a:solidFill>
                 <a:latin typeface="Bahnschrift" pitchFamily="34" charset="0"/>
                 <a:ea typeface="Bahnschrift" pitchFamily="34" charset="-122"/>
@@ -10677,7 +10958,7 @@
       </p:sp>
       <p:sp>
         <p:nvSpPr>
-          <p:cNvPr id="20" name="Text 18"/>
+          <p:cNvPr id="22" name="Text 20"/>
           <p:cNvSpPr txBox="1"/>
           <p:nvPr/>
         </p:nvSpPr>
@@ -10716,7 +10997,7 @@
       </p:sp>
       <p:sp>
         <p:nvSpPr>
-          <p:cNvPr id="21" name="Text 19"/>
+          <p:cNvPr id="23" name="Text 21"/>
           <p:cNvSpPr txBox="1"/>
           <p:nvPr/>
         </p:nvSpPr>
@@ -10755,7 +11036,7 @@
       </p:sp>
       <p:sp>
         <p:nvSpPr>
-          <p:cNvPr id="22" name="Shape 20"/>
+          <p:cNvPr id="24" name="Shape 22"/>
           <p:cNvSpPr/>
           <p:nvPr/>
         </p:nvSpPr>
@@ -10859,8 +11140,8 @@
         </p:nvSpPr>
         <p:spPr>
           <a:xfrm>
-            <a:off x="548640" y="685800"/>
-            <a:ext cx="9082735" cy="685800"/>
+            <a:off x="548640" y="566928"/>
+            <a:ext cx="11094415" cy="685800"/>
           </a:xfrm>
           <a:prstGeom prst="rect">
             <a:avLst/>
@@ -10892,70 +11173,19 @@
       </p:sp>
       <p:sp>
         <p:nvSpPr>
-          <p:cNvPr id="3" name="Text 1"/>
-          <p:cNvSpPr txBox="1"/>
-          <p:nvPr/>
-        </p:nvSpPr>
-        <p:spPr>
-          <a:xfrm>
-            <a:off x="8899855" y="685800"/>
-            <a:ext cx="2743200" cy="685800"/>
-          </a:xfrm>
-          <a:prstGeom prst="rect">
-            <a:avLst/>
-          </a:prstGeom>
-          <a:noFill/>
-          <a:ln/>
-        </p:spPr>
-        <p:txBody>
-          <a:bodyPr wrap="square" lIns="0" tIns="0" rIns="0" bIns="0" rtlCol="0" anchor="ctr"/>
-          <a:lstStyle/>
-          <a:p>
-            <a:pPr algn="r" indent="0" marL="0">
-              <a:buNone/>
-            </a:pPr>
-            <a:r>
-              <a:rPr lang="en-US" sz="1300" b="1" dirty="0">
-                <a:solidFill>
-                  <a:srgbClr val="26231E"/>
-                </a:solidFill>
-                <a:latin typeface="Bahnschrift" pitchFamily="34" charset="0"/>
-                <a:ea typeface="Bahnschrift" pitchFamily="34" charset="-122"/>
-                <a:cs typeface="Bahnschrift" pitchFamily="34" charset="-120"/>
-              </a:rPr>
-              <a:t>04</a:t>
-            </a:r>
-            <a:pPr algn="r" indent="0" marL="0">
-              <a:buNone/>
-            </a:pPr>
-            <a:r>
-              <a:rPr lang="en-US" sz="1300" dirty="0">
-                <a:solidFill>
-                  <a:srgbClr val="6A6458"/>
-                </a:solidFill>
-                <a:latin typeface="Microsoft YaHei" pitchFamily="34" charset="0"/>
-                <a:ea typeface="Microsoft YaHei" pitchFamily="34" charset="-122"/>
-                <a:cs typeface="Microsoft YaHei" pitchFamily="34" charset="-120"/>
-              </a:rPr>
-              <a:t>　接下来的规划</a:t>
-            </a:r>
-            <a:endParaRPr lang="en-US" sz="1300" dirty="0"/>
-          </a:p>
-        </p:txBody>
-      </p:sp>
-      <p:sp>
-        <p:nvSpPr>
-          <p:cNvPr id="4" name="Shape 2"/>
+          <p:cNvPr id="3" name="Shape 1"/>
           <p:cNvSpPr/>
           <p:nvPr/>
         </p:nvSpPr>
         <p:spPr>
           <a:xfrm>
-            <a:off x="548640" y="1783080"/>
-            <a:ext cx="3454298" cy="32004"/>
-          </a:xfrm>
-          <a:prstGeom prst="rect">
-            <a:avLst/>
+            <a:off x="2956560" y="699516"/>
+            <a:ext cx="8686495" cy="420624"/>
+          </a:xfrm>
+          <a:prstGeom prst="roundRect">
+            <a:avLst>
+              <a:gd name="adj" fmla="val 19565"/>
+            </a:avLst>
           </a:prstGeom>
           <a:solidFill>
             <a:srgbClr val="26231E"/>
@@ -10970,119 +11200,52 @@
       </p:sp>
       <p:sp>
         <p:nvSpPr>
-          <p:cNvPr id="5" name="Text 3"/>
-          <p:cNvSpPr txBox="1"/>
-          <p:nvPr/>
-        </p:nvSpPr>
-        <p:spPr>
-          <a:xfrm>
-            <a:off x="548640" y="1947672"/>
-            <a:ext cx="914400" cy="365760"/>
-          </a:xfrm>
-          <a:prstGeom prst="rect">
-            <a:avLst/>
-          </a:prstGeom>
-          <a:noFill/>
-          <a:ln/>
-        </p:spPr>
-        <p:txBody>
-          <a:bodyPr wrap="square" lIns="0" tIns="0" rIns="0" bIns="0" rtlCol="0" anchor="t"/>
-          <a:lstStyle/>
-          <a:p>
-            <a:pPr indent="0" marL="0">
-              <a:buNone/>
-            </a:pPr>
-            <a:r>
-              <a:rPr lang="en-US" sz="1600" b="1" dirty="0">
-                <a:solidFill>
-                  <a:srgbClr val="26231E"/>
+          <p:cNvPr id="4" name="Text 2"/>
+          <p:cNvSpPr txBox="1"/>
+          <p:nvPr/>
+        </p:nvSpPr>
+        <p:spPr>
+          <a:xfrm>
+            <a:off x="2956560" y="699516"/>
+            <a:ext cx="8485327" cy="420624"/>
+          </a:xfrm>
+          <a:prstGeom prst="rect">
+            <a:avLst/>
+          </a:prstGeom>
+          <a:noFill/>
+          <a:ln/>
+        </p:spPr>
+        <p:txBody>
+          <a:bodyPr wrap="square" lIns="0" tIns="0" rIns="0" bIns="0" rtlCol="0" anchor="ctr"/>
+          <a:lstStyle/>
+          <a:p>
+            <a:pPr algn="r" indent="0" marL="0">
+              <a:buNone/>
+            </a:pPr>
+            <a:r>
+              <a:rPr lang="en-US" sz="1300" b="1" dirty="0">
+                <a:solidFill>
+                  <a:srgbClr val="D9A441"/>
                 </a:solidFill>
                 <a:latin typeface="Bahnschrift" pitchFamily="34" charset="0"/>
                 <a:ea typeface="Bahnschrift" pitchFamily="34" charset="-122"/>
                 <a:cs typeface="Bahnschrift" pitchFamily="34" charset="-120"/>
               </a:rPr>
-              <a:t>01</a:t>
-            </a:r>
-            <a:endParaRPr lang="en-US" sz="1600" dirty="0"/>
-          </a:p>
-        </p:txBody>
-      </p:sp>
-      <p:sp>
-        <p:nvSpPr>
-          <p:cNvPr id="6" name="Text 4"/>
-          <p:cNvSpPr txBox="1"/>
-          <p:nvPr/>
-        </p:nvSpPr>
-        <p:spPr>
-          <a:xfrm>
-            <a:off x="548640" y="2331720"/>
-            <a:ext cx="3454298" cy="411480"/>
-          </a:xfrm>
-          <a:prstGeom prst="rect">
-            <a:avLst/>
-          </a:prstGeom>
-          <a:noFill/>
-          <a:ln/>
-        </p:spPr>
-        <p:txBody>
-          <a:bodyPr wrap="square" lIns="0" tIns="0" rIns="0" bIns="0" rtlCol="0" anchor="t"/>
-          <a:lstStyle/>
-          <a:p>
-            <a:pPr indent="0" marL="0">
-              <a:buNone/>
-            </a:pPr>
-            <a:r>
-              <a:rPr lang="en-US" sz="1800" b="1" dirty="0">
-                <a:solidFill>
-                  <a:srgbClr val="26231E"/>
+              <a:t>04</a:t>
+            </a:r>
+            <a:pPr algn="r" indent="0" marL="0">
+              <a:buNone/>
+            </a:pPr>
+            <a:r>
+              <a:rPr lang="en-US" sz="1300" dirty="0">
+                <a:solidFill>
+                  <a:srgbClr val="FBFAF7"/>
                 </a:solidFill>
                 <a:latin typeface="Microsoft YaHei" pitchFamily="34" charset="0"/>
                 <a:ea typeface="Microsoft YaHei" pitchFamily="34" charset="-122"/>
                 <a:cs typeface="Microsoft YaHei" pitchFamily="34" charset="-120"/>
               </a:rPr>
-              <a:t>〔未达成项〕</a:t>
-            </a:r>
-            <a:endParaRPr lang="en-US" sz="1800" dirty="0"/>
-          </a:p>
-        </p:txBody>
-      </p:sp>
-      <p:sp>
-        <p:nvSpPr>
-          <p:cNvPr id="7" name="Text 5"/>
-          <p:cNvSpPr txBox="1"/>
-          <p:nvPr/>
-        </p:nvSpPr>
-        <p:spPr>
-          <a:xfrm>
-            <a:off x="548640" y="2788920"/>
-            <a:ext cx="3454298" cy="3017520"/>
-          </a:xfrm>
-          <a:prstGeom prst="rect">
-            <a:avLst/>
-          </a:prstGeom>
-          <a:noFill/>
-          <a:ln/>
-        </p:spPr>
-        <p:txBody>
-          <a:bodyPr wrap="square" lIns="0" tIns="0" rIns="0" bIns="0" rtlCol="0" anchor="t"/>
-          <a:lstStyle/>
-          <a:p>
-            <a:pPr indent="0" marL="0">
-              <a:lnSpc>
-                <a:spcPct val="130000"/>
-              </a:lnSpc>
-              <a:buNone/>
-            </a:pPr>
-            <a:r>
-              <a:rPr lang="en-US" sz="1300" dirty="0">
-                <a:solidFill>
-                  <a:srgbClr val="6A6458"/>
-                </a:solidFill>
-                <a:latin typeface="Microsoft YaHei" pitchFamily="34" charset="0"/>
-                <a:ea typeface="Microsoft YaHei" pitchFamily="34" charset="-122"/>
-                <a:cs typeface="Microsoft YaHei" pitchFamily="34" charset="-120"/>
-              </a:rPr>
-              <a:t>〔差距、原因与弥补计划〕</a:t>
+              <a:t>　接下来的规划</a:t>
             </a:r>
             <a:endParaRPr lang="en-US" sz="1300" dirty="0"/>
           </a:p>
@@ -11090,13 +11253,13 @@
       </p:sp>
       <p:sp>
         <p:nvSpPr>
-          <p:cNvPr id="8" name="Shape 6"/>
+          <p:cNvPr id="5" name="Shape 3"/>
           <p:cNvSpPr/>
           <p:nvPr/>
         </p:nvSpPr>
         <p:spPr>
           <a:xfrm>
-            <a:off x="4368698" y="1783080"/>
+            <a:off x="548640" y="1783080"/>
             <a:ext cx="3454298" cy="32004"/>
           </a:xfrm>
           <a:prstGeom prst="rect">
@@ -11115,13 +11278,13 @@
       </p:sp>
       <p:sp>
         <p:nvSpPr>
-          <p:cNvPr id="9" name="Text 7"/>
-          <p:cNvSpPr txBox="1"/>
-          <p:nvPr/>
-        </p:nvSpPr>
-        <p:spPr>
-          <a:xfrm>
-            <a:off x="4368698" y="1947672"/>
+          <p:cNvPr id="6" name="Text 4"/>
+          <p:cNvSpPr txBox="1"/>
+          <p:nvPr/>
+        </p:nvSpPr>
+        <p:spPr>
+          <a:xfrm>
+            <a:off x="548640" y="1947672"/>
             <a:ext cx="914400" cy="365760"/>
           </a:xfrm>
           <a:prstGeom prst="rect">
@@ -11146,7 +11309,7 @@
                 <a:ea typeface="Bahnschrift" pitchFamily="34" charset="-122"/>
                 <a:cs typeface="Bahnschrift" pitchFamily="34" charset="-120"/>
               </a:rPr>
-              <a:t>02</a:t>
+              <a:t>01</a:t>
             </a:r>
             <a:endParaRPr lang="en-US" sz="1600" dirty="0"/>
           </a:p>
@@ -11154,13 +11317,13 @@
       </p:sp>
       <p:sp>
         <p:nvSpPr>
-          <p:cNvPr id="10" name="Text 8"/>
-          <p:cNvSpPr txBox="1"/>
-          <p:nvPr/>
-        </p:nvSpPr>
-        <p:spPr>
-          <a:xfrm>
-            <a:off x="4368698" y="2331720"/>
+          <p:cNvPr id="7" name="Text 5"/>
+          <p:cNvSpPr txBox="1"/>
+          <p:nvPr/>
+        </p:nvSpPr>
+        <p:spPr>
+          <a:xfrm>
+            <a:off x="548640" y="2331720"/>
             <a:ext cx="3454298" cy="411480"/>
           </a:xfrm>
           <a:prstGeom prst="rect">
@@ -11193,13 +11356,13 @@
       </p:sp>
       <p:sp>
         <p:nvSpPr>
-          <p:cNvPr id="11" name="Text 9"/>
-          <p:cNvSpPr txBox="1"/>
-          <p:nvPr/>
-        </p:nvSpPr>
-        <p:spPr>
-          <a:xfrm>
-            <a:off x="4368698" y="2788920"/>
+          <p:cNvPr id="8" name="Text 6"/>
+          <p:cNvSpPr txBox="1"/>
+          <p:nvPr/>
+        </p:nvSpPr>
+        <p:spPr>
+          <a:xfrm>
+            <a:off x="548640" y="2788920"/>
             <a:ext cx="3454298" cy="3017520"/>
           </a:xfrm>
           <a:prstGeom prst="rect">
@@ -11235,13 +11398,13 @@
       </p:sp>
       <p:sp>
         <p:nvSpPr>
-          <p:cNvPr id="12" name="Shape 10"/>
+          <p:cNvPr id="9" name="Shape 7"/>
           <p:cNvSpPr/>
           <p:nvPr/>
         </p:nvSpPr>
         <p:spPr>
           <a:xfrm>
-            <a:off x="8188757" y="1783080"/>
+            <a:off x="4368698" y="1783080"/>
             <a:ext cx="3454298" cy="32004"/>
           </a:xfrm>
           <a:prstGeom prst="rect">
@@ -11260,13 +11423,13 @@
       </p:sp>
       <p:sp>
         <p:nvSpPr>
-          <p:cNvPr id="13" name="Text 11"/>
-          <p:cNvSpPr txBox="1"/>
-          <p:nvPr/>
-        </p:nvSpPr>
-        <p:spPr>
-          <a:xfrm>
-            <a:off x="8188757" y="1947672"/>
+          <p:cNvPr id="10" name="Text 8"/>
+          <p:cNvSpPr txBox="1"/>
+          <p:nvPr/>
+        </p:nvSpPr>
+        <p:spPr>
+          <a:xfrm>
+            <a:off x="4368698" y="1947672"/>
             <a:ext cx="914400" cy="365760"/>
           </a:xfrm>
           <a:prstGeom prst="rect">
@@ -11291,7 +11454,7 @@
                 <a:ea typeface="Bahnschrift" pitchFamily="34" charset="-122"/>
                 <a:cs typeface="Bahnschrift" pitchFamily="34" charset="-120"/>
               </a:rPr>
-              <a:t>03</a:t>
+              <a:t>02</a:t>
             </a:r>
             <a:endParaRPr lang="en-US" sz="1600" dirty="0"/>
           </a:p>
@@ -11299,13 +11462,13 @@
       </p:sp>
       <p:sp>
         <p:nvSpPr>
-          <p:cNvPr id="14" name="Text 12"/>
-          <p:cNvSpPr txBox="1"/>
-          <p:nvPr/>
-        </p:nvSpPr>
-        <p:spPr>
-          <a:xfrm>
-            <a:off x="8188757" y="2331720"/>
+          <p:cNvPr id="11" name="Text 9"/>
+          <p:cNvSpPr txBox="1"/>
+          <p:nvPr/>
+        </p:nvSpPr>
+        <p:spPr>
+          <a:xfrm>
+            <a:off x="4368698" y="2331720"/>
             <a:ext cx="3454298" cy="411480"/>
           </a:xfrm>
           <a:prstGeom prst="rect">
@@ -11338,7 +11501,152 @@
       </p:sp>
       <p:sp>
         <p:nvSpPr>
+          <p:cNvPr id="12" name="Text 10"/>
+          <p:cNvSpPr txBox="1"/>
+          <p:nvPr/>
+        </p:nvSpPr>
+        <p:spPr>
+          <a:xfrm>
+            <a:off x="4368698" y="2788920"/>
+            <a:ext cx="3454298" cy="3017520"/>
+          </a:xfrm>
+          <a:prstGeom prst="rect">
+            <a:avLst/>
+          </a:prstGeom>
+          <a:noFill/>
+          <a:ln/>
+        </p:spPr>
+        <p:txBody>
+          <a:bodyPr wrap="square" lIns="0" tIns="0" rIns="0" bIns="0" rtlCol="0" anchor="t"/>
+          <a:lstStyle/>
+          <a:p>
+            <a:pPr indent="0" marL="0">
+              <a:lnSpc>
+                <a:spcPct val="130000"/>
+              </a:lnSpc>
+              <a:buNone/>
+            </a:pPr>
+            <a:r>
+              <a:rPr lang="en-US" sz="1300" dirty="0">
+                <a:solidFill>
+                  <a:srgbClr val="6A6458"/>
+                </a:solidFill>
+                <a:latin typeface="Microsoft YaHei" pitchFamily="34" charset="0"/>
+                <a:ea typeface="Microsoft YaHei" pitchFamily="34" charset="-122"/>
+                <a:cs typeface="Microsoft YaHei" pitchFamily="34" charset="-120"/>
+              </a:rPr>
+              <a:t>〔差距、原因与弥补计划〕</a:t>
+            </a:r>
+            <a:endParaRPr lang="en-US" sz="1300" dirty="0"/>
+          </a:p>
+        </p:txBody>
+      </p:sp>
+      <p:sp>
+        <p:nvSpPr>
+          <p:cNvPr id="13" name="Shape 11"/>
+          <p:cNvSpPr/>
+          <p:nvPr/>
+        </p:nvSpPr>
+        <p:spPr>
+          <a:xfrm>
+            <a:off x="8188757" y="1783080"/>
+            <a:ext cx="3454298" cy="32004"/>
+          </a:xfrm>
+          <a:prstGeom prst="rect">
+            <a:avLst/>
+          </a:prstGeom>
+          <a:solidFill>
+            <a:srgbClr val="26231E"/>
+          </a:solidFill>
+          <a:ln w="12700">
+            <a:solidFill>
+              <a:srgbClr val="26231E"/>
+            </a:solidFill>
+            <a:prstDash val="solid"/>
+          </a:ln>
+        </p:spPr>
+      </p:sp>
+      <p:sp>
+        <p:nvSpPr>
+          <p:cNvPr id="14" name="Text 12"/>
+          <p:cNvSpPr txBox="1"/>
+          <p:nvPr/>
+        </p:nvSpPr>
+        <p:spPr>
+          <a:xfrm>
+            <a:off x="8188757" y="1947672"/>
+            <a:ext cx="914400" cy="365760"/>
+          </a:xfrm>
+          <a:prstGeom prst="rect">
+            <a:avLst/>
+          </a:prstGeom>
+          <a:noFill/>
+          <a:ln/>
+        </p:spPr>
+        <p:txBody>
+          <a:bodyPr wrap="square" lIns="0" tIns="0" rIns="0" bIns="0" rtlCol="0" anchor="t"/>
+          <a:lstStyle/>
+          <a:p>
+            <a:pPr indent="0" marL="0">
+              <a:buNone/>
+            </a:pPr>
+            <a:r>
+              <a:rPr lang="en-US" sz="1600" b="1" dirty="0">
+                <a:solidFill>
+                  <a:srgbClr val="26231E"/>
+                </a:solidFill>
+                <a:latin typeface="Bahnschrift" pitchFamily="34" charset="0"/>
+                <a:ea typeface="Bahnschrift" pitchFamily="34" charset="-122"/>
+                <a:cs typeface="Bahnschrift" pitchFamily="34" charset="-120"/>
+              </a:rPr>
+              <a:t>03</a:t>
+            </a:r>
+            <a:endParaRPr lang="en-US" sz="1600" dirty="0"/>
+          </a:p>
+        </p:txBody>
+      </p:sp>
+      <p:sp>
+        <p:nvSpPr>
           <p:cNvPr id="15" name="Text 13"/>
+          <p:cNvSpPr txBox="1"/>
+          <p:nvPr/>
+        </p:nvSpPr>
+        <p:spPr>
+          <a:xfrm>
+            <a:off x="8188757" y="2331720"/>
+            <a:ext cx="3454298" cy="411480"/>
+          </a:xfrm>
+          <a:prstGeom prst="rect">
+            <a:avLst/>
+          </a:prstGeom>
+          <a:noFill/>
+          <a:ln/>
+        </p:spPr>
+        <p:txBody>
+          <a:bodyPr wrap="square" lIns="0" tIns="0" rIns="0" bIns="0" rtlCol="0" anchor="t"/>
+          <a:lstStyle/>
+          <a:p>
+            <a:pPr indent="0" marL="0">
+              <a:buNone/>
+            </a:pPr>
+            <a:r>
+              <a:rPr lang="en-US" sz="1800" b="1" dirty="0">
+                <a:solidFill>
+                  <a:srgbClr val="26231E"/>
+                </a:solidFill>
+                <a:latin typeface="Microsoft YaHei" pitchFamily="34" charset="0"/>
+                <a:ea typeface="Microsoft YaHei" pitchFamily="34" charset="-122"/>
+                <a:cs typeface="Microsoft YaHei" pitchFamily="34" charset="-120"/>
+              </a:rPr>
+              <a:t>〔未达成项〕</a:t>
+            </a:r>
+            <a:endParaRPr lang="en-US" sz="1800" dirty="0"/>
+          </a:p>
+        </p:txBody>
+      </p:sp>
+      <p:sp>
+        <p:nvSpPr>
+          <p:cNvPr id="16" name="Text 14"/>
           <p:cNvSpPr txBox="1"/>
           <p:nvPr/>
         </p:nvSpPr>
@@ -11640,8 +11948,8 @@
         </p:nvSpPr>
         <p:spPr>
           <a:xfrm>
-            <a:off x="548640" y="685800"/>
-            <a:ext cx="9082735" cy="685800"/>
+            <a:off x="548640" y="566928"/>
+            <a:ext cx="11094415" cy="685800"/>
           </a:xfrm>
           <a:prstGeom prst="rect">
             <a:avLst/>
@@ -11673,109 +11981,19 @@
       </p:sp>
       <p:sp>
         <p:nvSpPr>
-          <p:cNvPr id="3" name="Text 1"/>
-          <p:cNvSpPr txBox="1"/>
-          <p:nvPr/>
-        </p:nvSpPr>
-        <p:spPr>
-          <a:xfrm>
-            <a:off x="8899855" y="685800"/>
-            <a:ext cx="2743200" cy="685800"/>
-          </a:xfrm>
-          <a:prstGeom prst="rect">
-            <a:avLst/>
-          </a:prstGeom>
-          <a:noFill/>
-          <a:ln/>
-        </p:spPr>
-        <p:txBody>
-          <a:bodyPr wrap="square" lIns="0" tIns="0" rIns="0" bIns="0" rtlCol="0" anchor="ctr"/>
-          <a:lstStyle/>
-          <a:p>
-            <a:pPr algn="r" indent="0" marL="0">
-              <a:buNone/>
-            </a:pPr>
-            <a:r>
-              <a:rPr lang="en-US" sz="1300" b="1" dirty="0">
-                <a:solidFill>
-                  <a:srgbClr val="26231E"/>
-                </a:solidFill>
-                <a:latin typeface="Bahnschrift" pitchFamily="34" charset="0"/>
-                <a:ea typeface="Bahnschrift" pitchFamily="34" charset="-122"/>
-                <a:cs typeface="Bahnschrift" pitchFamily="34" charset="-120"/>
-              </a:rPr>
-              <a:t>05</a:t>
-            </a:r>
-            <a:pPr algn="r" indent="0" marL="0">
-              <a:buNone/>
-            </a:pPr>
-            <a:r>
-              <a:rPr lang="en-US" sz="1300" dirty="0">
-                <a:solidFill>
-                  <a:srgbClr val="6A6458"/>
-                </a:solidFill>
-                <a:latin typeface="Microsoft YaHei" pitchFamily="34" charset="0"/>
-                <a:ea typeface="Microsoft YaHei" pitchFamily="34" charset="-122"/>
-                <a:cs typeface="Microsoft YaHei" pitchFamily="34" charset="-120"/>
-              </a:rPr>
-              <a:t>　总结与展望</a:t>
-            </a:r>
-            <a:endParaRPr lang="en-US" sz="1300" dirty="0"/>
-          </a:p>
-        </p:txBody>
-      </p:sp>
-      <p:sp>
-        <p:nvSpPr>
-          <p:cNvPr id="4" name="Text 2"/>
-          <p:cNvSpPr txBox="1"/>
-          <p:nvPr/>
-        </p:nvSpPr>
-        <p:spPr>
-          <a:xfrm>
-            <a:off x="548640" y="1783080"/>
-            <a:ext cx="11094415" cy="1097280"/>
-          </a:xfrm>
-          <a:prstGeom prst="rect">
-            <a:avLst/>
-          </a:prstGeom>
-          <a:noFill/>
-          <a:ln/>
-        </p:spPr>
-        <p:txBody>
-          <a:bodyPr wrap="square" lIns="0" tIns="0" rIns="0" bIns="0" rtlCol="0" anchor="ctr"/>
-          <a:lstStyle/>
-          <a:p>
-            <a:pPr indent="0" marL="0">
-              <a:buNone/>
-            </a:pPr>
-            <a:r>
-              <a:rPr lang="en-US" sz="3200" b="1" dirty="0">
-                <a:solidFill>
-                  <a:srgbClr val="26231E"/>
-                </a:solidFill>
-                <a:latin typeface="Microsoft YaHei" pitchFamily="34" charset="0"/>
-                <a:ea typeface="Microsoft YaHei" pitchFamily="34" charset="-122"/>
-                <a:cs typeface="Microsoft YaHei" pitchFamily="34" charset="-120"/>
-              </a:rPr>
-              <a:t>〔用一句话总结本项目最重要的成果〕</a:t>
-            </a:r>
-            <a:endParaRPr lang="en-US" sz="3200" dirty="0"/>
-          </a:p>
-        </p:txBody>
-      </p:sp>
-      <p:sp>
-        <p:nvSpPr>
-          <p:cNvPr id="5" name="Shape 3"/>
+          <p:cNvPr id="3" name="Shape 1"/>
           <p:cNvSpPr/>
           <p:nvPr/>
         </p:nvSpPr>
         <p:spPr>
           <a:xfrm>
-            <a:off x="548640" y="3246120"/>
-            <a:ext cx="3454298" cy="32004"/>
-          </a:xfrm>
-          <a:prstGeom prst="rect">
-            <a:avLst/>
+            <a:off x="2600960" y="699516"/>
+            <a:ext cx="9042095" cy="420624"/>
+          </a:xfrm>
+          <a:prstGeom prst="roundRect">
+            <a:avLst>
+              <a:gd name="adj" fmla="val 19565"/>
+            </a:avLst>
           </a:prstGeom>
           <a:solidFill>
             <a:srgbClr val="26231E"/>
@@ -11790,133 +12008,105 @@
       </p:sp>
       <p:sp>
         <p:nvSpPr>
-          <p:cNvPr id="6" name="Text 4"/>
-          <p:cNvSpPr txBox="1"/>
-          <p:nvPr/>
-        </p:nvSpPr>
-        <p:spPr>
-          <a:xfrm>
-            <a:off x="548640" y="3410712"/>
-            <a:ext cx="914400" cy="365760"/>
-          </a:xfrm>
-          <a:prstGeom prst="rect">
-            <a:avLst/>
-          </a:prstGeom>
-          <a:noFill/>
-          <a:ln/>
-        </p:spPr>
-        <p:txBody>
-          <a:bodyPr wrap="square" lIns="0" tIns="0" rIns="0" bIns="0" rtlCol="0" anchor="t"/>
-          <a:lstStyle/>
-          <a:p>
-            <a:pPr indent="0" marL="0">
-              <a:buNone/>
-            </a:pPr>
-            <a:r>
-              <a:rPr lang="en-US" sz="1600" b="1" dirty="0">
-                <a:solidFill>
-                  <a:srgbClr val="26231E"/>
+          <p:cNvPr id="4" name="Text 2"/>
+          <p:cNvSpPr txBox="1"/>
+          <p:nvPr/>
+        </p:nvSpPr>
+        <p:spPr>
+          <a:xfrm>
+            <a:off x="2600960" y="699516"/>
+            <a:ext cx="8840927" cy="420624"/>
+          </a:xfrm>
+          <a:prstGeom prst="rect">
+            <a:avLst/>
+          </a:prstGeom>
+          <a:noFill/>
+          <a:ln/>
+        </p:spPr>
+        <p:txBody>
+          <a:bodyPr wrap="square" lIns="0" tIns="0" rIns="0" bIns="0" rtlCol="0" anchor="ctr"/>
+          <a:lstStyle/>
+          <a:p>
+            <a:pPr algn="r" indent="0" marL="0">
+              <a:buNone/>
+            </a:pPr>
+            <a:r>
+              <a:rPr lang="en-US" sz="1300" b="1" dirty="0">
+                <a:solidFill>
+                  <a:srgbClr val="D9A441"/>
                 </a:solidFill>
                 <a:latin typeface="Bahnschrift" pitchFamily="34" charset="0"/>
                 <a:ea typeface="Bahnschrift" pitchFamily="34" charset="-122"/>
                 <a:cs typeface="Bahnschrift" pitchFamily="34" charset="-120"/>
               </a:rPr>
-              <a:t>01</a:t>
-            </a:r>
-            <a:endParaRPr lang="en-US" sz="1600" dirty="0"/>
-          </a:p>
-        </p:txBody>
-      </p:sp>
-      <p:sp>
-        <p:nvSpPr>
-          <p:cNvPr id="7" name="Text 5"/>
-          <p:cNvSpPr txBox="1"/>
-          <p:nvPr/>
-        </p:nvSpPr>
-        <p:spPr>
-          <a:xfrm>
-            <a:off x="548640" y="3794760"/>
-            <a:ext cx="3454298" cy="411480"/>
-          </a:xfrm>
-          <a:prstGeom prst="rect">
-            <a:avLst/>
-          </a:prstGeom>
-          <a:noFill/>
-          <a:ln/>
-        </p:spPr>
-        <p:txBody>
-          <a:bodyPr wrap="square" lIns="0" tIns="0" rIns="0" bIns="0" rtlCol="0" anchor="t"/>
-          <a:lstStyle/>
-          <a:p>
-            <a:pPr indent="0" marL="0">
-              <a:buNone/>
-            </a:pPr>
-            <a:r>
-              <a:rPr lang="en-US" sz="1800" b="1" dirty="0">
-                <a:solidFill>
-                  <a:srgbClr val="26231E"/>
+              <a:t>05</a:t>
+            </a:r>
+            <a:pPr algn="r" indent="0" marL="0">
+              <a:buNone/>
+            </a:pPr>
+            <a:r>
+              <a:rPr lang="en-US" sz="1300" dirty="0">
+                <a:solidFill>
+                  <a:srgbClr val="FBFAF7"/>
                 </a:solidFill>
                 <a:latin typeface="Microsoft YaHei" pitchFamily="34" charset="0"/>
                 <a:ea typeface="Microsoft YaHei" pitchFamily="34" charset="-122"/>
                 <a:cs typeface="Microsoft YaHei" pitchFamily="34" charset="-120"/>
               </a:rPr>
-              <a:t>成果</a:t>
-            </a:r>
-            <a:endParaRPr lang="en-US" sz="1800" dirty="0"/>
-          </a:p>
-        </p:txBody>
-      </p:sp>
-      <p:sp>
-        <p:nvSpPr>
-          <p:cNvPr id="8" name="Text 6"/>
-          <p:cNvSpPr txBox="1"/>
-          <p:nvPr/>
-        </p:nvSpPr>
-        <p:spPr>
-          <a:xfrm>
-            <a:off x="548640" y="4251960"/>
-            <a:ext cx="3454298" cy="1645920"/>
-          </a:xfrm>
-          <a:prstGeom prst="rect">
-            <a:avLst/>
-          </a:prstGeom>
-          <a:noFill/>
-          <a:ln/>
-        </p:spPr>
-        <p:txBody>
-          <a:bodyPr wrap="square" lIns="0" tIns="0" rIns="0" bIns="0" rtlCol="0" anchor="t"/>
+              <a:t>　总结与展望</a:t>
+            </a:r>
+            <a:endParaRPr lang="en-US" sz="1300" dirty="0"/>
+          </a:p>
+        </p:txBody>
+      </p:sp>
+      <p:sp>
+        <p:nvSpPr>
+          <p:cNvPr id="5" name="Text 3"/>
+          <p:cNvSpPr txBox="1"/>
+          <p:nvPr/>
+        </p:nvSpPr>
+        <p:spPr>
+          <a:xfrm>
+            <a:off x="548640" y="1783080"/>
+            <a:ext cx="11094415" cy="1097280"/>
+          </a:xfrm>
+          <a:prstGeom prst="rect">
+            <a:avLst/>
+          </a:prstGeom>
+          <a:noFill/>
+          <a:ln/>
+        </p:spPr>
+        <p:txBody>
+          <a:bodyPr wrap="square" lIns="0" tIns="0" rIns="0" bIns="0" rtlCol="0" anchor="ctr"/>
           <a:lstStyle/>
           <a:p>
             <a:pPr indent="0" marL="0">
-              <a:lnSpc>
-                <a:spcPct val="130000"/>
-              </a:lnSpc>
-              <a:buNone/>
-            </a:pPr>
-            <a:r>
-              <a:rPr lang="en-US" sz="1300" dirty="0">
-                <a:solidFill>
-                  <a:srgbClr val="6A6458"/>
+              <a:buNone/>
+            </a:pPr>
+            <a:r>
+              <a:rPr lang="en-US" sz="3200" b="1" dirty="0">
+                <a:solidFill>
+                  <a:srgbClr val="26231E"/>
                 </a:solidFill>
                 <a:latin typeface="Microsoft YaHei" pitchFamily="34" charset="0"/>
                 <a:ea typeface="Microsoft YaHei" pitchFamily="34" charset="-122"/>
                 <a:cs typeface="Microsoft YaHei" pitchFamily="34" charset="-120"/>
               </a:rPr>
-              <a:t>〔两三句话说明〕</a:t>
-            </a:r>
-            <a:endParaRPr lang="en-US" sz="1300" dirty="0"/>
-          </a:p>
-        </p:txBody>
-      </p:sp>
-      <p:sp>
-        <p:nvSpPr>
-          <p:cNvPr id="9" name="Shape 7"/>
+              <a:t>〔用一句话总结本项目最重要的成果〕</a:t>
+            </a:r>
+            <a:endParaRPr lang="en-US" sz="3200" dirty="0"/>
+          </a:p>
+        </p:txBody>
+      </p:sp>
+      <p:sp>
+        <p:nvSpPr>
+          <p:cNvPr id="6" name="Shape 4"/>
           <p:cNvSpPr/>
           <p:nvPr/>
         </p:nvSpPr>
         <p:spPr>
           <a:xfrm>
-            <a:off x="4368698" y="3246120"/>
+            <a:off x="548640" y="3246120"/>
             <a:ext cx="3454298" cy="32004"/>
           </a:xfrm>
           <a:prstGeom prst="rect">
@@ -11935,13 +12125,13 @@
       </p:sp>
       <p:sp>
         <p:nvSpPr>
-          <p:cNvPr id="10" name="Text 8"/>
-          <p:cNvSpPr txBox="1"/>
-          <p:nvPr/>
-        </p:nvSpPr>
-        <p:spPr>
-          <a:xfrm>
-            <a:off x="4368698" y="3410712"/>
+          <p:cNvPr id="7" name="Text 5"/>
+          <p:cNvSpPr txBox="1"/>
+          <p:nvPr/>
+        </p:nvSpPr>
+        <p:spPr>
+          <a:xfrm>
+            <a:off x="548640" y="3410712"/>
             <a:ext cx="914400" cy="365760"/>
           </a:xfrm>
           <a:prstGeom prst="rect">
@@ -11966,7 +12156,7 @@
                 <a:ea typeface="Bahnschrift" pitchFamily="34" charset="-122"/>
                 <a:cs typeface="Bahnschrift" pitchFamily="34" charset="-120"/>
               </a:rPr>
-              <a:t>02</a:t>
+              <a:t>01</a:t>
             </a:r>
             <a:endParaRPr lang="en-US" sz="1600" dirty="0"/>
           </a:p>
@@ -11974,13 +12164,13 @@
       </p:sp>
       <p:sp>
         <p:nvSpPr>
-          <p:cNvPr id="11" name="Text 9"/>
-          <p:cNvSpPr txBox="1"/>
-          <p:nvPr/>
-        </p:nvSpPr>
-        <p:spPr>
-          <a:xfrm>
-            <a:off x="4368698" y="3794760"/>
+          <p:cNvPr id="8" name="Text 6"/>
+          <p:cNvSpPr txBox="1"/>
+          <p:nvPr/>
+        </p:nvSpPr>
+        <p:spPr>
+          <a:xfrm>
+            <a:off x="548640" y="3794760"/>
             <a:ext cx="3454298" cy="411480"/>
           </a:xfrm>
           <a:prstGeom prst="rect">
@@ -12005,7 +12195,7 @@
                 <a:ea typeface="Microsoft YaHei" pitchFamily="34" charset="-122"/>
                 <a:cs typeface="Microsoft YaHei" pitchFamily="34" charset="-120"/>
               </a:rPr>
-              <a:t>经验</a:t>
+              <a:t>成果</a:t>
             </a:r>
             <a:endParaRPr lang="en-US" sz="1800" dirty="0"/>
           </a:p>
@@ -12013,13 +12203,13 @@
       </p:sp>
       <p:sp>
         <p:nvSpPr>
-          <p:cNvPr id="12" name="Text 10"/>
-          <p:cNvSpPr txBox="1"/>
-          <p:nvPr/>
-        </p:nvSpPr>
-        <p:spPr>
-          <a:xfrm>
-            <a:off x="4368698" y="4251960"/>
+          <p:cNvPr id="9" name="Text 7"/>
+          <p:cNvSpPr txBox="1"/>
+          <p:nvPr/>
+        </p:nvSpPr>
+        <p:spPr>
+          <a:xfrm>
+            <a:off x="548640" y="4251960"/>
             <a:ext cx="3454298" cy="1645920"/>
           </a:xfrm>
           <a:prstGeom prst="rect">
@@ -12055,13 +12245,13 @@
       </p:sp>
       <p:sp>
         <p:nvSpPr>
-          <p:cNvPr id="13" name="Shape 11"/>
+          <p:cNvPr id="10" name="Shape 8"/>
           <p:cNvSpPr/>
           <p:nvPr/>
         </p:nvSpPr>
         <p:spPr>
           <a:xfrm>
-            <a:off x="8188757" y="3246120"/>
+            <a:off x="4368698" y="3246120"/>
             <a:ext cx="3454298" cy="32004"/>
           </a:xfrm>
           <a:prstGeom prst="rect">
@@ -12080,13 +12270,13 @@
       </p:sp>
       <p:sp>
         <p:nvSpPr>
-          <p:cNvPr id="14" name="Text 12"/>
-          <p:cNvSpPr txBox="1"/>
-          <p:nvPr/>
-        </p:nvSpPr>
-        <p:spPr>
-          <a:xfrm>
-            <a:off x="8188757" y="3410712"/>
+          <p:cNvPr id="11" name="Text 9"/>
+          <p:cNvSpPr txBox="1"/>
+          <p:nvPr/>
+        </p:nvSpPr>
+        <p:spPr>
+          <a:xfrm>
+            <a:off x="4368698" y="3410712"/>
             <a:ext cx="914400" cy="365760"/>
           </a:xfrm>
           <a:prstGeom prst="rect">
@@ -12111,7 +12301,7 @@
                 <a:ea typeface="Bahnschrift" pitchFamily="34" charset="-122"/>
                 <a:cs typeface="Bahnschrift" pitchFamily="34" charset="-120"/>
               </a:rPr>
-              <a:t>03</a:t>
+              <a:t>02</a:t>
             </a:r>
             <a:endParaRPr lang="en-US" sz="1600" dirty="0"/>
           </a:p>
@@ -12119,13 +12309,13 @@
       </p:sp>
       <p:sp>
         <p:nvSpPr>
-          <p:cNvPr id="15" name="Text 13"/>
-          <p:cNvSpPr txBox="1"/>
-          <p:nvPr/>
-        </p:nvSpPr>
-        <p:spPr>
-          <a:xfrm>
-            <a:off x="8188757" y="3794760"/>
+          <p:cNvPr id="12" name="Text 10"/>
+          <p:cNvSpPr txBox="1"/>
+          <p:nvPr/>
+        </p:nvSpPr>
+        <p:spPr>
+          <a:xfrm>
+            <a:off x="4368698" y="3794760"/>
             <a:ext cx="3454298" cy="411480"/>
           </a:xfrm>
           <a:prstGeom prst="rect">
@@ -12150,6 +12340,151 @@
                 <a:ea typeface="Microsoft YaHei" pitchFamily="34" charset="-122"/>
                 <a:cs typeface="Microsoft YaHei" pitchFamily="34" charset="-120"/>
               </a:rPr>
+              <a:t>经验</a:t>
+            </a:r>
+            <a:endParaRPr lang="en-US" sz="1800" dirty="0"/>
+          </a:p>
+        </p:txBody>
+      </p:sp>
+      <p:sp>
+        <p:nvSpPr>
+          <p:cNvPr id="13" name="Text 11"/>
+          <p:cNvSpPr txBox="1"/>
+          <p:nvPr/>
+        </p:nvSpPr>
+        <p:spPr>
+          <a:xfrm>
+            <a:off x="4368698" y="4251960"/>
+            <a:ext cx="3454298" cy="1645920"/>
+          </a:xfrm>
+          <a:prstGeom prst="rect">
+            <a:avLst/>
+          </a:prstGeom>
+          <a:noFill/>
+          <a:ln/>
+        </p:spPr>
+        <p:txBody>
+          <a:bodyPr wrap="square" lIns="0" tIns="0" rIns="0" bIns="0" rtlCol="0" anchor="t"/>
+          <a:lstStyle/>
+          <a:p>
+            <a:pPr indent="0" marL="0">
+              <a:lnSpc>
+                <a:spcPct val="130000"/>
+              </a:lnSpc>
+              <a:buNone/>
+            </a:pPr>
+            <a:r>
+              <a:rPr lang="en-US" sz="1300" dirty="0">
+                <a:solidFill>
+                  <a:srgbClr val="6A6458"/>
+                </a:solidFill>
+                <a:latin typeface="Microsoft YaHei" pitchFamily="34" charset="0"/>
+                <a:ea typeface="Microsoft YaHei" pitchFamily="34" charset="-122"/>
+                <a:cs typeface="Microsoft YaHei" pitchFamily="34" charset="-120"/>
+              </a:rPr>
+              <a:t>〔两三句话说明〕</a:t>
+            </a:r>
+            <a:endParaRPr lang="en-US" sz="1300" dirty="0"/>
+          </a:p>
+        </p:txBody>
+      </p:sp>
+      <p:sp>
+        <p:nvSpPr>
+          <p:cNvPr id="14" name="Shape 12"/>
+          <p:cNvSpPr/>
+          <p:nvPr/>
+        </p:nvSpPr>
+        <p:spPr>
+          <a:xfrm>
+            <a:off x="8188757" y="3246120"/>
+            <a:ext cx="3454298" cy="32004"/>
+          </a:xfrm>
+          <a:prstGeom prst="rect">
+            <a:avLst/>
+          </a:prstGeom>
+          <a:solidFill>
+            <a:srgbClr val="26231E"/>
+          </a:solidFill>
+          <a:ln w="12700">
+            <a:solidFill>
+              <a:srgbClr val="26231E"/>
+            </a:solidFill>
+            <a:prstDash val="solid"/>
+          </a:ln>
+        </p:spPr>
+      </p:sp>
+      <p:sp>
+        <p:nvSpPr>
+          <p:cNvPr id="15" name="Text 13"/>
+          <p:cNvSpPr txBox="1"/>
+          <p:nvPr/>
+        </p:nvSpPr>
+        <p:spPr>
+          <a:xfrm>
+            <a:off x="8188757" y="3410712"/>
+            <a:ext cx="914400" cy="365760"/>
+          </a:xfrm>
+          <a:prstGeom prst="rect">
+            <a:avLst/>
+          </a:prstGeom>
+          <a:noFill/>
+          <a:ln/>
+        </p:spPr>
+        <p:txBody>
+          <a:bodyPr wrap="square" lIns="0" tIns="0" rIns="0" bIns="0" rtlCol="0" anchor="t"/>
+          <a:lstStyle/>
+          <a:p>
+            <a:pPr indent="0" marL="0">
+              <a:buNone/>
+            </a:pPr>
+            <a:r>
+              <a:rPr lang="en-US" sz="1600" b="1" dirty="0">
+                <a:solidFill>
+                  <a:srgbClr val="26231E"/>
+                </a:solidFill>
+                <a:latin typeface="Bahnschrift" pitchFamily="34" charset="0"/>
+                <a:ea typeface="Bahnschrift" pitchFamily="34" charset="-122"/>
+                <a:cs typeface="Bahnschrift" pitchFamily="34" charset="-120"/>
+              </a:rPr>
+              <a:t>03</a:t>
+            </a:r>
+            <a:endParaRPr lang="en-US" sz="1600" dirty="0"/>
+          </a:p>
+        </p:txBody>
+      </p:sp>
+      <p:sp>
+        <p:nvSpPr>
+          <p:cNvPr id="16" name="Text 14"/>
+          <p:cNvSpPr txBox="1"/>
+          <p:nvPr/>
+        </p:nvSpPr>
+        <p:spPr>
+          <a:xfrm>
+            <a:off x="8188757" y="3794760"/>
+            <a:ext cx="3454298" cy="411480"/>
+          </a:xfrm>
+          <a:prstGeom prst="rect">
+            <a:avLst/>
+          </a:prstGeom>
+          <a:noFill/>
+          <a:ln/>
+        </p:spPr>
+        <p:txBody>
+          <a:bodyPr wrap="square" lIns="0" tIns="0" rIns="0" bIns="0" rtlCol="0" anchor="t"/>
+          <a:lstStyle/>
+          <a:p>
+            <a:pPr indent="0" marL="0">
+              <a:buNone/>
+            </a:pPr>
+            <a:r>
+              <a:rPr lang="en-US" sz="1800" b="1" dirty="0">
+                <a:solidFill>
+                  <a:srgbClr val="26231E"/>
+                </a:solidFill>
+                <a:latin typeface="Microsoft YaHei" pitchFamily="34" charset="0"/>
+                <a:ea typeface="Microsoft YaHei" pitchFamily="34" charset="-122"/>
+                <a:cs typeface="Microsoft YaHei" pitchFamily="34" charset="-120"/>
+              </a:rPr>
               <a:t>展望</a:t>
             </a:r>
             <a:endParaRPr lang="en-US" sz="1800" dirty="0"/>
@@ -12158,7 +12493,7 @@
       </p:sp>
       <p:sp>
         <p:nvSpPr>
-          <p:cNvPr id="16" name="Text 14"/>
+          <p:cNvPr id="17" name="Text 15"/>
           <p:cNvSpPr txBox="1"/>
           <p:nvPr/>
         </p:nvSpPr>
@@ -12460,8 +12795,8 @@
         </p:nvSpPr>
         <p:spPr>
           <a:xfrm>
-            <a:off x="548640" y="685800"/>
-            <a:ext cx="9082735" cy="685800"/>
+            <a:off x="548640" y="566928"/>
+            <a:ext cx="11094415" cy="685800"/>
           </a:xfrm>
           <a:prstGeom prst="rect">
             <a:avLst/>
@@ -12493,14 +12828,41 @@
       </p:sp>
       <p:sp>
         <p:nvSpPr>
-          <p:cNvPr id="3" name="Text 1"/>
-          <p:cNvSpPr txBox="1"/>
-          <p:nvPr/>
-        </p:nvSpPr>
-        <p:spPr>
-          <a:xfrm>
-            <a:off x="8899855" y="685800"/>
-            <a:ext cx="2743200" cy="685800"/>
+          <p:cNvPr id="3" name="Shape 1"/>
+          <p:cNvSpPr/>
+          <p:nvPr/>
+        </p:nvSpPr>
+        <p:spPr>
+          <a:xfrm>
+            <a:off x="2600960" y="699516"/>
+            <a:ext cx="9042095" cy="420624"/>
+          </a:xfrm>
+          <a:prstGeom prst="roundRect">
+            <a:avLst>
+              <a:gd name="adj" fmla="val 19565"/>
+            </a:avLst>
+          </a:prstGeom>
+          <a:solidFill>
+            <a:srgbClr val="26231E"/>
+          </a:solidFill>
+          <a:ln w="12700">
+            <a:solidFill>
+              <a:srgbClr val="26231E"/>
+            </a:solidFill>
+            <a:prstDash val="solid"/>
+          </a:ln>
+        </p:spPr>
+      </p:sp>
+      <p:sp>
+        <p:nvSpPr>
+          <p:cNvPr id="4" name="Text 2"/>
+          <p:cNvSpPr txBox="1"/>
+          <p:nvPr/>
+        </p:nvSpPr>
+        <p:spPr>
+          <a:xfrm>
+            <a:off x="2600960" y="699516"/>
+            <a:ext cx="8840927" cy="420624"/>
           </a:xfrm>
           <a:prstGeom prst="rect">
             <a:avLst/>
@@ -12518,7 +12880,7 @@
             <a:r>
               <a:rPr lang="en-US" sz="1300" b="1" dirty="0">
                 <a:solidFill>
-                  <a:srgbClr val="26231E"/>
+                  <a:srgbClr val="D9A441"/>
                 </a:solidFill>
                 <a:latin typeface="Bahnschrift" pitchFamily="34" charset="0"/>
                 <a:ea typeface="Bahnschrift" pitchFamily="34" charset="-122"/>
@@ -12532,7 +12894,7 @@
             <a:r>
               <a:rPr lang="en-US" sz="1300" dirty="0">
                 <a:solidFill>
-                  <a:srgbClr val="6A6458"/>
+                  <a:srgbClr val="FBFAF7"/>
                 </a:solidFill>
                 <a:latin typeface="Microsoft YaHei" pitchFamily="34" charset="0"/>
                 <a:ea typeface="Microsoft YaHei" pitchFamily="34" charset="-122"/>
@@ -13873,8 +14235,8 @@
         </p:nvSpPr>
         <p:spPr>
           <a:xfrm>
-            <a:off x="548640" y="685800"/>
-            <a:ext cx="9082735" cy="685800"/>
+            <a:off x="548640" y="566928"/>
+            <a:ext cx="11094415" cy="685800"/>
           </a:xfrm>
           <a:prstGeom prst="rect">
             <a:avLst/>
@@ -13906,70 +14268,19 @@
       </p:sp>
       <p:sp>
         <p:nvSpPr>
-          <p:cNvPr id="3" name="Text 1"/>
-          <p:cNvSpPr txBox="1"/>
-          <p:nvPr/>
-        </p:nvSpPr>
-        <p:spPr>
-          <a:xfrm>
-            <a:off x="8899855" y="685800"/>
-            <a:ext cx="2743200" cy="685800"/>
-          </a:xfrm>
-          <a:prstGeom prst="rect">
-            <a:avLst/>
-          </a:prstGeom>
-          <a:noFill/>
-          <a:ln/>
-        </p:spPr>
-        <p:txBody>
-          <a:bodyPr wrap="square" lIns="0" tIns="0" rIns="0" bIns="0" rtlCol="0" anchor="ctr"/>
-          <a:lstStyle/>
-          <a:p>
-            <a:pPr algn="r" indent="0" marL="0">
-              <a:buNone/>
-            </a:pPr>
-            <a:r>
-              <a:rPr lang="en-US" sz="1300" b="1" dirty="0">
-                <a:solidFill>
-                  <a:srgbClr val="26231E"/>
-                </a:solidFill>
-                <a:latin typeface="Bahnschrift" pitchFamily="34" charset="0"/>
-                <a:ea typeface="Bahnschrift" pitchFamily="34" charset="-122"/>
-                <a:cs typeface="Bahnschrift" pitchFamily="34" charset="-120"/>
-              </a:rPr>
-              <a:t>01</a:t>
-            </a:r>
-            <a:pPr algn="r" indent="0" marL="0">
-              <a:buNone/>
-            </a:pPr>
-            <a:r>
-              <a:rPr lang="en-US" sz="1300" dirty="0">
-                <a:solidFill>
-                  <a:srgbClr val="6A6458"/>
-                </a:solidFill>
-                <a:latin typeface="Microsoft YaHei" pitchFamily="34" charset="0"/>
-                <a:ea typeface="Microsoft YaHei" pitchFamily="34" charset="-122"/>
-                <a:cs typeface="Microsoft YaHei" pitchFamily="34" charset="-120"/>
-              </a:rPr>
-              <a:t>　主要设计安排</a:t>
-            </a:r>
-            <a:endParaRPr lang="en-US" sz="1300" dirty="0"/>
-          </a:p>
-        </p:txBody>
-      </p:sp>
-      <p:sp>
-        <p:nvSpPr>
-          <p:cNvPr id="4" name="Shape 2"/>
+          <p:cNvPr id="3" name="Shape 1"/>
           <p:cNvSpPr/>
           <p:nvPr/>
         </p:nvSpPr>
         <p:spPr>
           <a:xfrm>
-            <a:off x="548640" y="3108960"/>
-            <a:ext cx="11094415" cy="45720"/>
-          </a:xfrm>
-          <a:prstGeom prst="rect">
-            <a:avLst/>
+            <a:off x="1889760" y="699516"/>
+            <a:ext cx="9753295" cy="420624"/>
+          </a:xfrm>
+          <a:prstGeom prst="roundRect">
+            <a:avLst>
+              <a:gd name="adj" fmla="val 19565"/>
+            </a:avLst>
           </a:prstGeom>
           <a:solidFill>
             <a:srgbClr val="26231E"/>
@@ -13984,14 +14295,67 @@
       </p:sp>
       <p:sp>
         <p:nvSpPr>
+          <p:cNvPr id="4" name="Text 2"/>
+          <p:cNvSpPr txBox="1"/>
+          <p:nvPr/>
+        </p:nvSpPr>
+        <p:spPr>
+          <a:xfrm>
+            <a:off x="1889760" y="699516"/>
+            <a:ext cx="9552127" cy="420624"/>
+          </a:xfrm>
+          <a:prstGeom prst="rect">
+            <a:avLst/>
+          </a:prstGeom>
+          <a:noFill/>
+          <a:ln/>
+        </p:spPr>
+        <p:txBody>
+          <a:bodyPr wrap="square" lIns="0" tIns="0" rIns="0" bIns="0" rtlCol="0" anchor="ctr"/>
+          <a:lstStyle/>
+          <a:p>
+            <a:pPr algn="r" indent="0" marL="0">
+              <a:buNone/>
+            </a:pPr>
+            <a:r>
+              <a:rPr lang="en-US" sz="1300" b="1" dirty="0">
+                <a:solidFill>
+                  <a:srgbClr val="D9A441"/>
+                </a:solidFill>
+                <a:latin typeface="Bahnschrift" pitchFamily="34" charset="0"/>
+                <a:ea typeface="Bahnschrift" pitchFamily="34" charset="-122"/>
+                <a:cs typeface="Bahnschrift" pitchFamily="34" charset="-120"/>
+              </a:rPr>
+              <a:t>01</a:t>
+            </a:r>
+            <a:pPr algn="r" indent="0" marL="0">
+              <a:buNone/>
+            </a:pPr>
+            <a:r>
+              <a:rPr lang="en-US" sz="1300" dirty="0">
+                <a:solidFill>
+                  <a:srgbClr val="FBFAF7"/>
+                </a:solidFill>
+                <a:latin typeface="Microsoft YaHei" pitchFamily="34" charset="0"/>
+                <a:ea typeface="Microsoft YaHei" pitchFamily="34" charset="-122"/>
+                <a:cs typeface="Microsoft YaHei" pitchFamily="34" charset="-120"/>
+              </a:rPr>
+              <a:t>　主要设计安排</a:t>
+            </a:r>
+            <a:endParaRPr lang="en-US" sz="1300" dirty="0"/>
+          </a:p>
+        </p:txBody>
+      </p:sp>
+      <p:sp>
+        <p:nvSpPr>
           <p:cNvPr id="5" name="Shape 3"/>
           <p:cNvSpPr/>
           <p:nvPr/>
         </p:nvSpPr>
         <p:spPr>
           <a:xfrm>
-            <a:off x="548640" y="2980944"/>
-            <a:ext cx="301752" cy="301752"/>
+            <a:off x="548640" y="3108960"/>
+            <a:ext cx="11094415" cy="45720"/>
           </a:xfrm>
           <a:prstGeom prst="rect">
             <a:avLst/>
@@ -14009,176 +14373,19 @@
       </p:sp>
       <p:sp>
         <p:nvSpPr>
-          <p:cNvPr id="6" name="Text 4"/>
-          <p:cNvSpPr txBox="1"/>
-          <p:nvPr/>
-        </p:nvSpPr>
-        <p:spPr>
-          <a:xfrm>
-            <a:off x="548640" y="2331720"/>
-            <a:ext cx="2499284" cy="457200"/>
-          </a:xfrm>
-          <a:prstGeom prst="rect">
-            <a:avLst/>
-          </a:prstGeom>
-          <a:noFill/>
-          <a:ln/>
-        </p:spPr>
-        <p:txBody>
-          <a:bodyPr wrap="square" lIns="0" tIns="0" rIns="0" bIns="0" rtlCol="0" anchor="b"/>
-          <a:lstStyle/>
-          <a:p>
-            <a:pPr indent="0" marL="0">
-              <a:buNone/>
-            </a:pPr>
-            <a:r>
-              <a:rPr lang="en-US" sz="2200" b="1" dirty="0">
-                <a:solidFill>
-                  <a:srgbClr val="26231E"/>
-                </a:solidFill>
-                <a:latin typeface="Bahnschrift" pitchFamily="34" charset="0"/>
-                <a:ea typeface="Bahnschrift" pitchFamily="34" charset="-122"/>
-                <a:cs typeface="Bahnschrift" pitchFamily="34" charset="-120"/>
-              </a:rPr>
-              <a:t>M1</a:t>
-            </a:r>
-            <a:endParaRPr lang="en-US" sz="2200" dirty="0"/>
-          </a:p>
-        </p:txBody>
-      </p:sp>
-      <p:sp>
-        <p:nvSpPr>
-          <p:cNvPr id="7" name="Text 5"/>
-          <p:cNvSpPr txBox="1"/>
-          <p:nvPr/>
-        </p:nvSpPr>
-        <p:spPr>
-          <a:xfrm>
-            <a:off x="548640" y="3520440"/>
-            <a:ext cx="2499284" cy="411480"/>
-          </a:xfrm>
-          <a:prstGeom prst="rect">
-            <a:avLst/>
-          </a:prstGeom>
-          <a:noFill/>
-          <a:ln/>
-        </p:spPr>
-        <p:txBody>
-          <a:bodyPr wrap="square" lIns="0" tIns="0" rIns="0" bIns="0" rtlCol="0" anchor="t"/>
-          <a:lstStyle/>
-          <a:p>
-            <a:pPr indent="0" marL="0">
-              <a:buNone/>
-            </a:pPr>
-            <a:r>
-              <a:rPr lang="en-US" sz="1800" b="1" dirty="0">
-                <a:solidFill>
-                  <a:srgbClr val="26231E"/>
-                </a:solidFill>
-                <a:latin typeface="Microsoft YaHei" pitchFamily="34" charset="0"/>
-                <a:ea typeface="Microsoft YaHei" pitchFamily="34" charset="-122"/>
-                <a:cs typeface="Microsoft YaHei" pitchFamily="34" charset="-120"/>
-              </a:rPr>
-              <a:t>方案评审</a:t>
-            </a:r>
-            <a:endParaRPr lang="en-US" sz="1800" dirty="0"/>
-          </a:p>
-        </p:txBody>
-      </p:sp>
-      <p:sp>
-        <p:nvSpPr>
-          <p:cNvPr id="8" name="Text 6"/>
-          <p:cNvSpPr txBox="1"/>
-          <p:nvPr/>
-        </p:nvSpPr>
-        <p:spPr>
-          <a:xfrm>
-            <a:off x="548640" y="3950208"/>
-            <a:ext cx="2499284" cy="320040"/>
-          </a:xfrm>
-          <a:prstGeom prst="rect">
-            <a:avLst/>
-          </a:prstGeom>
-          <a:noFill/>
-          <a:ln/>
-        </p:spPr>
-        <p:txBody>
-          <a:bodyPr wrap="square" lIns="0" tIns="0" rIns="0" bIns="0" rtlCol="0" anchor="t"/>
-          <a:lstStyle/>
-          <a:p>
-            <a:pPr indent="0" marL="0">
-              <a:buNone/>
-            </a:pPr>
-            <a:r>
-              <a:rPr lang="en-US" sz="1300" dirty="0">
-                <a:solidFill>
-                  <a:srgbClr val="6A6458"/>
-                </a:solidFill>
-                <a:latin typeface="Bahnschrift" pitchFamily="34" charset="0"/>
-                <a:ea typeface="Bahnschrift" pitchFamily="34" charset="-122"/>
-                <a:cs typeface="Bahnschrift" pitchFamily="34" charset="-120"/>
-              </a:rPr>
-              <a:t>YYYY-MM-DD</a:t>
-            </a:r>
-            <a:endParaRPr lang="en-US" sz="1300" dirty="0"/>
-          </a:p>
-        </p:txBody>
-      </p:sp>
-      <p:sp>
-        <p:nvSpPr>
-          <p:cNvPr id="9" name="Text 7"/>
-          <p:cNvSpPr txBox="1"/>
-          <p:nvPr/>
-        </p:nvSpPr>
-        <p:spPr>
-          <a:xfrm>
-            <a:off x="548640" y="4343400"/>
-            <a:ext cx="2407844" cy="822960"/>
-          </a:xfrm>
-          <a:prstGeom prst="rect">
-            <a:avLst/>
-          </a:prstGeom>
-          <a:noFill/>
-          <a:ln/>
-        </p:spPr>
-        <p:txBody>
-          <a:bodyPr wrap="square" lIns="0" tIns="0" rIns="0" bIns="0" rtlCol="0" anchor="t"/>
-          <a:lstStyle/>
-          <a:p>
-            <a:pPr indent="0" marL="0">
-              <a:lnSpc>
-                <a:spcPct val="130000"/>
-              </a:lnSpc>
-              <a:buNone/>
-            </a:pPr>
-            <a:r>
-              <a:rPr lang="en-US" sz="1200" dirty="0">
-                <a:solidFill>
-                  <a:srgbClr val="6A6458"/>
-                </a:solidFill>
-                <a:latin typeface="Microsoft YaHei" pitchFamily="34" charset="0"/>
-                <a:ea typeface="Microsoft YaHei" pitchFamily="34" charset="-122"/>
-                <a:cs typeface="Microsoft YaHei" pitchFamily="34" charset="-120"/>
-              </a:rPr>
-              <a:t>〔本阶段的关键产出与判定标准〕</a:t>
-            </a:r>
-            <a:endParaRPr lang="en-US" sz="1200" dirty="0"/>
-          </a:p>
-        </p:txBody>
-      </p:sp>
-      <p:sp>
-        <p:nvSpPr>
-          <p:cNvPr id="10" name="Shape 8"/>
+          <p:cNvPr id="6" name="Shape 4"/>
           <p:cNvSpPr/>
           <p:nvPr/>
         </p:nvSpPr>
         <p:spPr>
           <a:xfrm>
-            <a:off x="3322244" y="2980944"/>
+            <a:off x="548640" y="2980944"/>
             <a:ext cx="301752" cy="301752"/>
           </a:xfrm>
-          <a:prstGeom prst="rect">
-            <a:avLst/>
+          <a:prstGeom prst="roundRect">
+            <a:avLst>
+              <a:gd name="adj" fmla="val 18182"/>
+            </a:avLst>
           </a:prstGeom>
           <a:solidFill>
             <a:srgbClr val="26231E"/>
@@ -14193,13 +14400,13 @@
       </p:sp>
       <p:sp>
         <p:nvSpPr>
-          <p:cNvPr id="11" name="Text 9"/>
-          <p:cNvSpPr txBox="1"/>
-          <p:nvPr/>
-        </p:nvSpPr>
-        <p:spPr>
-          <a:xfrm>
-            <a:off x="3322244" y="2331720"/>
+          <p:cNvPr id="7" name="Text 5"/>
+          <p:cNvSpPr txBox="1"/>
+          <p:nvPr/>
+        </p:nvSpPr>
+        <p:spPr>
+          <a:xfrm>
+            <a:off x="548640" y="2331720"/>
             <a:ext cx="2499284" cy="457200"/>
           </a:xfrm>
           <a:prstGeom prst="rect">
@@ -14224,7 +14431,7 @@
                 <a:ea typeface="Bahnschrift" pitchFamily="34" charset="-122"/>
                 <a:cs typeface="Bahnschrift" pitchFamily="34" charset="-120"/>
               </a:rPr>
-              <a:t>M2</a:t>
+              <a:t>M1</a:t>
             </a:r>
             <a:endParaRPr lang="en-US" sz="2200" dirty="0"/>
           </a:p>
@@ -14232,13 +14439,13 @@
       </p:sp>
       <p:sp>
         <p:nvSpPr>
-          <p:cNvPr id="12" name="Text 10"/>
-          <p:cNvSpPr txBox="1"/>
-          <p:nvPr/>
-        </p:nvSpPr>
-        <p:spPr>
-          <a:xfrm>
-            <a:off x="3322244" y="3520440"/>
+          <p:cNvPr id="8" name="Text 6"/>
+          <p:cNvSpPr txBox="1"/>
+          <p:nvPr/>
+        </p:nvSpPr>
+        <p:spPr>
+          <a:xfrm>
+            <a:off x="548640" y="3520440"/>
             <a:ext cx="2499284" cy="411480"/>
           </a:xfrm>
           <a:prstGeom prst="rect">
@@ -14263,7 +14470,7 @@
                 <a:ea typeface="Microsoft YaHei" pitchFamily="34" charset="-122"/>
                 <a:cs typeface="Microsoft YaHei" pitchFamily="34" charset="-120"/>
               </a:rPr>
-              <a:t>设计冻结</a:t>
+              <a:t>方案评审</a:t>
             </a:r>
             <a:endParaRPr lang="en-US" sz="1800" dirty="0"/>
           </a:p>
@@ -14271,13 +14478,13 @@
       </p:sp>
       <p:sp>
         <p:nvSpPr>
-          <p:cNvPr id="13" name="Text 11"/>
-          <p:cNvSpPr txBox="1"/>
-          <p:nvPr/>
-        </p:nvSpPr>
-        <p:spPr>
-          <a:xfrm>
-            <a:off x="3322244" y="3950208"/>
+          <p:cNvPr id="9" name="Text 7"/>
+          <p:cNvSpPr txBox="1"/>
+          <p:nvPr/>
+        </p:nvSpPr>
+        <p:spPr>
+          <a:xfrm>
+            <a:off x="548640" y="3950208"/>
             <a:ext cx="2499284" cy="320040"/>
           </a:xfrm>
           <a:prstGeom prst="rect">
@@ -14310,13 +14517,13 @@
       </p:sp>
       <p:sp>
         <p:nvSpPr>
-          <p:cNvPr id="14" name="Text 12"/>
-          <p:cNvSpPr txBox="1"/>
-          <p:nvPr/>
-        </p:nvSpPr>
-        <p:spPr>
-          <a:xfrm>
-            <a:off x="3322244" y="4343400"/>
+          <p:cNvPr id="10" name="Text 8"/>
+          <p:cNvSpPr txBox="1"/>
+          <p:nvPr/>
+        </p:nvSpPr>
+        <p:spPr>
+          <a:xfrm>
+            <a:off x="548640" y="4343400"/>
             <a:ext cx="2407844" cy="822960"/>
           </a:xfrm>
           <a:prstGeom prst="rect">
@@ -14352,17 +14559,19 @@
       </p:sp>
       <p:sp>
         <p:nvSpPr>
-          <p:cNvPr id="15" name="Shape 13"/>
+          <p:cNvPr id="11" name="Shape 9"/>
           <p:cNvSpPr/>
           <p:nvPr/>
         </p:nvSpPr>
         <p:spPr>
           <a:xfrm>
-            <a:off x="6095848" y="2980944"/>
+            <a:off x="3322244" y="2980944"/>
             <a:ext cx="301752" cy="301752"/>
           </a:xfrm>
-          <a:prstGeom prst="rect">
-            <a:avLst/>
+          <a:prstGeom prst="roundRect">
+            <a:avLst>
+              <a:gd name="adj" fmla="val 18182"/>
+            </a:avLst>
           </a:prstGeom>
           <a:solidFill>
             <a:srgbClr val="26231E"/>
@@ -14377,13 +14586,13 @@
       </p:sp>
       <p:sp>
         <p:nvSpPr>
-          <p:cNvPr id="16" name="Text 14"/>
-          <p:cNvSpPr txBox="1"/>
-          <p:nvPr/>
-        </p:nvSpPr>
-        <p:spPr>
-          <a:xfrm>
-            <a:off x="6095848" y="2331720"/>
+          <p:cNvPr id="12" name="Text 10"/>
+          <p:cNvSpPr txBox="1"/>
+          <p:nvPr/>
+        </p:nvSpPr>
+        <p:spPr>
+          <a:xfrm>
+            <a:off x="3322244" y="2331720"/>
             <a:ext cx="2499284" cy="457200"/>
           </a:xfrm>
           <a:prstGeom prst="rect">
@@ -14408,7 +14617,7 @@
                 <a:ea typeface="Bahnschrift" pitchFamily="34" charset="-122"/>
                 <a:cs typeface="Bahnschrift" pitchFamily="34" charset="-120"/>
               </a:rPr>
-              <a:t>M3</a:t>
+              <a:t>M2</a:t>
             </a:r>
             <a:endParaRPr lang="en-US" sz="2200" dirty="0"/>
           </a:p>
@@ -14416,13 +14625,13 @@
       </p:sp>
       <p:sp>
         <p:nvSpPr>
-          <p:cNvPr id="17" name="Text 15"/>
-          <p:cNvSpPr txBox="1"/>
-          <p:nvPr/>
-        </p:nvSpPr>
-        <p:spPr>
-          <a:xfrm>
-            <a:off x="6095848" y="3520440"/>
+          <p:cNvPr id="13" name="Text 11"/>
+          <p:cNvSpPr txBox="1"/>
+          <p:nvPr/>
+        </p:nvSpPr>
+        <p:spPr>
+          <a:xfrm>
+            <a:off x="3322244" y="3520440"/>
             <a:ext cx="2499284" cy="411480"/>
           </a:xfrm>
           <a:prstGeom prst="rect">
@@ -14447,7 +14656,7 @@
                 <a:ea typeface="Microsoft YaHei" pitchFamily="34" charset="-122"/>
                 <a:cs typeface="Microsoft YaHei" pitchFamily="34" charset="-120"/>
               </a:rPr>
-              <a:t>样机完成</a:t>
+              <a:t>设计冻结</a:t>
             </a:r>
             <a:endParaRPr lang="en-US" sz="1800" dirty="0"/>
           </a:p>
@@ -14455,13 +14664,13 @@
       </p:sp>
       <p:sp>
         <p:nvSpPr>
-          <p:cNvPr id="18" name="Text 16"/>
-          <p:cNvSpPr txBox="1"/>
-          <p:nvPr/>
-        </p:nvSpPr>
-        <p:spPr>
-          <a:xfrm>
-            <a:off x="6095848" y="3950208"/>
+          <p:cNvPr id="14" name="Text 12"/>
+          <p:cNvSpPr txBox="1"/>
+          <p:nvPr/>
+        </p:nvSpPr>
+        <p:spPr>
+          <a:xfrm>
+            <a:off x="3322244" y="3950208"/>
             <a:ext cx="2499284" cy="320040"/>
           </a:xfrm>
           <a:prstGeom prst="rect">
@@ -14494,13 +14703,13 @@
       </p:sp>
       <p:sp>
         <p:nvSpPr>
-          <p:cNvPr id="19" name="Text 17"/>
-          <p:cNvSpPr txBox="1"/>
-          <p:nvPr/>
-        </p:nvSpPr>
-        <p:spPr>
-          <a:xfrm>
-            <a:off x="6095848" y="4343400"/>
+          <p:cNvPr id="15" name="Text 13"/>
+          <p:cNvSpPr txBox="1"/>
+          <p:nvPr/>
+        </p:nvSpPr>
+        <p:spPr>
+          <a:xfrm>
+            <a:off x="3322244" y="4343400"/>
             <a:ext cx="2407844" cy="822960"/>
           </a:xfrm>
           <a:prstGeom prst="rect">
@@ -14536,17 +14745,19 @@
       </p:sp>
       <p:sp>
         <p:nvSpPr>
-          <p:cNvPr id="20" name="Shape 18"/>
+          <p:cNvPr id="16" name="Shape 14"/>
           <p:cNvSpPr/>
           <p:nvPr/>
         </p:nvSpPr>
         <p:spPr>
           <a:xfrm>
-            <a:off x="8869451" y="2980944"/>
+            <a:off x="6095848" y="2980944"/>
             <a:ext cx="301752" cy="301752"/>
           </a:xfrm>
-          <a:prstGeom prst="rect">
-            <a:avLst/>
+          <a:prstGeom prst="roundRect">
+            <a:avLst>
+              <a:gd name="adj" fmla="val 18182"/>
+            </a:avLst>
           </a:prstGeom>
           <a:solidFill>
             <a:srgbClr val="26231E"/>
@@ -14561,13 +14772,13 @@
       </p:sp>
       <p:sp>
         <p:nvSpPr>
-          <p:cNvPr id="21" name="Text 19"/>
-          <p:cNvSpPr txBox="1"/>
-          <p:nvPr/>
-        </p:nvSpPr>
-        <p:spPr>
-          <a:xfrm>
-            <a:off x="8869451" y="2331720"/>
+          <p:cNvPr id="17" name="Text 15"/>
+          <p:cNvSpPr txBox="1"/>
+          <p:nvPr/>
+        </p:nvSpPr>
+        <p:spPr>
+          <a:xfrm>
+            <a:off x="6095848" y="2331720"/>
             <a:ext cx="2499284" cy="457200"/>
           </a:xfrm>
           <a:prstGeom prst="rect">
@@ -14592,7 +14803,7 @@
                 <a:ea typeface="Bahnschrift" pitchFamily="34" charset="-122"/>
                 <a:cs typeface="Bahnschrift" pitchFamily="34" charset="-120"/>
               </a:rPr>
-              <a:t>M4</a:t>
+              <a:t>M3</a:t>
             </a:r>
             <a:endParaRPr lang="en-US" sz="2200" dirty="0"/>
           </a:p>
@@ -14600,13 +14811,13 @@
       </p:sp>
       <p:sp>
         <p:nvSpPr>
-          <p:cNvPr id="22" name="Text 20"/>
-          <p:cNvSpPr txBox="1"/>
-          <p:nvPr/>
-        </p:nvSpPr>
-        <p:spPr>
-          <a:xfrm>
-            <a:off x="8869451" y="3520440"/>
+          <p:cNvPr id="18" name="Text 16"/>
+          <p:cNvSpPr txBox="1"/>
+          <p:nvPr/>
+        </p:nvSpPr>
+        <p:spPr>
+          <a:xfrm>
+            <a:off x="6095848" y="3520440"/>
             <a:ext cx="2499284" cy="411480"/>
           </a:xfrm>
           <a:prstGeom prst="rect">
@@ -14631,7 +14842,7 @@
                 <a:ea typeface="Microsoft YaHei" pitchFamily="34" charset="-122"/>
                 <a:cs typeface="Microsoft YaHei" pitchFamily="34" charset="-120"/>
               </a:rPr>
-              <a:t>验收交付</a:t>
+              <a:t>样机完成</a:t>
             </a:r>
             <a:endParaRPr lang="en-US" sz="1800" dirty="0"/>
           </a:p>
@@ -14639,13 +14850,13 @@
       </p:sp>
       <p:sp>
         <p:nvSpPr>
-          <p:cNvPr id="23" name="Text 21"/>
-          <p:cNvSpPr txBox="1"/>
-          <p:nvPr/>
-        </p:nvSpPr>
-        <p:spPr>
-          <a:xfrm>
-            <a:off x="8869451" y="3950208"/>
+          <p:cNvPr id="19" name="Text 17"/>
+          <p:cNvSpPr txBox="1"/>
+          <p:nvPr/>
+        </p:nvSpPr>
+        <p:spPr>
+          <a:xfrm>
+            <a:off x="6095848" y="3950208"/>
             <a:ext cx="2499284" cy="320040"/>
           </a:xfrm>
           <a:prstGeom prst="rect">
@@ -14678,7 +14889,193 @@
       </p:sp>
       <p:sp>
         <p:nvSpPr>
+          <p:cNvPr id="20" name="Text 18"/>
+          <p:cNvSpPr txBox="1"/>
+          <p:nvPr/>
+        </p:nvSpPr>
+        <p:spPr>
+          <a:xfrm>
+            <a:off x="6095848" y="4343400"/>
+            <a:ext cx="2407844" cy="822960"/>
+          </a:xfrm>
+          <a:prstGeom prst="rect">
+            <a:avLst/>
+          </a:prstGeom>
+          <a:noFill/>
+          <a:ln/>
+        </p:spPr>
+        <p:txBody>
+          <a:bodyPr wrap="square" lIns="0" tIns="0" rIns="0" bIns="0" rtlCol="0" anchor="t"/>
+          <a:lstStyle/>
+          <a:p>
+            <a:pPr indent="0" marL="0">
+              <a:lnSpc>
+                <a:spcPct val="130000"/>
+              </a:lnSpc>
+              <a:buNone/>
+            </a:pPr>
+            <a:r>
+              <a:rPr lang="en-US" sz="1200" dirty="0">
+                <a:solidFill>
+                  <a:srgbClr val="6A6458"/>
+                </a:solidFill>
+                <a:latin typeface="Microsoft YaHei" pitchFamily="34" charset="0"/>
+                <a:ea typeface="Microsoft YaHei" pitchFamily="34" charset="-122"/>
+                <a:cs typeface="Microsoft YaHei" pitchFamily="34" charset="-120"/>
+              </a:rPr>
+              <a:t>〔本阶段的关键产出与判定标准〕</a:t>
+            </a:r>
+            <a:endParaRPr lang="en-US" sz="1200" dirty="0"/>
+          </a:p>
+        </p:txBody>
+      </p:sp>
+      <p:sp>
+        <p:nvSpPr>
+          <p:cNvPr id="21" name="Shape 19"/>
+          <p:cNvSpPr/>
+          <p:nvPr/>
+        </p:nvSpPr>
+        <p:spPr>
+          <a:xfrm>
+            <a:off x="8869451" y="2980944"/>
+            <a:ext cx="301752" cy="301752"/>
+          </a:xfrm>
+          <a:prstGeom prst="roundRect">
+            <a:avLst>
+              <a:gd name="adj" fmla="val 18182"/>
+            </a:avLst>
+          </a:prstGeom>
+          <a:solidFill>
+            <a:srgbClr val="26231E"/>
+          </a:solidFill>
+          <a:ln w="12700">
+            <a:solidFill>
+              <a:srgbClr val="26231E"/>
+            </a:solidFill>
+            <a:prstDash val="solid"/>
+          </a:ln>
+        </p:spPr>
+      </p:sp>
+      <p:sp>
+        <p:nvSpPr>
+          <p:cNvPr id="22" name="Text 20"/>
+          <p:cNvSpPr txBox="1"/>
+          <p:nvPr/>
+        </p:nvSpPr>
+        <p:spPr>
+          <a:xfrm>
+            <a:off x="8869451" y="2331720"/>
+            <a:ext cx="2499284" cy="457200"/>
+          </a:xfrm>
+          <a:prstGeom prst="rect">
+            <a:avLst/>
+          </a:prstGeom>
+          <a:noFill/>
+          <a:ln/>
+        </p:spPr>
+        <p:txBody>
+          <a:bodyPr wrap="square" lIns="0" tIns="0" rIns="0" bIns="0" rtlCol="0" anchor="b"/>
+          <a:lstStyle/>
+          <a:p>
+            <a:pPr indent="0" marL="0">
+              <a:buNone/>
+            </a:pPr>
+            <a:r>
+              <a:rPr lang="en-US" sz="2200" b="1" dirty="0">
+                <a:solidFill>
+                  <a:srgbClr val="26231E"/>
+                </a:solidFill>
+                <a:latin typeface="Bahnschrift" pitchFamily="34" charset="0"/>
+                <a:ea typeface="Bahnschrift" pitchFamily="34" charset="-122"/>
+                <a:cs typeface="Bahnschrift" pitchFamily="34" charset="-120"/>
+              </a:rPr>
+              <a:t>M4</a:t>
+            </a:r>
+            <a:endParaRPr lang="en-US" sz="2200" dirty="0"/>
+          </a:p>
+        </p:txBody>
+      </p:sp>
+      <p:sp>
+        <p:nvSpPr>
+          <p:cNvPr id="23" name="Text 21"/>
+          <p:cNvSpPr txBox="1"/>
+          <p:nvPr/>
+        </p:nvSpPr>
+        <p:spPr>
+          <a:xfrm>
+            <a:off x="8869451" y="3520440"/>
+            <a:ext cx="2499284" cy="411480"/>
+          </a:xfrm>
+          <a:prstGeom prst="rect">
+            <a:avLst/>
+          </a:prstGeom>
+          <a:noFill/>
+          <a:ln/>
+        </p:spPr>
+        <p:txBody>
+          <a:bodyPr wrap="square" lIns="0" tIns="0" rIns="0" bIns="0" rtlCol="0" anchor="t"/>
+          <a:lstStyle/>
+          <a:p>
+            <a:pPr indent="0" marL="0">
+              <a:buNone/>
+            </a:pPr>
+            <a:r>
+              <a:rPr lang="en-US" sz="1800" b="1" dirty="0">
+                <a:solidFill>
+                  <a:srgbClr val="26231E"/>
+                </a:solidFill>
+                <a:latin typeface="Microsoft YaHei" pitchFamily="34" charset="0"/>
+                <a:ea typeface="Microsoft YaHei" pitchFamily="34" charset="-122"/>
+                <a:cs typeface="Microsoft YaHei" pitchFamily="34" charset="-120"/>
+              </a:rPr>
+              <a:t>验收交付</a:t>
+            </a:r>
+            <a:endParaRPr lang="en-US" sz="1800" dirty="0"/>
+          </a:p>
+        </p:txBody>
+      </p:sp>
+      <p:sp>
+        <p:nvSpPr>
           <p:cNvPr id="24" name="Text 22"/>
+          <p:cNvSpPr txBox="1"/>
+          <p:nvPr/>
+        </p:nvSpPr>
+        <p:spPr>
+          <a:xfrm>
+            <a:off x="8869451" y="3950208"/>
+            <a:ext cx="2499284" cy="320040"/>
+          </a:xfrm>
+          <a:prstGeom prst="rect">
+            <a:avLst/>
+          </a:prstGeom>
+          <a:noFill/>
+          <a:ln/>
+        </p:spPr>
+        <p:txBody>
+          <a:bodyPr wrap="square" lIns="0" tIns="0" rIns="0" bIns="0" rtlCol="0" anchor="t"/>
+          <a:lstStyle/>
+          <a:p>
+            <a:pPr indent="0" marL="0">
+              <a:buNone/>
+            </a:pPr>
+            <a:r>
+              <a:rPr lang="en-US" sz="1300" dirty="0">
+                <a:solidFill>
+                  <a:srgbClr val="6A6458"/>
+                </a:solidFill>
+                <a:latin typeface="Bahnschrift" pitchFamily="34" charset="0"/>
+                <a:ea typeface="Bahnschrift" pitchFamily="34" charset="-122"/>
+                <a:cs typeface="Bahnschrift" pitchFamily="34" charset="-120"/>
+              </a:rPr>
+              <a:t>YYYY-MM-DD</a:t>
+            </a:r>
+            <a:endParaRPr lang="en-US" sz="1300" dirty="0"/>
+          </a:p>
+        </p:txBody>
+      </p:sp>
+      <p:sp>
+        <p:nvSpPr>
+          <p:cNvPr id="25" name="Text 23"/>
           <p:cNvSpPr txBox="1"/>
           <p:nvPr/>
         </p:nvSpPr>
@@ -14799,8 +15196,8 @@
         </p:nvSpPr>
         <p:spPr>
           <a:xfrm>
-            <a:off x="548640" y="685800"/>
-            <a:ext cx="9082735" cy="685800"/>
+            <a:off x="548640" y="566928"/>
+            <a:ext cx="11094415" cy="685800"/>
           </a:xfrm>
           <a:prstGeom prst="rect">
             <a:avLst/>
@@ -14832,14 +15229,41 @@
       </p:sp>
       <p:sp>
         <p:nvSpPr>
-          <p:cNvPr id="3" name="Text 1"/>
-          <p:cNvSpPr txBox="1"/>
-          <p:nvPr/>
-        </p:nvSpPr>
-        <p:spPr>
-          <a:xfrm>
-            <a:off x="8899855" y="685800"/>
-            <a:ext cx="2743200" cy="685800"/>
+          <p:cNvPr id="3" name="Shape 1"/>
+          <p:cNvSpPr/>
+          <p:nvPr/>
+        </p:nvSpPr>
+        <p:spPr>
+          <a:xfrm>
+            <a:off x="2245360" y="699516"/>
+            <a:ext cx="9397695" cy="420624"/>
+          </a:xfrm>
+          <a:prstGeom prst="roundRect">
+            <a:avLst>
+              <a:gd name="adj" fmla="val 19565"/>
+            </a:avLst>
+          </a:prstGeom>
+          <a:solidFill>
+            <a:srgbClr val="26231E"/>
+          </a:solidFill>
+          <a:ln w="12700">
+            <a:solidFill>
+              <a:srgbClr val="26231E"/>
+            </a:solidFill>
+            <a:prstDash val="solid"/>
+          </a:ln>
+        </p:spPr>
+      </p:sp>
+      <p:sp>
+        <p:nvSpPr>
+          <p:cNvPr id="4" name="Text 2"/>
+          <p:cNvSpPr txBox="1"/>
+          <p:nvPr/>
+        </p:nvSpPr>
+        <p:spPr>
+          <a:xfrm>
+            <a:off x="2245360" y="699516"/>
+            <a:ext cx="9196527" cy="420624"/>
           </a:xfrm>
           <a:prstGeom prst="rect">
             <a:avLst/>
@@ -14857,7 +15281,7 @@
             <a:r>
               <a:rPr lang="en-US" sz="1300" b="1" dirty="0">
                 <a:solidFill>
-                  <a:srgbClr val="26231E"/>
+                  <a:srgbClr val="D9A441"/>
                 </a:solidFill>
                 <a:latin typeface="Bahnschrift" pitchFamily="34" charset="0"/>
                 <a:ea typeface="Bahnschrift" pitchFamily="34" charset="-122"/>
@@ -14871,7 +15295,7 @@
             <a:r>
               <a:rPr lang="en-US" sz="1300" dirty="0">
                 <a:solidFill>
-                  <a:srgbClr val="6A6458"/>
+                  <a:srgbClr val="FBFAF7"/>
                 </a:solidFill>
                 <a:latin typeface="Microsoft YaHei" pitchFamily="34" charset="0"/>
                 <a:ea typeface="Microsoft YaHei" pitchFamily="34" charset="-122"/>
@@ -14885,7 +15309,7 @@
       </p:sp>
       <p:sp>
         <p:nvSpPr>
-          <p:cNvPr id="4" name="Text 2"/>
+          <p:cNvPr id="5" name="Text 3"/>
           <p:cNvSpPr txBox="1"/>
           <p:nvPr/>
         </p:nvSpPr>
@@ -15003,7 +15427,7 @@
       </p:sp>
       <p:sp>
         <p:nvSpPr>
-          <p:cNvPr id="5" name="Shape 3"/>
+          <p:cNvPr id="6" name="Shape 4"/>
           <p:cNvSpPr/>
           <p:nvPr/>
         </p:nvSpPr>
@@ -15012,8 +15436,10 @@
             <a:off x="5760720" y="1691640"/>
             <a:ext cx="5882335" cy="4343400"/>
           </a:xfrm>
-          <a:prstGeom prst="rect">
-            <a:avLst/>
+          <a:prstGeom prst="roundRect">
+            <a:avLst>
+              <a:gd name="adj" fmla="val 3368"/>
+            </a:avLst>
           </a:prstGeom>
           <a:solidFill>
             <a:srgbClr val="FBFAF7"/>
@@ -15028,7 +15454,7 @@
       </p:sp>
       <p:sp>
         <p:nvSpPr>
-          <p:cNvPr id="6" name="Text 4"/>
+          <p:cNvPr id="7" name="Text 5"/>
           <p:cNvSpPr txBox="1"/>
           <p:nvPr/>
         </p:nvSpPr>
@@ -15146,8 +15572,8 @@
         </p:nvSpPr>
         <p:spPr>
           <a:xfrm>
-            <a:off x="548640" y="685800"/>
-            <a:ext cx="9082735" cy="685800"/>
+            <a:off x="548640" y="566928"/>
+            <a:ext cx="11094415" cy="685800"/>
           </a:xfrm>
           <a:prstGeom prst="rect">
             <a:avLst/>
@@ -15179,70 +15605,19 @@
       </p:sp>
       <p:sp>
         <p:nvSpPr>
-          <p:cNvPr id="3" name="Text 1"/>
-          <p:cNvSpPr txBox="1"/>
-          <p:nvPr/>
-        </p:nvSpPr>
-        <p:spPr>
-          <a:xfrm>
-            <a:off x="8899855" y="685800"/>
-            <a:ext cx="2743200" cy="685800"/>
-          </a:xfrm>
-          <a:prstGeom prst="rect">
-            <a:avLst/>
-          </a:prstGeom>
-          <a:noFill/>
-          <a:ln/>
-        </p:spPr>
-        <p:txBody>
-          <a:bodyPr wrap="square" lIns="0" tIns="0" rIns="0" bIns="0" rtlCol="0" anchor="ctr"/>
-          <a:lstStyle/>
-          <a:p>
-            <a:pPr algn="r" indent="0" marL="0">
-              <a:buNone/>
-            </a:pPr>
-            <a:r>
-              <a:rPr lang="en-US" sz="1300" b="1" dirty="0">
-                <a:solidFill>
-                  <a:srgbClr val="26231E"/>
-                </a:solidFill>
-                <a:latin typeface="Bahnschrift" pitchFamily="34" charset="0"/>
-                <a:ea typeface="Bahnschrift" pitchFamily="34" charset="-122"/>
-                <a:cs typeface="Bahnschrift" pitchFamily="34" charset="-120"/>
-              </a:rPr>
-              <a:t>01</a:t>
-            </a:r>
-            <a:pPr algn="r" indent="0" marL="0">
-              <a:buNone/>
-            </a:pPr>
-            <a:r>
-              <a:rPr lang="en-US" sz="1300" dirty="0">
-                <a:solidFill>
-                  <a:srgbClr val="6A6458"/>
-                </a:solidFill>
-                <a:latin typeface="Microsoft YaHei" pitchFamily="34" charset="0"/>
-                <a:ea typeface="Microsoft YaHei" pitchFamily="34" charset="-122"/>
-                <a:cs typeface="Microsoft YaHei" pitchFamily="34" charset="-120"/>
-              </a:rPr>
-              <a:t>　主要设计安排</a:t>
-            </a:r>
-            <a:endParaRPr lang="en-US" sz="1300" dirty="0"/>
-          </a:p>
-        </p:txBody>
-      </p:sp>
-      <p:sp>
-        <p:nvSpPr>
-          <p:cNvPr id="4" name="Shape 2"/>
+          <p:cNvPr id="3" name="Shape 1"/>
           <p:cNvSpPr/>
           <p:nvPr/>
         </p:nvSpPr>
         <p:spPr>
           <a:xfrm>
-            <a:off x="548640" y="1783080"/>
-            <a:ext cx="3454298" cy="32004"/>
-          </a:xfrm>
-          <a:prstGeom prst="rect">
-            <a:avLst/>
+            <a:off x="2600960" y="699516"/>
+            <a:ext cx="9042095" cy="420624"/>
+          </a:xfrm>
+          <a:prstGeom prst="roundRect">
+            <a:avLst>
+              <a:gd name="adj" fmla="val 19565"/>
+            </a:avLst>
           </a:prstGeom>
           <a:solidFill>
             <a:srgbClr val="26231E"/>
@@ -15257,32 +15632,32 @@
       </p:sp>
       <p:sp>
         <p:nvSpPr>
-          <p:cNvPr id="5" name="Text 3"/>
-          <p:cNvSpPr txBox="1"/>
-          <p:nvPr/>
-        </p:nvSpPr>
-        <p:spPr>
-          <a:xfrm>
-            <a:off x="548640" y="1947672"/>
-            <a:ext cx="914400" cy="365760"/>
-          </a:xfrm>
-          <a:prstGeom prst="rect">
-            <a:avLst/>
-          </a:prstGeom>
-          <a:noFill/>
-          <a:ln/>
-        </p:spPr>
-        <p:txBody>
-          <a:bodyPr wrap="square" lIns="0" tIns="0" rIns="0" bIns="0" rtlCol="0" anchor="t"/>
-          <a:lstStyle/>
-          <a:p>
-            <a:pPr indent="0" marL="0">
-              <a:buNone/>
-            </a:pPr>
-            <a:r>
-              <a:rPr lang="en-US" sz="1600" b="1" dirty="0">
-                <a:solidFill>
-                  <a:srgbClr val="26231E"/>
+          <p:cNvPr id="4" name="Text 2"/>
+          <p:cNvSpPr txBox="1"/>
+          <p:nvPr/>
+        </p:nvSpPr>
+        <p:spPr>
+          <a:xfrm>
+            <a:off x="2600960" y="699516"/>
+            <a:ext cx="8840927" cy="420624"/>
+          </a:xfrm>
+          <a:prstGeom prst="rect">
+            <a:avLst/>
+          </a:prstGeom>
+          <a:noFill/>
+          <a:ln/>
+        </p:spPr>
+        <p:txBody>
+          <a:bodyPr wrap="square" lIns="0" tIns="0" rIns="0" bIns="0" rtlCol="0" anchor="ctr"/>
+          <a:lstStyle/>
+          <a:p>
+            <a:pPr algn="r" indent="0" marL="0">
+              <a:buNone/>
+            </a:pPr>
+            <a:r>
+              <a:rPr lang="en-US" sz="1300" b="1" dirty="0">
+                <a:solidFill>
+                  <a:srgbClr val="D9A441"/>
                 </a:solidFill>
                 <a:latin typeface="Bahnschrift" pitchFamily="34" charset="0"/>
                 <a:ea typeface="Bahnschrift" pitchFamily="34" charset="-122"/>
@@ -15290,86 +15665,19 @@
               </a:rPr>
               <a:t>01</a:t>
             </a:r>
-            <a:endParaRPr lang="en-US" sz="1600" dirty="0"/>
-          </a:p>
-        </p:txBody>
-      </p:sp>
-      <p:sp>
-        <p:nvSpPr>
-          <p:cNvPr id="6" name="Text 4"/>
-          <p:cNvSpPr txBox="1"/>
-          <p:nvPr/>
-        </p:nvSpPr>
-        <p:spPr>
-          <a:xfrm>
-            <a:off x="548640" y="2331720"/>
-            <a:ext cx="3454298" cy="411480"/>
-          </a:xfrm>
-          <a:prstGeom prst="rect">
-            <a:avLst/>
-          </a:prstGeom>
-          <a:noFill/>
-          <a:ln/>
-        </p:spPr>
-        <p:txBody>
-          <a:bodyPr wrap="square" lIns="0" tIns="0" rIns="0" bIns="0" rtlCol="0" anchor="t"/>
-          <a:lstStyle/>
-          <a:p>
-            <a:pPr indent="0" marL="0">
-              <a:buNone/>
-            </a:pPr>
-            <a:r>
-              <a:rPr lang="en-US" sz="1800" b="1" dirty="0">
-                <a:solidFill>
-                  <a:srgbClr val="26231E"/>
+            <a:pPr algn="r" indent="0" marL="0">
+              <a:buNone/>
+            </a:pPr>
+            <a:r>
+              <a:rPr lang="en-US" sz="1300" dirty="0">
+                <a:solidFill>
+                  <a:srgbClr val="FBFAF7"/>
                 </a:solidFill>
                 <a:latin typeface="Microsoft YaHei" pitchFamily="34" charset="0"/>
                 <a:ea typeface="Microsoft YaHei" pitchFamily="34" charset="-122"/>
                 <a:cs typeface="Microsoft YaHei" pitchFamily="34" charset="-120"/>
               </a:rPr>
-              <a:t>机械</a:t>
-            </a:r>
-            <a:endParaRPr lang="en-US" sz="1800" dirty="0"/>
-          </a:p>
-        </p:txBody>
-      </p:sp>
-      <p:sp>
-        <p:nvSpPr>
-          <p:cNvPr id="7" name="Text 5"/>
-          <p:cNvSpPr txBox="1"/>
-          <p:nvPr/>
-        </p:nvSpPr>
-        <p:spPr>
-          <a:xfrm>
-            <a:off x="548640" y="2788920"/>
-            <a:ext cx="3454298" cy="3017520"/>
-          </a:xfrm>
-          <a:prstGeom prst="rect">
-            <a:avLst/>
-          </a:prstGeom>
-          <a:noFill/>
-          <a:ln/>
-        </p:spPr>
-        <p:txBody>
-          <a:bodyPr wrap="square" lIns="0" tIns="0" rIns="0" bIns="0" rtlCol="0" anchor="t"/>
-          <a:lstStyle/>
-          <a:p>
-            <a:pPr indent="0" marL="0">
-              <a:lnSpc>
-                <a:spcPct val="130000"/>
-              </a:lnSpc>
-              <a:buNone/>
-            </a:pPr>
-            <a:r>
-              <a:rPr lang="en-US" sz="1300" dirty="0">
-                <a:solidFill>
-                  <a:srgbClr val="6A6458"/>
-                </a:solidFill>
-                <a:latin typeface="Microsoft YaHei" pitchFamily="34" charset="0"/>
-                <a:ea typeface="Microsoft YaHei" pitchFamily="34" charset="-122"/>
-                <a:cs typeface="Microsoft YaHei" pitchFamily="34" charset="-120"/>
-              </a:rPr>
-              <a:t>〔该部分的目标、分工与时间安排〕</a:t>
+              <a:t>　主要设计安排</a:t>
             </a:r>
             <a:endParaRPr lang="en-US" sz="1300" dirty="0"/>
           </a:p>
@@ -15377,13 +15685,13 @@
       </p:sp>
       <p:sp>
         <p:nvSpPr>
-          <p:cNvPr id="8" name="Shape 6"/>
+          <p:cNvPr id="5" name="Shape 3"/>
           <p:cNvSpPr/>
           <p:nvPr/>
         </p:nvSpPr>
         <p:spPr>
           <a:xfrm>
-            <a:off x="4368698" y="1783080"/>
+            <a:off x="548640" y="1783080"/>
             <a:ext cx="3454298" cy="32004"/>
           </a:xfrm>
           <a:prstGeom prst="rect">
@@ -15402,13 +15710,13 @@
       </p:sp>
       <p:sp>
         <p:nvSpPr>
-          <p:cNvPr id="9" name="Text 7"/>
-          <p:cNvSpPr txBox="1"/>
-          <p:nvPr/>
-        </p:nvSpPr>
-        <p:spPr>
-          <a:xfrm>
-            <a:off x="4368698" y="1947672"/>
+          <p:cNvPr id="6" name="Text 4"/>
+          <p:cNvSpPr txBox="1"/>
+          <p:nvPr/>
+        </p:nvSpPr>
+        <p:spPr>
+          <a:xfrm>
+            <a:off x="548640" y="1947672"/>
             <a:ext cx="914400" cy="365760"/>
           </a:xfrm>
           <a:prstGeom prst="rect">
@@ -15433,7 +15741,7 @@
                 <a:ea typeface="Bahnschrift" pitchFamily="34" charset="-122"/>
                 <a:cs typeface="Bahnschrift" pitchFamily="34" charset="-120"/>
               </a:rPr>
-              <a:t>02</a:t>
+              <a:t>01</a:t>
             </a:r>
             <a:endParaRPr lang="en-US" sz="1600" dirty="0"/>
           </a:p>
@@ -15441,13 +15749,13 @@
       </p:sp>
       <p:sp>
         <p:nvSpPr>
-          <p:cNvPr id="10" name="Text 8"/>
-          <p:cNvSpPr txBox="1"/>
-          <p:nvPr/>
-        </p:nvSpPr>
-        <p:spPr>
-          <a:xfrm>
-            <a:off x="4368698" y="2331720"/>
+          <p:cNvPr id="7" name="Text 5"/>
+          <p:cNvSpPr txBox="1"/>
+          <p:nvPr/>
+        </p:nvSpPr>
+        <p:spPr>
+          <a:xfrm>
+            <a:off x="548640" y="2331720"/>
             <a:ext cx="3454298" cy="411480"/>
           </a:xfrm>
           <a:prstGeom prst="rect">
@@ -15472,7 +15780,7 @@
                 <a:ea typeface="Microsoft YaHei" pitchFamily="34" charset="-122"/>
                 <a:cs typeface="Microsoft YaHei" pitchFamily="34" charset="-120"/>
               </a:rPr>
-              <a:t>电控</a:t>
+              <a:t>机械</a:t>
             </a:r>
             <a:endParaRPr lang="en-US" sz="1800" dirty="0"/>
           </a:p>
@@ -15480,13 +15788,13 @@
       </p:sp>
       <p:sp>
         <p:nvSpPr>
-          <p:cNvPr id="11" name="Text 9"/>
-          <p:cNvSpPr txBox="1"/>
-          <p:nvPr/>
-        </p:nvSpPr>
-        <p:spPr>
-          <a:xfrm>
-            <a:off x="4368698" y="2788920"/>
+          <p:cNvPr id="8" name="Text 6"/>
+          <p:cNvSpPr txBox="1"/>
+          <p:nvPr/>
+        </p:nvSpPr>
+        <p:spPr>
+          <a:xfrm>
+            <a:off x="548640" y="2788920"/>
             <a:ext cx="3454298" cy="3017520"/>
           </a:xfrm>
           <a:prstGeom prst="rect">
@@ -15522,13 +15830,13 @@
       </p:sp>
       <p:sp>
         <p:nvSpPr>
-          <p:cNvPr id="12" name="Shape 10"/>
+          <p:cNvPr id="9" name="Shape 7"/>
           <p:cNvSpPr/>
           <p:nvPr/>
         </p:nvSpPr>
         <p:spPr>
           <a:xfrm>
-            <a:off x="8188757" y="1783080"/>
+            <a:off x="4368698" y="1783080"/>
             <a:ext cx="3454298" cy="32004"/>
           </a:xfrm>
           <a:prstGeom prst="rect">
@@ -15547,13 +15855,13 @@
       </p:sp>
       <p:sp>
         <p:nvSpPr>
-          <p:cNvPr id="13" name="Text 11"/>
-          <p:cNvSpPr txBox="1"/>
-          <p:nvPr/>
-        </p:nvSpPr>
-        <p:spPr>
-          <a:xfrm>
-            <a:off x="8188757" y="1947672"/>
+          <p:cNvPr id="10" name="Text 8"/>
+          <p:cNvSpPr txBox="1"/>
+          <p:nvPr/>
+        </p:nvSpPr>
+        <p:spPr>
+          <a:xfrm>
+            <a:off x="4368698" y="1947672"/>
             <a:ext cx="914400" cy="365760"/>
           </a:xfrm>
           <a:prstGeom prst="rect">
@@ -15578,7 +15886,7 @@
                 <a:ea typeface="Bahnschrift" pitchFamily="34" charset="-122"/>
                 <a:cs typeface="Bahnschrift" pitchFamily="34" charset="-120"/>
               </a:rPr>
-              <a:t>03</a:t>
+              <a:t>02</a:t>
             </a:r>
             <a:endParaRPr lang="en-US" sz="1600" dirty="0"/>
           </a:p>
@@ -15586,13 +15894,13 @@
       </p:sp>
       <p:sp>
         <p:nvSpPr>
-          <p:cNvPr id="14" name="Text 12"/>
-          <p:cNvSpPr txBox="1"/>
-          <p:nvPr/>
-        </p:nvSpPr>
-        <p:spPr>
-          <a:xfrm>
-            <a:off x="8188757" y="2331720"/>
+          <p:cNvPr id="11" name="Text 9"/>
+          <p:cNvSpPr txBox="1"/>
+          <p:nvPr/>
+        </p:nvSpPr>
+        <p:spPr>
+          <a:xfrm>
+            <a:off x="4368698" y="2331720"/>
             <a:ext cx="3454298" cy="411480"/>
           </a:xfrm>
           <a:prstGeom prst="rect">
@@ -15617,6 +15925,151 @@
                 <a:ea typeface="Microsoft YaHei" pitchFamily="34" charset="-122"/>
                 <a:cs typeface="Microsoft YaHei" pitchFamily="34" charset="-120"/>
               </a:rPr>
+              <a:t>电控</a:t>
+            </a:r>
+            <a:endParaRPr lang="en-US" sz="1800" dirty="0"/>
+          </a:p>
+        </p:txBody>
+      </p:sp>
+      <p:sp>
+        <p:nvSpPr>
+          <p:cNvPr id="12" name="Text 10"/>
+          <p:cNvSpPr txBox="1"/>
+          <p:nvPr/>
+        </p:nvSpPr>
+        <p:spPr>
+          <a:xfrm>
+            <a:off x="4368698" y="2788920"/>
+            <a:ext cx="3454298" cy="3017520"/>
+          </a:xfrm>
+          <a:prstGeom prst="rect">
+            <a:avLst/>
+          </a:prstGeom>
+          <a:noFill/>
+          <a:ln/>
+        </p:spPr>
+        <p:txBody>
+          <a:bodyPr wrap="square" lIns="0" tIns="0" rIns="0" bIns="0" rtlCol="0" anchor="t"/>
+          <a:lstStyle/>
+          <a:p>
+            <a:pPr indent="0" marL="0">
+              <a:lnSpc>
+                <a:spcPct val="130000"/>
+              </a:lnSpc>
+              <a:buNone/>
+            </a:pPr>
+            <a:r>
+              <a:rPr lang="en-US" sz="1300" dirty="0">
+                <a:solidFill>
+                  <a:srgbClr val="6A6458"/>
+                </a:solidFill>
+                <a:latin typeface="Microsoft YaHei" pitchFamily="34" charset="0"/>
+                <a:ea typeface="Microsoft YaHei" pitchFamily="34" charset="-122"/>
+                <a:cs typeface="Microsoft YaHei" pitchFamily="34" charset="-120"/>
+              </a:rPr>
+              <a:t>〔该部分的目标、分工与时间安排〕</a:t>
+            </a:r>
+            <a:endParaRPr lang="en-US" sz="1300" dirty="0"/>
+          </a:p>
+        </p:txBody>
+      </p:sp>
+      <p:sp>
+        <p:nvSpPr>
+          <p:cNvPr id="13" name="Shape 11"/>
+          <p:cNvSpPr/>
+          <p:nvPr/>
+        </p:nvSpPr>
+        <p:spPr>
+          <a:xfrm>
+            <a:off x="8188757" y="1783080"/>
+            <a:ext cx="3454298" cy="32004"/>
+          </a:xfrm>
+          <a:prstGeom prst="rect">
+            <a:avLst/>
+          </a:prstGeom>
+          <a:solidFill>
+            <a:srgbClr val="26231E"/>
+          </a:solidFill>
+          <a:ln w="12700">
+            <a:solidFill>
+              <a:srgbClr val="26231E"/>
+            </a:solidFill>
+            <a:prstDash val="solid"/>
+          </a:ln>
+        </p:spPr>
+      </p:sp>
+      <p:sp>
+        <p:nvSpPr>
+          <p:cNvPr id="14" name="Text 12"/>
+          <p:cNvSpPr txBox="1"/>
+          <p:nvPr/>
+        </p:nvSpPr>
+        <p:spPr>
+          <a:xfrm>
+            <a:off x="8188757" y="1947672"/>
+            <a:ext cx="914400" cy="365760"/>
+          </a:xfrm>
+          <a:prstGeom prst="rect">
+            <a:avLst/>
+          </a:prstGeom>
+          <a:noFill/>
+          <a:ln/>
+        </p:spPr>
+        <p:txBody>
+          <a:bodyPr wrap="square" lIns="0" tIns="0" rIns="0" bIns="0" rtlCol="0" anchor="t"/>
+          <a:lstStyle/>
+          <a:p>
+            <a:pPr indent="0" marL="0">
+              <a:buNone/>
+            </a:pPr>
+            <a:r>
+              <a:rPr lang="en-US" sz="1600" b="1" dirty="0">
+                <a:solidFill>
+                  <a:srgbClr val="26231E"/>
+                </a:solidFill>
+                <a:latin typeface="Bahnschrift" pitchFamily="34" charset="0"/>
+                <a:ea typeface="Bahnschrift" pitchFamily="34" charset="-122"/>
+                <a:cs typeface="Bahnschrift" pitchFamily="34" charset="-120"/>
+              </a:rPr>
+              <a:t>03</a:t>
+            </a:r>
+            <a:endParaRPr lang="en-US" sz="1600" dirty="0"/>
+          </a:p>
+        </p:txBody>
+      </p:sp>
+      <p:sp>
+        <p:nvSpPr>
+          <p:cNvPr id="15" name="Text 13"/>
+          <p:cNvSpPr txBox="1"/>
+          <p:nvPr/>
+        </p:nvSpPr>
+        <p:spPr>
+          <a:xfrm>
+            <a:off x="8188757" y="2331720"/>
+            <a:ext cx="3454298" cy="411480"/>
+          </a:xfrm>
+          <a:prstGeom prst="rect">
+            <a:avLst/>
+          </a:prstGeom>
+          <a:noFill/>
+          <a:ln/>
+        </p:spPr>
+        <p:txBody>
+          <a:bodyPr wrap="square" lIns="0" tIns="0" rIns="0" bIns="0" rtlCol="0" anchor="t"/>
+          <a:lstStyle/>
+          <a:p>
+            <a:pPr indent="0" marL="0">
+              <a:buNone/>
+            </a:pPr>
+            <a:r>
+              <a:rPr lang="en-US" sz="1800" b="1" dirty="0">
+                <a:solidFill>
+                  <a:srgbClr val="26231E"/>
+                </a:solidFill>
+                <a:latin typeface="Microsoft YaHei" pitchFamily="34" charset="0"/>
+                <a:ea typeface="Microsoft YaHei" pitchFamily="34" charset="-122"/>
+                <a:cs typeface="Microsoft YaHei" pitchFamily="34" charset="-120"/>
+              </a:rPr>
               <a:t>软件</a:t>
             </a:r>
             <a:endParaRPr lang="en-US" sz="1800" dirty="0"/>
@@ -15625,7 +16078,7 @@
       </p:sp>
       <p:sp>
         <p:nvSpPr>
-          <p:cNvPr id="15" name="Text 13"/>
+          <p:cNvPr id="16" name="Text 14"/>
           <p:cNvSpPr txBox="1"/>
           <p:nvPr/>
         </p:nvSpPr>
@@ -15927,8 +16380,8 @@
         </p:nvSpPr>
         <p:spPr>
           <a:xfrm>
-            <a:off x="548640" y="685800"/>
-            <a:ext cx="9082735" cy="685800"/>
+            <a:off x="548640" y="566928"/>
+            <a:ext cx="11094415" cy="685800"/>
           </a:xfrm>
           <a:prstGeom prst="rect">
             <a:avLst/>
@@ -15960,14 +16413,41 @@
       </p:sp>
       <p:sp>
         <p:nvSpPr>
-          <p:cNvPr id="3" name="Text 1"/>
-          <p:cNvSpPr txBox="1"/>
-          <p:nvPr/>
-        </p:nvSpPr>
-        <p:spPr>
-          <a:xfrm>
-            <a:off x="8899855" y="685800"/>
-            <a:ext cx="2743200" cy="685800"/>
+          <p:cNvPr id="3" name="Shape 1"/>
+          <p:cNvSpPr/>
+          <p:nvPr/>
+        </p:nvSpPr>
+        <p:spPr>
+          <a:xfrm>
+            <a:off x="2245360" y="699516"/>
+            <a:ext cx="9397695" cy="420624"/>
+          </a:xfrm>
+          <a:prstGeom prst="roundRect">
+            <a:avLst>
+              <a:gd name="adj" fmla="val 19565"/>
+            </a:avLst>
+          </a:prstGeom>
+          <a:solidFill>
+            <a:srgbClr val="26231E"/>
+          </a:solidFill>
+          <a:ln w="12700">
+            <a:solidFill>
+              <a:srgbClr val="26231E"/>
+            </a:solidFill>
+            <a:prstDash val="solid"/>
+          </a:ln>
+        </p:spPr>
+      </p:sp>
+      <p:sp>
+        <p:nvSpPr>
+          <p:cNvPr id="4" name="Text 2"/>
+          <p:cNvSpPr txBox="1"/>
+          <p:nvPr/>
+        </p:nvSpPr>
+        <p:spPr>
+          <a:xfrm>
+            <a:off x="2245360" y="699516"/>
+            <a:ext cx="9196527" cy="420624"/>
           </a:xfrm>
           <a:prstGeom prst="rect">
             <a:avLst/>
@@ -15985,7 +16465,7 @@
             <a:r>
               <a:rPr lang="en-US" sz="1300" b="1" dirty="0">
                 <a:solidFill>
-                  <a:srgbClr val="26231E"/>
+                  <a:srgbClr val="D9A441"/>
                 </a:solidFill>
                 <a:latin typeface="Bahnschrift" pitchFamily="34" charset="0"/>
                 <a:ea typeface="Bahnschrift" pitchFamily="34" charset="-122"/>
@@ -15999,7 +16479,7 @@
             <a:r>
               <a:rPr lang="en-US" sz="1300" dirty="0">
                 <a:solidFill>
-                  <a:srgbClr val="6A6458"/>
+                  <a:srgbClr val="FBFAF7"/>
                 </a:solidFill>
                 <a:latin typeface="Microsoft YaHei" pitchFamily="34" charset="0"/>
                 <a:ea typeface="Microsoft YaHei" pitchFamily="34" charset="-122"/>
@@ -16013,7 +16493,7 @@
       </p:sp>
       <p:sp>
         <p:nvSpPr>
-          <p:cNvPr id="4" name="Text 2"/>
+          <p:cNvPr id="5" name="Text 3"/>
           <p:cNvSpPr txBox="1"/>
           <p:nvPr/>
         </p:nvSpPr>
@@ -16052,7 +16532,7 @@
       </p:sp>
       <p:sp>
         <p:nvSpPr>
-          <p:cNvPr id="5" name="Text 3"/>
+          <p:cNvPr id="6" name="Text 4"/>
           <p:cNvSpPr txBox="1"/>
           <p:nvPr/>
         </p:nvSpPr>
@@ -16091,7 +16571,7 @@
       </p:sp>
       <p:sp>
         <p:nvSpPr>
-          <p:cNvPr id="6" name="Text 4"/>
+          <p:cNvPr id="7" name="Text 5"/>
           <p:cNvSpPr txBox="1"/>
           <p:nvPr/>
         </p:nvSpPr>
@@ -16133,7 +16613,7 @@
       </p:sp>
       <p:sp>
         <p:nvSpPr>
-          <p:cNvPr id="7" name="Shape 5"/>
+          <p:cNvPr id="8" name="Shape 6"/>
           <p:cNvSpPr/>
           <p:nvPr/>
         </p:nvSpPr>
@@ -16156,7 +16636,7 @@
       </p:sp>
       <p:sp>
         <p:nvSpPr>
-          <p:cNvPr id="8" name="Text 6"/>
+          <p:cNvPr id="9" name="Text 7"/>
           <p:cNvSpPr txBox="1"/>
           <p:nvPr/>
         </p:nvSpPr>
@@ -16195,7 +16675,7 @@
       </p:sp>
       <p:sp>
         <p:nvSpPr>
-          <p:cNvPr id="9" name="Text 7"/>
+          <p:cNvPr id="10" name="Text 8"/>
           <p:cNvSpPr txBox="1"/>
           <p:nvPr/>
         </p:nvSpPr>
@@ -16234,7 +16714,7 @@
       </p:sp>
       <p:sp>
         <p:nvSpPr>
-          <p:cNvPr id="10" name="Text 8"/>
+          <p:cNvPr id="11" name="Text 9"/>
           <p:cNvSpPr txBox="1"/>
           <p:nvPr/>
         </p:nvSpPr>
@@ -16276,7 +16756,7 @@
       </p:sp>
       <p:sp>
         <p:nvSpPr>
-          <p:cNvPr id="11" name="Shape 9"/>
+          <p:cNvPr id="12" name="Shape 10"/>
           <p:cNvSpPr/>
           <p:nvPr/>
         </p:nvSpPr>
@@ -16299,7 +16779,7 @@
       </p:sp>
       <p:sp>
         <p:nvSpPr>
-          <p:cNvPr id="12" name="Text 10"/>
+          <p:cNvPr id="13" name="Text 11"/>
           <p:cNvSpPr txBox="1"/>
           <p:nvPr/>
         </p:nvSpPr>
@@ -16338,7 +16818,7 @@
       </p:sp>
       <p:sp>
         <p:nvSpPr>
-          <p:cNvPr id="13" name="Text 11"/>
+          <p:cNvPr id="14" name="Text 12"/>
           <p:cNvSpPr txBox="1"/>
           <p:nvPr/>
         </p:nvSpPr>
@@ -16377,7 +16857,7 @@
       </p:sp>
       <p:sp>
         <p:nvSpPr>
-          <p:cNvPr id="14" name="Text 12"/>
+          <p:cNvPr id="15" name="Text 13"/>
           <p:cNvSpPr txBox="1"/>
           <p:nvPr/>
         </p:nvSpPr>
